--- a/downloads/presentations/modules/lesson-18-fhir-for-public-health-ai-use-cases.pptx
+++ b/downloads/presentations/modules/lesson-18-fhir-for-public-health-ai-use-cases.pptx
@@ -3088,6 +3088,45 @@
           </a:p>
         </p:txBody>
       </p:sp>
+      <p:sp>
+        <p:nvSpPr>
+          <p:cNvPr id="8" name="Text 5"/>
+          <p:cNvSpPr/>
+          <p:nvPr/>
+        </p:nvSpPr>
+        <p:spPr>
+          <a:xfrm>
+            <a:off x="11137392" y="6510528"/>
+            <a:ext cx="411480" cy="201168"/>
+          </a:xfrm>
+          <a:prstGeom prst="rect">
+            <a:avLst/>
+          </a:prstGeom>
+          <a:noFill/>
+          <a:ln/>
+        </p:spPr>
+        <p:txBody>
+          <a:bodyPr wrap="square" lIns="0" tIns="0" rIns="0" bIns="0" rtlCol="0" anchor="ctr"/>
+          <a:lstStyle/>
+          <a:p>
+            <a:pPr algn="r" indent="0" marL="0">
+              <a:buNone/>
+            </a:pPr>
+            <a:r>
+              <a:rPr lang="en-US" sz="900" dirty="0">
+                <a:solidFill>
+                  <a:srgbClr val="5F7181"/>
+                </a:solidFill>
+                <a:latin typeface="Aptos" pitchFamily="34" charset="0"/>
+                <a:ea typeface="Aptos" pitchFamily="34" charset="-122"/>
+                <a:cs typeface="Aptos" pitchFamily="34" charset="-120"/>
+              </a:rPr>
+              <a:t>1</a:t>
+            </a:r>
+            <a:endParaRPr lang="en-US" sz="900" dirty="0"/>
+          </a:p>
+        </p:txBody>
+      </p:sp>
     </p:spTree>
   </p:cSld>
   <p:clrMapOvr>
@@ -3281,7 +3320,7 @@
                 <a:ea typeface="Aptos" pitchFamily="34" charset="-122"/>
                 <a:cs typeface="Aptos" pitchFamily="34" charset="-120"/>
               </a:rPr>
-              <a:t>© Paula Soper</a:t>
+              <a:t>Â© Paula Soper</a:t>
             </a:r>
             <a:endParaRPr lang="en-US" sz="800" dirty="0"/>
           </a:p>
@@ -3295,8 +3334,47 @@
         </p:nvSpPr>
         <p:spPr>
           <a:xfrm>
+            <a:off x="11137392" y="6510528"/>
+            <a:ext cx="411480" cy="201168"/>
+          </a:xfrm>
+          <a:prstGeom prst="rect">
+            <a:avLst/>
+          </a:prstGeom>
+          <a:noFill/>
+          <a:ln/>
+        </p:spPr>
+        <p:txBody>
+          <a:bodyPr wrap="square" lIns="0" tIns="0" rIns="0" bIns="0" rtlCol="0" anchor="ctr"/>
+          <a:lstStyle/>
+          <a:p>
+            <a:pPr algn="r" indent="0" marL="0">
+              <a:buNone/>
+            </a:pPr>
+            <a:r>
+              <a:rPr lang="en-US" sz="900" dirty="0">
+                <a:solidFill>
+                  <a:srgbClr val="5F7181"/>
+                </a:solidFill>
+                <a:latin typeface="Aptos" pitchFamily="34" charset="0"/>
+                <a:ea typeface="Aptos" pitchFamily="34" charset="-122"/>
+                <a:cs typeface="Aptos" pitchFamily="34" charset="-120"/>
+              </a:rPr>
+              <a:t>10</a:t>
+            </a:r>
+            <a:endParaRPr lang="en-US" sz="900" dirty="0"/>
+          </a:p>
+        </p:txBody>
+      </p:sp>
+      <p:sp>
+        <p:nvSpPr>
+          <p:cNvPr id="8" name="Text 6"/>
+          <p:cNvSpPr/>
+          <p:nvPr/>
+        </p:nvSpPr>
+        <p:spPr>
+          <a:xfrm>
             <a:off x="640080" y="658368"/>
-            <a:ext cx="10881360" cy="566928"/>
+            <a:ext cx="10881360" cy="713232"/>
           </a:xfrm>
           <a:prstGeom prst="rect">
             <a:avLst/>
@@ -3314,7 +3392,7 @@
               <a:buNone/>
             </a:pPr>
             <a:r>
-              <a:rPr lang="en-US" sz="2700" b="1" dirty="0">
+              <a:rPr lang="en-US" sz="3400" b="1" dirty="0">
                 <a:solidFill>
                   <a:srgbClr val="003A63"/>
                 </a:solidFill>
@@ -3324,20 +3402,20 @@
               </a:rPr>
               <a:t>Core Concepts Continued</a:t>
             </a:r>
-            <a:endParaRPr lang="en-US" sz="2700" dirty="0"/>
-          </a:p>
-        </p:txBody>
-      </p:sp>
-      <p:sp>
-        <p:nvSpPr>
-          <p:cNvPr id="8" name="Text 6"/>
-          <p:cNvSpPr/>
-          <p:nvPr/>
-        </p:nvSpPr>
-        <p:spPr>
-          <a:xfrm>
-            <a:off x="868680" y="1417320"/>
-            <a:ext cx="6675120" cy="4434840"/>
+            <a:endParaRPr lang="en-US" sz="3400" dirty="0"/>
+          </a:p>
+        </p:txBody>
+      </p:sp>
+      <p:sp>
+        <p:nvSpPr>
+          <p:cNvPr id="9" name="Text 7"/>
+          <p:cNvSpPr/>
+          <p:nvPr/>
+        </p:nvSpPr>
+        <p:spPr>
+          <a:xfrm>
+            <a:off x="868680" y="1508760"/>
+            <a:ext cx="6537960" cy="4160520"/>
           </a:xfrm>
           <a:prstGeom prst="rect">
             <a:avLst/>
@@ -3352,7 +3430,7 @@
           <a:lstStyle/>
           <a:p>
             <a:r>
-              <a:rPr lang="en-US" sz="1700" dirty="0">
+              <a:rPr lang="en-US" sz="2100" dirty="0">
                 <a:solidFill>
                   <a:srgbClr val="17364A"/>
                 </a:solidFill>
@@ -3362,11 +3440,11 @@
               </a:rPr>
               <a:t>US Core.</a:t>
             </a:r>
-            <a:endParaRPr lang="en-US" sz="1700" dirty="0"/>
-          </a:p>
-          <a:p>
-            <a:r>
-              <a:rPr lang="en-US" sz="1700" dirty="0">
+            <a:endParaRPr lang="en-US" sz="2100" dirty="0"/>
+          </a:p>
+          <a:p>
+            <a:r>
+              <a:rPr lang="en-US" sz="2100" dirty="0">
                 <a:solidFill>
                   <a:srgbClr val="17364A"/>
                 </a:solidFill>
@@ -3376,11 +3454,11 @@
               </a:rPr>
               <a:t>US Core defines profiles for core U.S. clinical data exchange.</a:t>
             </a:r>
-            <a:endParaRPr lang="en-US" sz="1700" dirty="0"/>
-          </a:p>
-          <a:p>
-            <a:r>
-              <a:rPr lang="en-US" sz="1700" dirty="0">
+            <a:endParaRPr lang="en-US" sz="2100" dirty="0"/>
+          </a:p>
+          <a:p>
+            <a:r>
+              <a:rPr lang="en-US" sz="2100" dirty="0">
                 <a:solidFill>
                   <a:srgbClr val="17364A"/>
                 </a:solidFill>
@@ -3388,29 +3466,15 @@
                 <a:ea typeface="Aptos" pitchFamily="34" charset="-122"/>
                 <a:cs typeface="Aptos" pitchFamily="34" charset="-120"/>
               </a:rPr>
-              <a:t>It can support common data access patterns, but public health workflows may require additional public health-specific.</a:t>
-            </a:r>
-            <a:endParaRPr lang="en-US" sz="1700" dirty="0"/>
-          </a:p>
-          <a:p>
-            <a:r>
-              <a:rPr lang="en-US" sz="1700" dirty="0">
-                <a:solidFill>
-                  <a:srgbClr val="17364A"/>
-                </a:solidFill>
-                <a:latin typeface="Aptos" pitchFamily="34" charset="0"/>
-                <a:ea typeface="Aptos" pitchFamily="34" charset="-122"/>
-                <a:cs typeface="Aptos" pitchFamily="34" charset="-120"/>
-              </a:rPr>
-              <a:t>Implementation guide.</a:t>
-            </a:r>
-            <a:endParaRPr lang="en-US" sz="1700" dirty="0"/>
-          </a:p>
-        </p:txBody>
-      </p:sp>
-      <p:sp>
-        <p:nvSpPr>
-          <p:cNvPr id="9" name="Shape 7"/>
+              <a:t>It can support common data access patterns, but public health workflows may require additional public.</a:t>
+            </a:r>
+            <a:endParaRPr lang="en-US" sz="2100" dirty="0"/>
+          </a:p>
+        </p:txBody>
+      </p:sp>
+      <p:sp>
+        <p:nvSpPr>
+          <p:cNvPr id="10" name="Shape 8"/>
           <p:cNvSpPr/>
           <p:nvPr/>
         </p:nvSpPr>
@@ -3437,14 +3501,14 @@
       </p:sp>
       <p:sp>
         <p:nvSpPr>
-          <p:cNvPr id="10" name="Text 8"/>
+          <p:cNvPr id="11" name="Text 9"/>
           <p:cNvSpPr/>
           <p:nvPr/>
         </p:nvSpPr>
         <p:spPr>
           <a:xfrm>
             <a:off x="8074152" y="1563624"/>
-            <a:ext cx="2825496" cy="201168"/>
+            <a:ext cx="2825496" cy="256032"/>
           </a:xfrm>
           <a:prstGeom prst="rect">
             <a:avLst/>
@@ -3460,7 +3524,7 @@
               <a:buNone/>
             </a:pPr>
             <a:r>
-              <a:rPr lang="en-US" sz="950" b="1" dirty="0">
+              <a:rPr lang="en-US" sz="1300" b="1" dirty="0">
                 <a:solidFill>
                   <a:srgbClr val="0068B7"/>
                 </a:solidFill>
@@ -3470,20 +3534,20 @@
               </a:rPr>
               <a:t>Key idea</a:t>
             </a:r>
-            <a:endParaRPr lang="en-US" sz="950" dirty="0"/>
-          </a:p>
-        </p:txBody>
-      </p:sp>
-      <p:sp>
-        <p:nvSpPr>
-          <p:cNvPr id="11" name="Text 9"/>
-          <p:cNvSpPr/>
-          <p:nvPr/>
-        </p:nvSpPr>
-        <p:spPr>
-          <a:xfrm>
-            <a:off x="8074152" y="1856232"/>
-            <a:ext cx="2825496" cy="1261872"/>
+            <a:endParaRPr lang="en-US" sz="1300" dirty="0"/>
+          </a:p>
+        </p:txBody>
+      </p:sp>
+      <p:sp>
+        <p:nvSpPr>
+          <p:cNvPr id="12" name="Text 10"/>
+          <p:cNvSpPr/>
+          <p:nvPr/>
+        </p:nvSpPr>
+        <p:spPr>
+          <a:xfrm>
+            <a:off x="8074152" y="1920240"/>
+            <a:ext cx="2825496" cy="1188720"/>
           </a:xfrm>
           <a:prstGeom prst="rect">
             <a:avLst/>
@@ -3501,7 +3565,7 @@
               <a:buNone/>
             </a:pPr>
             <a:r>
-              <a:rPr lang="en-US" sz="1250" dirty="0">
+              <a:rPr lang="en-US" sz="1550" dirty="0">
                 <a:solidFill>
                   <a:srgbClr val="17364A"/>
                 </a:solidFill>
@@ -3511,13 +3575,13 @@
               </a:rPr>
               <a:t>US Core.</a:t>
             </a:r>
-            <a:endParaRPr lang="en-US" sz="1250" dirty="0"/>
-          </a:p>
-        </p:txBody>
-      </p:sp>
-      <p:sp>
-        <p:nvSpPr>
-          <p:cNvPr id="12" name="Shape 10"/>
+            <a:endParaRPr lang="en-US" sz="1550" dirty="0"/>
+          </a:p>
+        </p:txBody>
+      </p:sp>
+      <p:sp>
+        <p:nvSpPr>
+          <p:cNvPr id="13" name="Shape 11"/>
           <p:cNvSpPr/>
           <p:nvPr/>
         </p:nvSpPr>
@@ -3544,14 +3608,14 @@
       </p:sp>
       <p:sp>
         <p:nvSpPr>
-          <p:cNvPr id="13" name="Text 11"/>
+          <p:cNvPr id="14" name="Text 12"/>
           <p:cNvSpPr/>
           <p:nvPr/>
         </p:nvSpPr>
         <p:spPr>
           <a:xfrm>
             <a:off x="8074152" y="3666744"/>
-            <a:ext cx="2825496" cy="201168"/>
+            <a:ext cx="2825496" cy="256032"/>
           </a:xfrm>
           <a:prstGeom prst="rect">
             <a:avLst/>
@@ -3567,7 +3631,7 @@
               <a:buNone/>
             </a:pPr>
             <a:r>
-              <a:rPr lang="en-US" sz="950" b="1" dirty="0">
+              <a:rPr lang="en-US" sz="1300" b="1" dirty="0">
                 <a:solidFill>
                   <a:srgbClr val="0068B7"/>
                 </a:solidFill>
@@ -3577,20 +3641,20 @@
               </a:rPr>
               <a:t>Use this for</a:t>
             </a:r>
-            <a:endParaRPr lang="en-US" sz="950" dirty="0"/>
-          </a:p>
-        </p:txBody>
-      </p:sp>
-      <p:sp>
-        <p:nvSpPr>
-          <p:cNvPr id="14" name="Text 12"/>
-          <p:cNvSpPr/>
-          <p:nvPr/>
-        </p:nvSpPr>
-        <p:spPr>
-          <a:xfrm>
-            <a:off x="8074152" y="3959352"/>
-            <a:ext cx="2825496" cy="1170432"/>
+            <a:endParaRPr lang="en-US" sz="1300" dirty="0"/>
+          </a:p>
+        </p:txBody>
+      </p:sp>
+      <p:sp>
+        <p:nvSpPr>
+          <p:cNvPr id="15" name="Text 13"/>
+          <p:cNvSpPr/>
+          <p:nvPr/>
+        </p:nvSpPr>
+        <p:spPr>
+          <a:xfrm>
+            <a:off x="8074152" y="4023360"/>
+            <a:ext cx="2825496" cy="1097280"/>
           </a:xfrm>
           <a:prstGeom prst="rect">
             <a:avLst/>
@@ -3608,7 +3672,7 @@
               <a:buNone/>
             </a:pPr>
             <a:r>
-              <a:rPr lang="en-US" sz="1250" dirty="0">
+              <a:rPr lang="en-US" sz="1550" dirty="0">
                 <a:solidFill>
                   <a:srgbClr val="17364A"/>
                 </a:solidFill>
@@ -3618,7 +3682,7 @@
               </a:rPr>
               <a:t>Connect the concept to public health decisions, safeguards, documentation, or implementation work.</a:t>
             </a:r>
-            <a:endParaRPr lang="en-US" sz="1250" dirty="0"/>
+            <a:endParaRPr lang="en-US" sz="1550" dirty="0"/>
           </a:p>
         </p:txBody>
       </p:sp>
@@ -3815,7 +3879,7 @@
                 <a:ea typeface="Aptos" pitchFamily="34" charset="-122"/>
                 <a:cs typeface="Aptos" pitchFamily="34" charset="-120"/>
               </a:rPr>
-              <a:t>© Paula Soper</a:t>
+              <a:t>Â© Paula Soper</a:t>
             </a:r>
             <a:endParaRPr lang="en-US" sz="800" dirty="0"/>
           </a:p>
@@ -3823,7 +3887,46 @@
       </p:sp>
       <p:sp>
         <p:nvSpPr>
-          <p:cNvPr id="7" name="Shape 5"/>
+          <p:cNvPr id="7" name="Text 5"/>
+          <p:cNvSpPr/>
+          <p:nvPr/>
+        </p:nvSpPr>
+        <p:spPr>
+          <a:xfrm>
+            <a:off x="11137392" y="6510528"/>
+            <a:ext cx="411480" cy="201168"/>
+          </a:xfrm>
+          <a:prstGeom prst="rect">
+            <a:avLst/>
+          </a:prstGeom>
+          <a:noFill/>
+          <a:ln/>
+        </p:spPr>
+        <p:txBody>
+          <a:bodyPr wrap="square" lIns="0" tIns="0" rIns="0" bIns="0" rtlCol="0" anchor="ctr"/>
+          <a:lstStyle/>
+          <a:p>
+            <a:pPr algn="r" indent="0" marL="0">
+              <a:buNone/>
+            </a:pPr>
+            <a:r>
+              <a:rPr lang="en-US" sz="900" dirty="0">
+                <a:solidFill>
+                  <a:srgbClr val="5F7181"/>
+                </a:solidFill>
+                <a:latin typeface="Aptos" pitchFamily="34" charset="0"/>
+                <a:ea typeface="Aptos" pitchFamily="34" charset="-122"/>
+                <a:cs typeface="Aptos" pitchFamily="34" charset="-120"/>
+              </a:rPr>
+              <a:t>11</a:t>
+            </a:r>
+            <a:endParaRPr lang="en-US" sz="900" dirty="0"/>
+          </a:p>
+        </p:txBody>
+      </p:sp>
+      <p:sp>
+        <p:nvSpPr>
+          <p:cNvPr id="8" name="Shape 6"/>
           <p:cNvSpPr/>
           <p:nvPr/>
         </p:nvSpPr>
@@ -3848,7 +3951,7 @@
       </p:sp>
       <p:sp>
         <p:nvSpPr>
-          <p:cNvPr id="8" name="Text 6"/>
+          <p:cNvPr id="9" name="Text 7"/>
           <p:cNvSpPr/>
           <p:nvPr/>
         </p:nvSpPr>
@@ -3887,14 +3990,14 @@
       </p:sp>
       <p:sp>
         <p:nvSpPr>
-          <p:cNvPr id="9" name="Text 7"/>
+          <p:cNvPr id="10" name="Text 8"/>
           <p:cNvSpPr/>
           <p:nvPr/>
         </p:nvSpPr>
         <p:spPr>
           <a:xfrm>
             <a:off x="640080" y="621792"/>
-            <a:ext cx="10881360" cy="566928"/>
+            <a:ext cx="10881360" cy="713232"/>
           </a:xfrm>
           <a:prstGeom prst="rect">
             <a:avLst/>
@@ -3912,7 +4015,7 @@
               <a:buNone/>
             </a:pPr>
             <a:r>
-              <a:rPr lang="en-US" sz="2700" b="1" dirty="0">
+              <a:rPr lang="en-US" sz="3400" b="1" dirty="0">
                 <a:solidFill>
                   <a:srgbClr val="003A63"/>
                 </a:solidFill>
@@ -3922,20 +4025,20 @@
               </a:rPr>
               <a:t>Public Health Example</a:t>
             </a:r>
-            <a:endParaRPr lang="en-US" sz="2700" dirty="0"/>
-          </a:p>
-        </p:txBody>
-      </p:sp>
-      <p:sp>
-        <p:nvSpPr>
-          <p:cNvPr id="10" name="Text 8"/>
-          <p:cNvSpPr/>
-          <p:nvPr/>
-        </p:nvSpPr>
-        <p:spPr>
-          <a:xfrm>
-            <a:off x="868680" y="1417320"/>
-            <a:ext cx="6675120" cy="4434840"/>
+            <a:endParaRPr lang="en-US" sz="3400" dirty="0"/>
+          </a:p>
+        </p:txBody>
+      </p:sp>
+      <p:sp>
+        <p:nvSpPr>
+          <p:cNvPr id="11" name="Text 9"/>
+          <p:cNvSpPr/>
+          <p:nvPr/>
+        </p:nvSpPr>
+        <p:spPr>
+          <a:xfrm>
+            <a:off x="868680" y="1508760"/>
+            <a:ext cx="6537960" cy="4160520"/>
           </a:xfrm>
           <a:prstGeom prst="rect">
             <a:avLst/>
@@ -3950,7 +4053,7 @@
           <a:lstStyle/>
           <a:p>
             <a:r>
-              <a:rPr lang="en-US" sz="1700" dirty="0">
+              <a:rPr lang="en-US" sz="2100" dirty="0">
                 <a:solidFill>
                   <a:srgbClr val="17364A"/>
                 </a:solidFill>
@@ -3960,11 +4063,11 @@
               </a:rPr>
               <a:t>A health department may want an AI tool to summarize relevant EHR information for a case investigation.</a:t>
             </a:r>
-            <a:endParaRPr lang="en-US" sz="1700" dirty="0"/>
-          </a:p>
-          <a:p>
-            <a:r>
-              <a:rPr lang="en-US" sz="1700" dirty="0">
+            <a:endParaRPr lang="en-US" sz="2100" dirty="0"/>
+          </a:p>
+          <a:p>
+            <a:r>
+              <a:rPr lang="en-US" sz="2100" dirty="0">
                 <a:solidFill>
                   <a:srgbClr val="17364A"/>
                 </a:solidFill>
@@ -3972,13 +4075,13 @@
                 <a:ea typeface="Aptos" pitchFamily="34" charset="-122"/>
                 <a:cs typeface="Aptos" pitchFamily="34" charset="-120"/>
               </a:rPr>
-              <a:t>The tool might need Patient, Encounter, Condition, Observation, DiagnosticReport, MedicationRequest, and Practitioner or.</a:t>
-            </a:r>
-            <a:endParaRPr lang="en-US" sz="1700" dirty="0"/>
-          </a:p>
-          <a:p>
-            <a:r>
-              <a:rPr lang="en-US" sz="1700" dirty="0">
+              <a:t>The tool might need Patient, Encounter, Condition, Observation, DiagnosticReport, MedicationRequest,.</a:t>
+            </a:r>
+            <a:endParaRPr lang="en-US" sz="2100" dirty="0"/>
+          </a:p>
+          <a:p>
+            <a:r>
+              <a:rPr lang="en-US" sz="2100" dirty="0">
                 <a:solidFill>
                   <a:srgbClr val="17364A"/>
                 </a:solidFill>
@@ -3986,29 +4089,15 @@
                 <a:ea typeface="Aptos" pitchFamily="34" charset="-122"/>
                 <a:cs typeface="Aptos" pitchFamily="34" charset="-120"/>
               </a:rPr>
-              <a:t>Staff need to verify whether the source system can provide these resources, whether the data include required dates and.</a:t>
-            </a:r>
-            <a:endParaRPr lang="en-US" sz="1700" dirty="0"/>
-          </a:p>
-          <a:p>
-            <a:r>
-              <a:rPr lang="en-US" sz="1700" dirty="0">
-                <a:solidFill>
-                  <a:srgbClr val="17364A"/>
-                </a:solidFill>
-                <a:latin typeface="Aptos" pitchFamily="34" charset="0"/>
-                <a:ea typeface="Aptos" pitchFamily="34" charset="-122"/>
-                <a:cs typeface="Aptos" pitchFamily="34" charset="-120"/>
-              </a:rPr>
-              <a:t>An immunization use case may need Patient and Immunization resources, along with vaccine codes, dates, lot information, and.</a:t>
-            </a:r>
-            <a:endParaRPr lang="en-US" sz="1700" dirty="0"/>
-          </a:p>
-        </p:txBody>
-      </p:sp>
-      <p:sp>
-        <p:nvSpPr>
-          <p:cNvPr id="11" name="Shape 9"/>
+              <a:t>Staff need to verify whether the source system can provide these resources, whether the data include.</a:t>
+            </a:r>
+            <a:endParaRPr lang="en-US" sz="2100" dirty="0"/>
+          </a:p>
+        </p:txBody>
+      </p:sp>
+      <p:sp>
+        <p:nvSpPr>
+          <p:cNvPr id="12" name="Shape 10"/>
           <p:cNvSpPr/>
           <p:nvPr/>
         </p:nvSpPr>
@@ -4035,14 +4124,14 @@
       </p:sp>
       <p:sp>
         <p:nvSpPr>
-          <p:cNvPr id="12" name="Text 10"/>
+          <p:cNvPr id="13" name="Text 11"/>
           <p:cNvSpPr/>
           <p:nvPr/>
         </p:nvSpPr>
         <p:spPr>
           <a:xfrm>
             <a:off x="8074152" y="1563624"/>
-            <a:ext cx="2825496" cy="201168"/>
+            <a:ext cx="2825496" cy="256032"/>
           </a:xfrm>
           <a:prstGeom prst="rect">
             <a:avLst/>
@@ -4058,7 +4147,7 @@
               <a:buNone/>
             </a:pPr>
             <a:r>
-              <a:rPr lang="en-US" sz="950" b="1" dirty="0">
+              <a:rPr lang="en-US" sz="1300" b="1" dirty="0">
                 <a:solidFill>
                   <a:srgbClr val="0068B7"/>
                 </a:solidFill>
@@ -4068,20 +4157,20 @@
               </a:rPr>
               <a:t>Key idea</a:t>
             </a:r>
-            <a:endParaRPr lang="en-US" sz="950" dirty="0"/>
-          </a:p>
-        </p:txBody>
-      </p:sp>
-      <p:sp>
-        <p:nvSpPr>
-          <p:cNvPr id="13" name="Text 11"/>
-          <p:cNvSpPr/>
-          <p:nvPr/>
-        </p:nvSpPr>
-        <p:spPr>
-          <a:xfrm>
-            <a:off x="8074152" y="1856232"/>
-            <a:ext cx="2825496" cy="1261872"/>
+            <a:endParaRPr lang="en-US" sz="1300" dirty="0"/>
+          </a:p>
+        </p:txBody>
+      </p:sp>
+      <p:sp>
+        <p:nvSpPr>
+          <p:cNvPr id="14" name="Text 12"/>
+          <p:cNvSpPr/>
+          <p:nvPr/>
+        </p:nvSpPr>
+        <p:spPr>
+          <a:xfrm>
+            <a:off x="8074152" y="1920240"/>
+            <a:ext cx="2825496" cy="1188720"/>
           </a:xfrm>
           <a:prstGeom prst="rect">
             <a:avLst/>
@@ -4099,7 +4188,7 @@
               <a:buNone/>
             </a:pPr>
             <a:r>
-              <a:rPr lang="en-US" sz="1250" dirty="0">
+              <a:rPr lang="en-US" sz="1550" dirty="0">
                 <a:solidFill>
                   <a:srgbClr val="17364A"/>
                 </a:solidFill>
@@ -4109,13 +4198,13 @@
               </a:rPr>
               <a:t>A health department may want an AI tool to summarize relevant EHR information for a case investigation.</a:t>
             </a:r>
-            <a:endParaRPr lang="en-US" sz="1250" dirty="0"/>
-          </a:p>
-        </p:txBody>
-      </p:sp>
-      <p:sp>
-        <p:nvSpPr>
-          <p:cNvPr id="14" name="Shape 12"/>
+            <a:endParaRPr lang="en-US" sz="1550" dirty="0"/>
+          </a:p>
+        </p:txBody>
+      </p:sp>
+      <p:sp>
+        <p:nvSpPr>
+          <p:cNvPr id="15" name="Shape 13"/>
           <p:cNvSpPr/>
           <p:nvPr/>
         </p:nvSpPr>
@@ -4142,14 +4231,14 @@
       </p:sp>
       <p:sp>
         <p:nvSpPr>
-          <p:cNvPr id="15" name="Text 13"/>
+          <p:cNvPr id="16" name="Text 14"/>
           <p:cNvSpPr/>
           <p:nvPr/>
         </p:nvSpPr>
         <p:spPr>
           <a:xfrm>
             <a:off x="8074152" y="3666744"/>
-            <a:ext cx="2825496" cy="201168"/>
+            <a:ext cx="2825496" cy="256032"/>
           </a:xfrm>
           <a:prstGeom prst="rect">
             <a:avLst/>
@@ -4165,7 +4254,7 @@
               <a:buNone/>
             </a:pPr>
             <a:r>
-              <a:rPr lang="en-US" sz="950" b="1" dirty="0">
+              <a:rPr lang="en-US" sz="1300" b="1" dirty="0">
                 <a:solidFill>
                   <a:srgbClr val="0068B7"/>
                 </a:solidFill>
@@ -4175,20 +4264,20 @@
               </a:rPr>
               <a:t>Use this for</a:t>
             </a:r>
-            <a:endParaRPr lang="en-US" sz="950" dirty="0"/>
-          </a:p>
-        </p:txBody>
-      </p:sp>
-      <p:sp>
-        <p:nvSpPr>
-          <p:cNvPr id="16" name="Text 14"/>
-          <p:cNvSpPr/>
-          <p:nvPr/>
-        </p:nvSpPr>
-        <p:spPr>
-          <a:xfrm>
-            <a:off x="8074152" y="3959352"/>
-            <a:ext cx="2825496" cy="1170432"/>
+            <a:endParaRPr lang="en-US" sz="1300" dirty="0"/>
+          </a:p>
+        </p:txBody>
+      </p:sp>
+      <p:sp>
+        <p:nvSpPr>
+          <p:cNvPr id="17" name="Text 15"/>
+          <p:cNvSpPr/>
+          <p:nvPr/>
+        </p:nvSpPr>
+        <p:spPr>
+          <a:xfrm>
+            <a:off x="8074152" y="4023360"/>
+            <a:ext cx="2825496" cy="1097280"/>
           </a:xfrm>
           <a:prstGeom prst="rect">
             <a:avLst/>
@@ -4206,7 +4295,7 @@
               <a:buNone/>
             </a:pPr>
             <a:r>
-              <a:rPr lang="en-US" sz="1250" dirty="0">
+              <a:rPr lang="en-US" sz="1550" dirty="0">
                 <a:solidFill>
                   <a:srgbClr val="17364A"/>
                 </a:solidFill>
@@ -4216,7 +4305,7 @@
               </a:rPr>
               <a:t>Connect the concept to public health decisions, safeguards, documentation, or implementation work.</a:t>
             </a:r>
-            <a:endParaRPr lang="en-US" sz="1250" dirty="0"/>
+            <a:endParaRPr lang="en-US" sz="1550" dirty="0"/>
           </a:p>
         </p:txBody>
       </p:sp>
@@ -4413,7 +4502,7 @@
                 <a:ea typeface="Aptos" pitchFamily="34" charset="-122"/>
                 <a:cs typeface="Aptos" pitchFamily="34" charset="-120"/>
               </a:rPr>
-              <a:t>© Paula Soper</a:t>
+              <a:t>Â© Paula Soper</a:t>
             </a:r>
             <a:endParaRPr lang="en-US" sz="800" dirty="0"/>
           </a:p>
@@ -4421,7 +4510,46 @@
       </p:sp>
       <p:sp>
         <p:nvSpPr>
-          <p:cNvPr id="7" name="Shape 5"/>
+          <p:cNvPr id="7" name="Text 5"/>
+          <p:cNvSpPr/>
+          <p:nvPr/>
+        </p:nvSpPr>
+        <p:spPr>
+          <a:xfrm>
+            <a:off x="11137392" y="6510528"/>
+            <a:ext cx="411480" cy="201168"/>
+          </a:xfrm>
+          <a:prstGeom prst="rect">
+            <a:avLst/>
+          </a:prstGeom>
+          <a:noFill/>
+          <a:ln/>
+        </p:spPr>
+        <p:txBody>
+          <a:bodyPr wrap="square" lIns="0" tIns="0" rIns="0" bIns="0" rtlCol="0" anchor="ctr"/>
+          <a:lstStyle/>
+          <a:p>
+            <a:pPr algn="r" indent="0" marL="0">
+              <a:buNone/>
+            </a:pPr>
+            <a:r>
+              <a:rPr lang="en-US" sz="900" dirty="0">
+                <a:solidFill>
+                  <a:srgbClr val="5F7181"/>
+                </a:solidFill>
+                <a:latin typeface="Aptos" pitchFamily="34" charset="0"/>
+                <a:ea typeface="Aptos" pitchFamily="34" charset="-122"/>
+                <a:cs typeface="Aptos" pitchFamily="34" charset="-120"/>
+              </a:rPr>
+              <a:t>12</a:t>
+            </a:r>
+            <a:endParaRPr lang="en-US" sz="900" dirty="0"/>
+          </a:p>
+        </p:txBody>
+      </p:sp>
+      <p:sp>
+        <p:nvSpPr>
+          <p:cNvPr id="8" name="Shape 6"/>
           <p:cNvSpPr/>
           <p:nvPr/>
         </p:nvSpPr>
@@ -4446,7 +4574,7 @@
       </p:sp>
       <p:sp>
         <p:nvSpPr>
-          <p:cNvPr id="8" name="Text 6"/>
+          <p:cNvPr id="9" name="Text 7"/>
           <p:cNvSpPr/>
           <p:nvPr/>
         </p:nvSpPr>
@@ -4485,14 +4613,14 @@
       </p:sp>
       <p:sp>
         <p:nvSpPr>
-          <p:cNvPr id="9" name="Text 7"/>
+          <p:cNvPr id="10" name="Text 8"/>
           <p:cNvSpPr/>
           <p:nvPr/>
         </p:nvSpPr>
         <p:spPr>
           <a:xfrm>
             <a:off x="640080" y="621792"/>
-            <a:ext cx="10881360" cy="566928"/>
+            <a:ext cx="10881360" cy="713232"/>
           </a:xfrm>
           <a:prstGeom prst="rect">
             <a:avLst/>
@@ -4510,7 +4638,7 @@
               <a:buNone/>
             </a:pPr>
             <a:r>
-              <a:rPr lang="en-US" sz="2700" b="1" dirty="0">
+              <a:rPr lang="en-US" sz="3400" b="1" dirty="0">
                 <a:solidFill>
                   <a:srgbClr val="003A63"/>
                 </a:solidFill>
@@ -4520,20 +4648,20 @@
               </a:rPr>
               <a:t>Technical Deep Dive</a:t>
             </a:r>
-            <a:endParaRPr lang="en-US" sz="2700" dirty="0"/>
-          </a:p>
-        </p:txBody>
-      </p:sp>
-      <p:sp>
-        <p:nvSpPr>
-          <p:cNvPr id="10" name="Text 8"/>
-          <p:cNvSpPr/>
-          <p:nvPr/>
-        </p:nvSpPr>
-        <p:spPr>
-          <a:xfrm>
-            <a:off x="868680" y="1417320"/>
-            <a:ext cx="6675120" cy="4434840"/>
+            <a:endParaRPr lang="en-US" sz="3400" dirty="0"/>
+          </a:p>
+        </p:txBody>
+      </p:sp>
+      <p:sp>
+        <p:nvSpPr>
+          <p:cNvPr id="11" name="Text 9"/>
+          <p:cNvSpPr/>
+          <p:nvPr/>
+        </p:nvSpPr>
+        <p:spPr>
+          <a:xfrm>
+            <a:off x="868680" y="1508760"/>
+            <a:ext cx="6537960" cy="4160520"/>
           </a:xfrm>
           <a:prstGeom prst="rect">
             <a:avLst/>
@@ -4548,7 +4676,7 @@
           <a:lstStyle/>
           <a:p>
             <a:r>
-              <a:rPr lang="en-US" sz="1700" dirty="0">
+              <a:rPr lang="en-US" sz="2100" dirty="0">
                 <a:solidFill>
                   <a:srgbClr val="17364A"/>
                 </a:solidFill>
@@ -4558,11 +4686,11 @@
               </a:rPr>
               <a:t>FHIR planning should begin with the use case rather than the technology.</a:t>
             </a:r>
-            <a:endParaRPr lang="en-US" sz="1700" dirty="0"/>
-          </a:p>
-          <a:p>
-            <a:r>
-              <a:rPr lang="en-US" sz="1700" dirty="0">
+            <a:endParaRPr lang="en-US" sz="2100" dirty="0"/>
+          </a:p>
+          <a:p>
+            <a:r>
+              <a:rPr lang="en-US" sz="2100" dirty="0">
                 <a:solidFill>
                   <a:srgbClr val="17364A"/>
                 </a:solidFill>
@@ -4570,13 +4698,13 @@
                 <a:ea typeface="Aptos" pitchFamily="34" charset="-122"/>
                 <a:cs typeface="Aptos" pitchFamily="34" charset="-120"/>
               </a:rPr>
-              <a:t>Staff should identify the public health decision or task, the data elements required, the FHIR resources that may contain.</a:t>
-            </a:r>
-            <a:endParaRPr lang="en-US" sz="1700" dirty="0"/>
-          </a:p>
-          <a:p>
-            <a:r>
-              <a:rPr lang="en-US" sz="1700" dirty="0">
+              <a:t>Staff should identify the public health decision or task, the data elements required, the FHIR.</a:t>
+            </a:r>
+            <a:endParaRPr lang="en-US" sz="2100" dirty="0"/>
+          </a:p>
+          <a:p>
+            <a:r>
+              <a:rPr lang="en-US" sz="2100" dirty="0">
                 <a:solidFill>
                   <a:srgbClr val="17364A"/>
                 </a:solidFill>
@@ -4586,27 +4714,13 @@
               </a:rPr>
               <a:t>This prevents over-general claims about FHIR from substituting for a concrete data needs analysis.</a:t>
             </a:r>
-            <a:endParaRPr lang="en-US" sz="1700" dirty="0"/>
-          </a:p>
-          <a:p>
-            <a:r>
-              <a:rPr lang="en-US" sz="1700" dirty="0">
-                <a:solidFill>
-                  <a:srgbClr val="17364A"/>
-                </a:solidFill>
-                <a:latin typeface="Aptos" pitchFamily="34" charset="0"/>
-                <a:ea typeface="Aptos" pitchFamily="34" charset="-122"/>
-                <a:cs typeface="Aptos" pitchFamily="34" charset="-120"/>
-              </a:rPr>
-              <a:t>Profiles and implementation guides matter because general resources can be used in different ways.</a:t>
-            </a:r>
-            <a:endParaRPr lang="en-US" sz="1700" dirty="0"/>
-          </a:p>
-        </p:txBody>
-      </p:sp>
-      <p:sp>
-        <p:nvSpPr>
-          <p:cNvPr id="11" name="Shape 9"/>
+            <a:endParaRPr lang="en-US" sz="2100" dirty="0"/>
+          </a:p>
+        </p:txBody>
+      </p:sp>
+      <p:sp>
+        <p:nvSpPr>
+          <p:cNvPr id="12" name="Shape 10"/>
           <p:cNvSpPr/>
           <p:nvPr/>
         </p:nvSpPr>
@@ -4633,14 +4747,14 @@
       </p:sp>
       <p:sp>
         <p:nvSpPr>
-          <p:cNvPr id="12" name="Text 10"/>
+          <p:cNvPr id="13" name="Text 11"/>
           <p:cNvSpPr/>
           <p:nvPr/>
         </p:nvSpPr>
         <p:spPr>
           <a:xfrm>
             <a:off x="8074152" y="1563624"/>
-            <a:ext cx="2825496" cy="201168"/>
+            <a:ext cx="2825496" cy="256032"/>
           </a:xfrm>
           <a:prstGeom prst="rect">
             <a:avLst/>
@@ -4656,7 +4770,7 @@
               <a:buNone/>
             </a:pPr>
             <a:r>
-              <a:rPr lang="en-US" sz="950" b="1" dirty="0">
+              <a:rPr lang="en-US" sz="1300" b="1" dirty="0">
                 <a:solidFill>
                   <a:srgbClr val="0068B7"/>
                 </a:solidFill>
@@ -4666,20 +4780,20 @@
               </a:rPr>
               <a:t>Key idea</a:t>
             </a:r>
-            <a:endParaRPr lang="en-US" sz="950" dirty="0"/>
-          </a:p>
-        </p:txBody>
-      </p:sp>
-      <p:sp>
-        <p:nvSpPr>
-          <p:cNvPr id="13" name="Text 11"/>
-          <p:cNvSpPr/>
-          <p:nvPr/>
-        </p:nvSpPr>
-        <p:spPr>
-          <a:xfrm>
-            <a:off x="8074152" y="1856232"/>
-            <a:ext cx="2825496" cy="1261872"/>
+            <a:endParaRPr lang="en-US" sz="1300" dirty="0"/>
+          </a:p>
+        </p:txBody>
+      </p:sp>
+      <p:sp>
+        <p:nvSpPr>
+          <p:cNvPr id="14" name="Text 12"/>
+          <p:cNvSpPr/>
+          <p:nvPr/>
+        </p:nvSpPr>
+        <p:spPr>
+          <a:xfrm>
+            <a:off x="8074152" y="1920240"/>
+            <a:ext cx="2825496" cy="1188720"/>
           </a:xfrm>
           <a:prstGeom prst="rect">
             <a:avLst/>
@@ -4697,7 +4811,7 @@
               <a:buNone/>
             </a:pPr>
             <a:r>
-              <a:rPr lang="en-US" sz="1250" dirty="0">
+              <a:rPr lang="en-US" sz="1550" dirty="0">
                 <a:solidFill>
                   <a:srgbClr val="17364A"/>
                 </a:solidFill>
@@ -4707,13 +4821,13 @@
               </a:rPr>
               <a:t>FHIR planning should begin with the use case rather than the technology.</a:t>
             </a:r>
-            <a:endParaRPr lang="en-US" sz="1250" dirty="0"/>
-          </a:p>
-        </p:txBody>
-      </p:sp>
-      <p:sp>
-        <p:nvSpPr>
-          <p:cNvPr id="14" name="Shape 12"/>
+            <a:endParaRPr lang="en-US" sz="1550" dirty="0"/>
+          </a:p>
+        </p:txBody>
+      </p:sp>
+      <p:sp>
+        <p:nvSpPr>
+          <p:cNvPr id="15" name="Shape 13"/>
           <p:cNvSpPr/>
           <p:nvPr/>
         </p:nvSpPr>
@@ -4740,14 +4854,14 @@
       </p:sp>
       <p:sp>
         <p:nvSpPr>
-          <p:cNvPr id="15" name="Text 13"/>
+          <p:cNvPr id="16" name="Text 14"/>
           <p:cNvSpPr/>
           <p:nvPr/>
         </p:nvSpPr>
         <p:spPr>
           <a:xfrm>
             <a:off x="8074152" y="3666744"/>
-            <a:ext cx="2825496" cy="201168"/>
+            <a:ext cx="2825496" cy="256032"/>
           </a:xfrm>
           <a:prstGeom prst="rect">
             <a:avLst/>
@@ -4763,7 +4877,7 @@
               <a:buNone/>
             </a:pPr>
             <a:r>
-              <a:rPr lang="en-US" sz="950" b="1" dirty="0">
+              <a:rPr lang="en-US" sz="1300" b="1" dirty="0">
                 <a:solidFill>
                   <a:srgbClr val="0068B7"/>
                 </a:solidFill>
@@ -4773,20 +4887,20 @@
               </a:rPr>
               <a:t>Use this for</a:t>
             </a:r>
-            <a:endParaRPr lang="en-US" sz="950" dirty="0"/>
-          </a:p>
-        </p:txBody>
-      </p:sp>
-      <p:sp>
-        <p:nvSpPr>
-          <p:cNvPr id="16" name="Text 14"/>
-          <p:cNvSpPr/>
-          <p:nvPr/>
-        </p:nvSpPr>
-        <p:spPr>
-          <a:xfrm>
-            <a:off x="8074152" y="3959352"/>
-            <a:ext cx="2825496" cy="1170432"/>
+            <a:endParaRPr lang="en-US" sz="1300" dirty="0"/>
+          </a:p>
+        </p:txBody>
+      </p:sp>
+      <p:sp>
+        <p:nvSpPr>
+          <p:cNvPr id="17" name="Text 15"/>
+          <p:cNvSpPr/>
+          <p:nvPr/>
+        </p:nvSpPr>
+        <p:spPr>
+          <a:xfrm>
+            <a:off x="8074152" y="4023360"/>
+            <a:ext cx="2825496" cy="1097280"/>
           </a:xfrm>
           <a:prstGeom prst="rect">
             <a:avLst/>
@@ -4804,7 +4918,7 @@
               <a:buNone/>
             </a:pPr>
             <a:r>
-              <a:rPr lang="en-US" sz="1250" dirty="0">
+              <a:rPr lang="en-US" sz="1550" dirty="0">
                 <a:solidFill>
                   <a:srgbClr val="17364A"/>
                 </a:solidFill>
@@ -4814,7 +4928,7 @@
               </a:rPr>
               <a:t>Connect the concept to public health decisions, safeguards, documentation, or implementation work.</a:t>
             </a:r>
-            <a:endParaRPr lang="en-US" sz="1250" dirty="0"/>
+            <a:endParaRPr lang="en-US" sz="1550" dirty="0"/>
           </a:p>
         </p:txBody>
       </p:sp>
@@ -5011,7 +5125,7 @@
                 <a:ea typeface="Aptos" pitchFamily="34" charset="-122"/>
                 <a:cs typeface="Aptos" pitchFamily="34" charset="-120"/>
               </a:rPr>
-              <a:t>© Paula Soper</a:t>
+              <a:t>Â© Paula Soper</a:t>
             </a:r>
             <a:endParaRPr lang="en-US" sz="800" dirty="0"/>
           </a:p>
@@ -5019,7 +5133,46 @@
       </p:sp>
       <p:sp>
         <p:nvSpPr>
-          <p:cNvPr id="7" name="Shape 5"/>
+          <p:cNvPr id="7" name="Text 5"/>
+          <p:cNvSpPr/>
+          <p:nvPr/>
+        </p:nvSpPr>
+        <p:spPr>
+          <a:xfrm>
+            <a:off x="11137392" y="6510528"/>
+            <a:ext cx="411480" cy="201168"/>
+          </a:xfrm>
+          <a:prstGeom prst="rect">
+            <a:avLst/>
+          </a:prstGeom>
+          <a:noFill/>
+          <a:ln/>
+        </p:spPr>
+        <p:txBody>
+          <a:bodyPr wrap="square" lIns="0" tIns="0" rIns="0" bIns="0" rtlCol="0" anchor="ctr"/>
+          <a:lstStyle/>
+          <a:p>
+            <a:pPr algn="r" indent="0" marL="0">
+              <a:buNone/>
+            </a:pPr>
+            <a:r>
+              <a:rPr lang="en-US" sz="900" dirty="0">
+                <a:solidFill>
+                  <a:srgbClr val="5F7181"/>
+                </a:solidFill>
+                <a:latin typeface="Aptos" pitchFamily="34" charset="0"/>
+                <a:ea typeface="Aptos" pitchFamily="34" charset="-122"/>
+                <a:cs typeface="Aptos" pitchFamily="34" charset="-120"/>
+              </a:rPr>
+              <a:t>13</a:t>
+            </a:r>
+            <a:endParaRPr lang="en-US" sz="900" dirty="0"/>
+          </a:p>
+        </p:txBody>
+      </p:sp>
+      <p:sp>
+        <p:nvSpPr>
+          <p:cNvPr id="8" name="Shape 6"/>
           <p:cNvSpPr/>
           <p:nvPr/>
         </p:nvSpPr>
@@ -5044,7 +5197,7 @@
       </p:sp>
       <p:sp>
         <p:nvSpPr>
-          <p:cNvPr id="8" name="Text 6"/>
+          <p:cNvPr id="9" name="Text 7"/>
           <p:cNvSpPr/>
           <p:nvPr/>
         </p:nvSpPr>
@@ -5083,14 +5236,14 @@
       </p:sp>
       <p:sp>
         <p:nvSpPr>
-          <p:cNvPr id="9" name="Text 7"/>
+          <p:cNvPr id="10" name="Text 8"/>
           <p:cNvSpPr/>
           <p:nvPr/>
         </p:nvSpPr>
         <p:spPr>
           <a:xfrm>
             <a:off x="640080" y="621792"/>
-            <a:ext cx="10881360" cy="566928"/>
+            <a:ext cx="10881360" cy="713232"/>
           </a:xfrm>
           <a:prstGeom prst="rect">
             <a:avLst/>
@@ -5108,7 +5261,7 @@
               <a:buNone/>
             </a:pPr>
             <a:r>
-              <a:rPr lang="en-US" sz="2700" b="1" dirty="0">
+              <a:rPr lang="en-US" sz="3400" b="1" dirty="0">
                 <a:solidFill>
                   <a:srgbClr val="003A63"/>
                 </a:solidFill>
@@ -5118,20 +5271,20 @@
               </a:rPr>
               <a:t>Risks, Failure Modes, and Guardrails</a:t>
             </a:r>
-            <a:endParaRPr lang="en-US" sz="2700" dirty="0"/>
-          </a:p>
-        </p:txBody>
-      </p:sp>
-      <p:sp>
-        <p:nvSpPr>
-          <p:cNvPr id="10" name="Text 8"/>
-          <p:cNvSpPr/>
-          <p:nvPr/>
-        </p:nvSpPr>
-        <p:spPr>
-          <a:xfrm>
-            <a:off x="868680" y="1417320"/>
-            <a:ext cx="6675120" cy="4434840"/>
+            <a:endParaRPr lang="en-US" sz="3400" dirty="0"/>
+          </a:p>
+        </p:txBody>
+      </p:sp>
+      <p:sp>
+        <p:nvSpPr>
+          <p:cNvPr id="11" name="Text 9"/>
+          <p:cNvSpPr/>
+          <p:nvPr/>
+        </p:nvSpPr>
+        <p:spPr>
+          <a:xfrm>
+            <a:off x="868680" y="1508760"/>
+            <a:ext cx="6537960" cy="4160520"/>
           </a:xfrm>
           <a:prstGeom prst="rect">
             <a:avLst/>
@@ -5146,7 +5299,7 @@
           <a:lstStyle/>
           <a:p>
             <a:r>
-              <a:rPr lang="en-US" sz="1700" dirty="0">
+              <a:rPr lang="en-US" sz="2100" dirty="0">
                 <a:solidFill>
                   <a:srgbClr val="17364A"/>
                 </a:solidFill>
@@ -5156,11 +5309,11 @@
               </a:rPr>
               <a:t>FHIR-compatible but incomplete.</a:t>
             </a:r>
-            <a:endParaRPr lang="en-US" sz="1700" dirty="0"/>
-          </a:p>
-          <a:p>
-            <a:r>
-              <a:rPr lang="en-US" sz="1700" dirty="0">
+            <a:endParaRPr lang="en-US" sz="2100" dirty="0"/>
+          </a:p>
+          <a:p>
+            <a:r>
+              <a:rPr lang="en-US" sz="2100" dirty="0">
                 <a:solidFill>
                   <a:srgbClr val="17364A"/>
                 </a:solidFill>
@@ -5170,11 +5323,11 @@
               </a:rPr>
               <a:t>A product may support FHIR but not the data needed for the public health use case.</a:t>
             </a:r>
-            <a:endParaRPr lang="en-US" sz="1700" dirty="0"/>
-          </a:p>
-          <a:p>
-            <a:r>
-              <a:rPr lang="en-US" sz="1700" dirty="0">
+            <a:endParaRPr lang="en-US" sz="2100" dirty="0"/>
+          </a:p>
+          <a:p>
+            <a:r>
+              <a:rPr lang="en-US" sz="2100" dirty="0">
                 <a:solidFill>
                   <a:srgbClr val="17364A"/>
                 </a:solidFill>
@@ -5184,27 +5337,13 @@
               </a:rPr>
               <a:t>Guardrails include data needs worksheets, test queries, and acceptance criteria.</a:t>
             </a:r>
-            <a:endParaRPr lang="en-US" sz="1700" dirty="0"/>
-          </a:p>
-          <a:p>
-            <a:r>
-              <a:rPr lang="en-US" sz="1700" dirty="0">
-                <a:solidFill>
-                  <a:srgbClr val="17364A"/>
-                </a:solidFill>
-                <a:latin typeface="Aptos" pitchFamily="34" charset="0"/>
-                <a:ea typeface="Aptos" pitchFamily="34" charset="-122"/>
-                <a:cs typeface="Aptos" pitchFamily="34" charset="-120"/>
-              </a:rPr>
-              <a:t>Overbroad API access.</a:t>
-            </a:r>
-            <a:endParaRPr lang="en-US" sz="1700" dirty="0"/>
-          </a:p>
-        </p:txBody>
-      </p:sp>
-      <p:sp>
-        <p:nvSpPr>
-          <p:cNvPr id="11" name="Shape 9"/>
+            <a:endParaRPr lang="en-US" sz="2100" dirty="0"/>
+          </a:p>
+        </p:txBody>
+      </p:sp>
+      <p:sp>
+        <p:nvSpPr>
+          <p:cNvPr id="12" name="Shape 10"/>
           <p:cNvSpPr/>
           <p:nvPr/>
         </p:nvSpPr>
@@ -5231,14 +5370,14 @@
       </p:sp>
       <p:sp>
         <p:nvSpPr>
-          <p:cNvPr id="12" name="Text 10"/>
+          <p:cNvPr id="13" name="Text 11"/>
           <p:cNvSpPr/>
           <p:nvPr/>
         </p:nvSpPr>
         <p:spPr>
           <a:xfrm>
             <a:off x="8074152" y="1563624"/>
-            <a:ext cx="2825496" cy="201168"/>
+            <a:ext cx="2825496" cy="256032"/>
           </a:xfrm>
           <a:prstGeom prst="rect">
             <a:avLst/>
@@ -5254,7 +5393,7 @@
               <a:buNone/>
             </a:pPr>
             <a:r>
-              <a:rPr lang="en-US" sz="950" b="1" dirty="0">
+              <a:rPr lang="en-US" sz="1300" b="1" dirty="0">
                 <a:solidFill>
                   <a:srgbClr val="0068B7"/>
                 </a:solidFill>
@@ -5264,20 +5403,20 @@
               </a:rPr>
               <a:t>Key idea</a:t>
             </a:r>
-            <a:endParaRPr lang="en-US" sz="950" dirty="0"/>
-          </a:p>
-        </p:txBody>
-      </p:sp>
-      <p:sp>
-        <p:nvSpPr>
-          <p:cNvPr id="13" name="Text 11"/>
-          <p:cNvSpPr/>
-          <p:nvPr/>
-        </p:nvSpPr>
-        <p:spPr>
-          <a:xfrm>
-            <a:off x="8074152" y="1856232"/>
-            <a:ext cx="2825496" cy="1261872"/>
+            <a:endParaRPr lang="en-US" sz="1300" dirty="0"/>
+          </a:p>
+        </p:txBody>
+      </p:sp>
+      <p:sp>
+        <p:nvSpPr>
+          <p:cNvPr id="14" name="Text 12"/>
+          <p:cNvSpPr/>
+          <p:nvPr/>
+        </p:nvSpPr>
+        <p:spPr>
+          <a:xfrm>
+            <a:off x="8074152" y="1920240"/>
+            <a:ext cx="2825496" cy="1188720"/>
           </a:xfrm>
           <a:prstGeom prst="rect">
             <a:avLst/>
@@ -5295,7 +5434,7 @@
               <a:buNone/>
             </a:pPr>
             <a:r>
-              <a:rPr lang="en-US" sz="1250" dirty="0">
+              <a:rPr lang="en-US" sz="1550" dirty="0">
                 <a:solidFill>
                   <a:srgbClr val="17364A"/>
                 </a:solidFill>
@@ -5305,13 +5444,13 @@
               </a:rPr>
               <a:t>FHIR-compatible but incomplete.</a:t>
             </a:r>
-            <a:endParaRPr lang="en-US" sz="1250" dirty="0"/>
-          </a:p>
-        </p:txBody>
-      </p:sp>
-      <p:sp>
-        <p:nvSpPr>
-          <p:cNvPr id="14" name="Shape 12"/>
+            <a:endParaRPr lang="en-US" sz="1550" dirty="0"/>
+          </a:p>
+        </p:txBody>
+      </p:sp>
+      <p:sp>
+        <p:nvSpPr>
+          <p:cNvPr id="15" name="Shape 13"/>
           <p:cNvSpPr/>
           <p:nvPr/>
         </p:nvSpPr>
@@ -5338,14 +5477,14 @@
       </p:sp>
       <p:sp>
         <p:nvSpPr>
-          <p:cNvPr id="15" name="Text 13"/>
+          <p:cNvPr id="16" name="Text 14"/>
           <p:cNvSpPr/>
           <p:nvPr/>
         </p:nvSpPr>
         <p:spPr>
           <a:xfrm>
             <a:off x="8074152" y="3666744"/>
-            <a:ext cx="2825496" cy="201168"/>
+            <a:ext cx="2825496" cy="256032"/>
           </a:xfrm>
           <a:prstGeom prst="rect">
             <a:avLst/>
@@ -5361,7 +5500,7 @@
               <a:buNone/>
             </a:pPr>
             <a:r>
-              <a:rPr lang="en-US" sz="950" b="1" dirty="0">
+              <a:rPr lang="en-US" sz="1300" b="1" dirty="0">
                 <a:solidFill>
                   <a:srgbClr val="0068B7"/>
                 </a:solidFill>
@@ -5371,20 +5510,20 @@
               </a:rPr>
               <a:t>Use this for</a:t>
             </a:r>
-            <a:endParaRPr lang="en-US" sz="950" dirty="0"/>
-          </a:p>
-        </p:txBody>
-      </p:sp>
-      <p:sp>
-        <p:nvSpPr>
-          <p:cNvPr id="16" name="Text 14"/>
-          <p:cNvSpPr/>
-          <p:nvPr/>
-        </p:nvSpPr>
-        <p:spPr>
-          <a:xfrm>
-            <a:off x="8074152" y="3959352"/>
-            <a:ext cx="2825496" cy="1170432"/>
+            <a:endParaRPr lang="en-US" sz="1300" dirty="0"/>
+          </a:p>
+        </p:txBody>
+      </p:sp>
+      <p:sp>
+        <p:nvSpPr>
+          <p:cNvPr id="17" name="Text 15"/>
+          <p:cNvSpPr/>
+          <p:nvPr/>
+        </p:nvSpPr>
+        <p:spPr>
+          <a:xfrm>
+            <a:off x="8074152" y="4023360"/>
+            <a:ext cx="2825496" cy="1097280"/>
           </a:xfrm>
           <a:prstGeom prst="rect">
             <a:avLst/>
@@ -5402,7 +5541,7 @@
               <a:buNone/>
             </a:pPr>
             <a:r>
-              <a:rPr lang="en-US" sz="1250" dirty="0">
+              <a:rPr lang="en-US" sz="1550" dirty="0">
                 <a:solidFill>
                   <a:srgbClr val="17364A"/>
                 </a:solidFill>
@@ -5412,7 +5551,7 @@
               </a:rPr>
               <a:t>Connect the concept to public health decisions, safeguards, documentation, or implementation work.</a:t>
             </a:r>
-            <a:endParaRPr lang="en-US" sz="1250" dirty="0"/>
+            <a:endParaRPr lang="en-US" sz="1550" dirty="0"/>
           </a:p>
         </p:txBody>
       </p:sp>
@@ -5609,7 +5748,7 @@
                 <a:ea typeface="Aptos" pitchFamily="34" charset="-122"/>
                 <a:cs typeface="Aptos" pitchFamily="34" charset="-120"/>
               </a:rPr>
-              <a:t>© Paula Soper</a:t>
+              <a:t>Â© Paula Soper</a:t>
             </a:r>
             <a:endParaRPr lang="en-US" sz="800" dirty="0"/>
           </a:p>
@@ -5623,8 +5762,47 @@
         </p:nvSpPr>
         <p:spPr>
           <a:xfrm>
+            <a:off x="11137392" y="6510528"/>
+            <a:ext cx="411480" cy="201168"/>
+          </a:xfrm>
+          <a:prstGeom prst="rect">
+            <a:avLst/>
+          </a:prstGeom>
+          <a:noFill/>
+          <a:ln/>
+        </p:spPr>
+        <p:txBody>
+          <a:bodyPr wrap="square" lIns="0" tIns="0" rIns="0" bIns="0" rtlCol="0" anchor="ctr"/>
+          <a:lstStyle/>
+          <a:p>
+            <a:pPr algn="r" indent="0" marL="0">
+              <a:buNone/>
+            </a:pPr>
+            <a:r>
+              <a:rPr lang="en-US" sz="900" dirty="0">
+                <a:solidFill>
+                  <a:srgbClr val="5F7181"/>
+                </a:solidFill>
+                <a:latin typeface="Aptos" pitchFamily="34" charset="0"/>
+                <a:ea typeface="Aptos" pitchFamily="34" charset="-122"/>
+                <a:cs typeface="Aptos" pitchFamily="34" charset="-120"/>
+              </a:rPr>
+              <a:t>14</a:t>
+            </a:r>
+            <a:endParaRPr lang="en-US" sz="900" dirty="0"/>
+          </a:p>
+        </p:txBody>
+      </p:sp>
+      <p:sp>
+        <p:nvSpPr>
+          <p:cNvPr id="8" name="Text 6"/>
+          <p:cNvSpPr/>
+          <p:nvPr/>
+        </p:nvSpPr>
+        <p:spPr>
+          <a:xfrm>
             <a:off x="640080" y="658368"/>
-            <a:ext cx="10881360" cy="566928"/>
+            <a:ext cx="10881360" cy="713232"/>
           </a:xfrm>
           <a:prstGeom prst="rect">
             <a:avLst/>
@@ -5642,7 +5820,7 @@
               <a:buNone/>
             </a:pPr>
             <a:r>
-              <a:rPr lang="en-US" sz="2700" b="1" dirty="0">
+              <a:rPr lang="en-US" sz="3400" b="1" dirty="0">
                 <a:solidFill>
                   <a:srgbClr val="003A63"/>
                 </a:solidFill>
@@ -5652,20 +5830,20 @@
               </a:rPr>
               <a:t>Risks, Failure Modes, and Guardrails Continued</a:t>
             </a:r>
-            <a:endParaRPr lang="en-US" sz="2700" dirty="0"/>
-          </a:p>
-        </p:txBody>
-      </p:sp>
-      <p:sp>
-        <p:nvSpPr>
-          <p:cNvPr id="8" name="Text 6"/>
-          <p:cNvSpPr/>
-          <p:nvPr/>
-        </p:nvSpPr>
-        <p:spPr>
-          <a:xfrm>
-            <a:off x="868680" y="1417320"/>
-            <a:ext cx="6675120" cy="4434840"/>
+            <a:endParaRPr lang="en-US" sz="3400" dirty="0"/>
+          </a:p>
+        </p:txBody>
+      </p:sp>
+      <p:sp>
+        <p:nvSpPr>
+          <p:cNvPr id="9" name="Text 7"/>
+          <p:cNvSpPr/>
+          <p:nvPr/>
+        </p:nvSpPr>
+        <p:spPr>
+          <a:xfrm>
+            <a:off x="868680" y="1508760"/>
+            <a:ext cx="6537960" cy="4160520"/>
           </a:xfrm>
           <a:prstGeom prst="rect">
             <a:avLst/>
@@ -5680,7 +5858,7 @@
           <a:lstStyle/>
           <a:p>
             <a:r>
-              <a:rPr lang="en-US" sz="1700" dirty="0">
+              <a:rPr lang="en-US" sz="2100" dirty="0">
                 <a:solidFill>
                   <a:srgbClr val="17364A"/>
                 </a:solidFill>
@@ -5690,11 +5868,11 @@
               </a:rPr>
               <a:t>Write-back risk.</a:t>
             </a:r>
-            <a:endParaRPr lang="en-US" sz="1700" dirty="0"/>
-          </a:p>
-          <a:p>
-            <a:r>
-              <a:rPr lang="en-US" sz="1700" dirty="0">
+            <a:endParaRPr lang="en-US" sz="2100" dirty="0"/>
+          </a:p>
+          <a:p>
+            <a:r>
+              <a:rPr lang="en-US" sz="2100" dirty="0">
                 <a:solidFill>
                   <a:srgbClr val="17364A"/>
                 </a:solidFill>
@@ -5704,11 +5882,11 @@
               </a:rPr>
               <a:t>FHIR APIs may support updates or task creation.</a:t>
             </a:r>
-            <a:endParaRPr lang="en-US" sz="1700" dirty="0"/>
-          </a:p>
-          <a:p>
-            <a:r>
-              <a:rPr lang="en-US" sz="1700" dirty="0">
+            <a:endParaRPr lang="en-US" sz="2100" dirty="0"/>
+          </a:p>
+          <a:p>
+            <a:r>
+              <a:rPr lang="en-US" sz="2100" dirty="0">
                 <a:solidFill>
                   <a:srgbClr val="17364A"/>
                 </a:solidFill>
@@ -5718,13 +5896,13 @@
               </a:rPr>
               <a:t>Guardrails include human approval, restricted permissions, sandbox testing, and rollback procedures.</a:t>
             </a:r>
-            <a:endParaRPr lang="en-US" sz="1700" dirty="0"/>
-          </a:p>
-        </p:txBody>
-      </p:sp>
-      <p:sp>
-        <p:nvSpPr>
-          <p:cNvPr id="9" name="Shape 7"/>
+            <a:endParaRPr lang="en-US" sz="2100" dirty="0"/>
+          </a:p>
+        </p:txBody>
+      </p:sp>
+      <p:sp>
+        <p:nvSpPr>
+          <p:cNvPr id="10" name="Shape 8"/>
           <p:cNvSpPr/>
           <p:nvPr/>
         </p:nvSpPr>
@@ -5751,14 +5929,14 @@
       </p:sp>
       <p:sp>
         <p:nvSpPr>
-          <p:cNvPr id="10" name="Text 8"/>
+          <p:cNvPr id="11" name="Text 9"/>
           <p:cNvSpPr/>
           <p:nvPr/>
         </p:nvSpPr>
         <p:spPr>
           <a:xfrm>
             <a:off x="8074152" y="1563624"/>
-            <a:ext cx="2825496" cy="201168"/>
+            <a:ext cx="2825496" cy="256032"/>
           </a:xfrm>
           <a:prstGeom prst="rect">
             <a:avLst/>
@@ -5774,7 +5952,7 @@
               <a:buNone/>
             </a:pPr>
             <a:r>
-              <a:rPr lang="en-US" sz="950" b="1" dirty="0">
+              <a:rPr lang="en-US" sz="1300" b="1" dirty="0">
                 <a:solidFill>
                   <a:srgbClr val="0068B7"/>
                 </a:solidFill>
@@ -5784,20 +5962,20 @@
               </a:rPr>
               <a:t>Key idea</a:t>
             </a:r>
-            <a:endParaRPr lang="en-US" sz="950" dirty="0"/>
-          </a:p>
-        </p:txBody>
-      </p:sp>
-      <p:sp>
-        <p:nvSpPr>
-          <p:cNvPr id="11" name="Text 9"/>
-          <p:cNvSpPr/>
-          <p:nvPr/>
-        </p:nvSpPr>
-        <p:spPr>
-          <a:xfrm>
-            <a:off x="8074152" y="1856232"/>
-            <a:ext cx="2825496" cy="1261872"/>
+            <a:endParaRPr lang="en-US" sz="1300" dirty="0"/>
+          </a:p>
+        </p:txBody>
+      </p:sp>
+      <p:sp>
+        <p:nvSpPr>
+          <p:cNvPr id="12" name="Text 10"/>
+          <p:cNvSpPr/>
+          <p:nvPr/>
+        </p:nvSpPr>
+        <p:spPr>
+          <a:xfrm>
+            <a:off x="8074152" y="1920240"/>
+            <a:ext cx="2825496" cy="1188720"/>
           </a:xfrm>
           <a:prstGeom prst="rect">
             <a:avLst/>
@@ -5815,7 +5993,7 @@
               <a:buNone/>
             </a:pPr>
             <a:r>
-              <a:rPr lang="en-US" sz="1250" dirty="0">
+              <a:rPr lang="en-US" sz="1550" dirty="0">
                 <a:solidFill>
                   <a:srgbClr val="17364A"/>
                 </a:solidFill>
@@ -5825,13 +6003,13 @@
               </a:rPr>
               <a:t>Write-back risk.</a:t>
             </a:r>
-            <a:endParaRPr lang="en-US" sz="1250" dirty="0"/>
-          </a:p>
-        </p:txBody>
-      </p:sp>
-      <p:sp>
-        <p:nvSpPr>
-          <p:cNvPr id="12" name="Shape 10"/>
+            <a:endParaRPr lang="en-US" sz="1550" dirty="0"/>
+          </a:p>
+        </p:txBody>
+      </p:sp>
+      <p:sp>
+        <p:nvSpPr>
+          <p:cNvPr id="13" name="Shape 11"/>
           <p:cNvSpPr/>
           <p:nvPr/>
         </p:nvSpPr>
@@ -5858,14 +6036,14 @@
       </p:sp>
       <p:sp>
         <p:nvSpPr>
-          <p:cNvPr id="13" name="Text 11"/>
+          <p:cNvPr id="14" name="Text 12"/>
           <p:cNvSpPr/>
           <p:nvPr/>
         </p:nvSpPr>
         <p:spPr>
           <a:xfrm>
             <a:off x="8074152" y="3666744"/>
-            <a:ext cx="2825496" cy="201168"/>
+            <a:ext cx="2825496" cy="256032"/>
           </a:xfrm>
           <a:prstGeom prst="rect">
             <a:avLst/>
@@ -5881,7 +6059,7 @@
               <a:buNone/>
             </a:pPr>
             <a:r>
-              <a:rPr lang="en-US" sz="950" b="1" dirty="0">
+              <a:rPr lang="en-US" sz="1300" b="1" dirty="0">
                 <a:solidFill>
                   <a:srgbClr val="0068B7"/>
                 </a:solidFill>
@@ -5891,20 +6069,20 @@
               </a:rPr>
               <a:t>Use this for</a:t>
             </a:r>
-            <a:endParaRPr lang="en-US" sz="950" dirty="0"/>
-          </a:p>
-        </p:txBody>
-      </p:sp>
-      <p:sp>
-        <p:nvSpPr>
-          <p:cNvPr id="14" name="Text 12"/>
-          <p:cNvSpPr/>
-          <p:nvPr/>
-        </p:nvSpPr>
-        <p:spPr>
-          <a:xfrm>
-            <a:off x="8074152" y="3959352"/>
-            <a:ext cx="2825496" cy="1170432"/>
+            <a:endParaRPr lang="en-US" sz="1300" dirty="0"/>
+          </a:p>
+        </p:txBody>
+      </p:sp>
+      <p:sp>
+        <p:nvSpPr>
+          <p:cNvPr id="15" name="Text 13"/>
+          <p:cNvSpPr/>
+          <p:nvPr/>
+        </p:nvSpPr>
+        <p:spPr>
+          <a:xfrm>
+            <a:off x="8074152" y="4023360"/>
+            <a:ext cx="2825496" cy="1097280"/>
           </a:xfrm>
           <a:prstGeom prst="rect">
             <a:avLst/>
@@ -5922,7 +6100,7 @@
               <a:buNone/>
             </a:pPr>
             <a:r>
-              <a:rPr lang="en-US" sz="1250" dirty="0">
+              <a:rPr lang="en-US" sz="1550" dirty="0">
                 <a:solidFill>
                   <a:srgbClr val="17364A"/>
                 </a:solidFill>
@@ -5932,7 +6110,7 @@
               </a:rPr>
               <a:t>Connect the concept to public health decisions, safeguards, documentation, or implementation work.</a:t>
             </a:r>
-            <a:endParaRPr lang="en-US" sz="1250" dirty="0"/>
+            <a:endParaRPr lang="en-US" sz="1550" dirty="0"/>
           </a:p>
         </p:txBody>
       </p:sp>
@@ -6129,7 +6307,7 @@
                 <a:ea typeface="Aptos" pitchFamily="34" charset="-122"/>
                 <a:cs typeface="Aptos" pitchFamily="34" charset="-120"/>
               </a:rPr>
-              <a:t>© Paula Soper</a:t>
+              <a:t>Â© Paula Soper</a:t>
             </a:r>
             <a:endParaRPr lang="en-US" sz="800" dirty="0"/>
           </a:p>
@@ -6137,7 +6315,46 @@
       </p:sp>
       <p:sp>
         <p:nvSpPr>
-          <p:cNvPr id="7" name="Shape 5"/>
+          <p:cNvPr id="7" name="Text 5"/>
+          <p:cNvSpPr/>
+          <p:nvPr/>
+        </p:nvSpPr>
+        <p:spPr>
+          <a:xfrm>
+            <a:off x="11137392" y="6510528"/>
+            <a:ext cx="411480" cy="201168"/>
+          </a:xfrm>
+          <a:prstGeom prst="rect">
+            <a:avLst/>
+          </a:prstGeom>
+          <a:noFill/>
+          <a:ln/>
+        </p:spPr>
+        <p:txBody>
+          <a:bodyPr wrap="square" lIns="0" tIns="0" rIns="0" bIns="0" rtlCol="0" anchor="ctr"/>
+          <a:lstStyle/>
+          <a:p>
+            <a:pPr algn="r" indent="0" marL="0">
+              <a:buNone/>
+            </a:pPr>
+            <a:r>
+              <a:rPr lang="en-US" sz="900" dirty="0">
+                <a:solidFill>
+                  <a:srgbClr val="5F7181"/>
+                </a:solidFill>
+                <a:latin typeface="Aptos" pitchFamily="34" charset="0"/>
+                <a:ea typeface="Aptos" pitchFamily="34" charset="-122"/>
+                <a:cs typeface="Aptos" pitchFamily="34" charset="-120"/>
+              </a:rPr>
+              <a:t>15</a:t>
+            </a:r>
+            <a:endParaRPr lang="en-US" sz="900" dirty="0"/>
+          </a:p>
+        </p:txBody>
+      </p:sp>
+      <p:sp>
+        <p:nvSpPr>
+          <p:cNvPr id="8" name="Shape 6"/>
           <p:cNvSpPr/>
           <p:nvPr/>
         </p:nvSpPr>
@@ -6162,7 +6379,7 @@
       </p:sp>
       <p:sp>
         <p:nvSpPr>
-          <p:cNvPr id="8" name="Text 6"/>
+          <p:cNvPr id="9" name="Text 7"/>
           <p:cNvSpPr/>
           <p:nvPr/>
         </p:nvSpPr>
@@ -6201,14 +6418,14 @@
       </p:sp>
       <p:sp>
         <p:nvSpPr>
-          <p:cNvPr id="9" name="Text 7"/>
+          <p:cNvPr id="10" name="Text 8"/>
           <p:cNvSpPr/>
           <p:nvPr/>
         </p:nvSpPr>
         <p:spPr>
           <a:xfrm>
             <a:off x="640080" y="621792"/>
-            <a:ext cx="10881360" cy="566928"/>
+            <a:ext cx="10881360" cy="713232"/>
           </a:xfrm>
           <a:prstGeom prst="rect">
             <a:avLst/>
@@ -6226,7 +6443,7 @@
               <a:buNone/>
             </a:pPr>
             <a:r>
-              <a:rPr lang="en-US" sz="2700" b="1" dirty="0">
+              <a:rPr lang="en-US" sz="3400" b="1" dirty="0">
                 <a:solidFill>
                   <a:srgbClr val="003A63"/>
                 </a:solidFill>
@@ -6236,20 +6453,20 @@
               </a:rPr>
               <a:t>Application to AI-Supported Workflows</a:t>
             </a:r>
-            <a:endParaRPr lang="en-US" sz="2700" dirty="0"/>
-          </a:p>
-        </p:txBody>
-      </p:sp>
-      <p:sp>
-        <p:nvSpPr>
-          <p:cNvPr id="10" name="Text 8"/>
-          <p:cNvSpPr/>
-          <p:nvPr/>
-        </p:nvSpPr>
-        <p:spPr>
-          <a:xfrm>
-            <a:off x="868680" y="1417320"/>
-            <a:ext cx="6675120" cy="4434840"/>
+            <a:endParaRPr lang="en-US" sz="3400" dirty="0"/>
+          </a:p>
+        </p:txBody>
+      </p:sp>
+      <p:sp>
+        <p:nvSpPr>
+          <p:cNvPr id="11" name="Text 9"/>
+          <p:cNvSpPr/>
+          <p:nvPr/>
+        </p:nvSpPr>
+        <p:spPr>
+          <a:xfrm>
+            <a:off x="868680" y="1508760"/>
+            <a:ext cx="6537960" cy="4160520"/>
           </a:xfrm>
           <a:prstGeom prst="rect">
             <a:avLst/>
@@ -6264,7 +6481,7 @@
           <a:lstStyle/>
           <a:p>
             <a:r>
-              <a:rPr lang="en-US" sz="1700" dirty="0">
+              <a:rPr lang="en-US" sz="2100" dirty="0">
                 <a:solidFill>
                   <a:srgbClr val="17364A"/>
                 </a:solidFill>
@@ -6272,13 +6489,13 @@
                 <a:ea typeface="Aptos" pitchFamily="34" charset="-122"/>
                 <a:cs typeface="Aptos" pitchFamily="34" charset="-120"/>
               </a:rPr>
-              <a:t>Generative AI can use FHIR data to draft case or patient summaries, but the output should be grounded in visible source.</a:t>
-            </a:r>
-            <a:endParaRPr lang="en-US" sz="1700" dirty="0"/>
-          </a:p>
-          <a:p>
-            <a:r>
-              <a:rPr lang="en-US" sz="1700" dirty="0">
+              <a:t>Generative AI can use FHIR data to draft case or patient summaries, but the output should be grounded.</a:t>
+            </a:r>
+            <a:endParaRPr lang="en-US" sz="2100" dirty="0"/>
+          </a:p>
+          <a:p>
+            <a:r>
+              <a:rPr lang="en-US" sz="2100" dirty="0">
                 <a:solidFill>
                   <a:srgbClr val="17364A"/>
                 </a:solidFill>
@@ -6286,13 +6503,13 @@
                 <a:ea typeface="Aptos" pitchFamily="34" charset="-122"/>
                 <a:cs typeface="Aptos" pitchFamily="34" charset="-120"/>
               </a:rPr>
-              <a:t>Predictive analytics may use features derived from FHIR resources, which requires stable extraction and monitoring.</a:t>
-            </a:r>
-            <a:endParaRPr lang="en-US" sz="1700" dirty="0"/>
-          </a:p>
-          <a:p>
-            <a:r>
-              <a:rPr lang="en-US" sz="1700" dirty="0">
+              <a:t>Predictive analytics may use features derived from FHIR resources, which requires stable extraction and.</a:t>
+            </a:r>
+            <a:endParaRPr lang="en-US" sz="2100" dirty="0"/>
+          </a:p>
+          <a:p>
+            <a:r>
+              <a:rPr lang="en-US" sz="2100" dirty="0">
                 <a:solidFill>
                   <a:srgbClr val="17364A"/>
                 </a:solidFill>
@@ -6302,27 +6519,13 @@
               </a:rPr>
               <a:t>RAG may combine FHIR-derived facts with agency guidance.</a:t>
             </a:r>
-            <a:endParaRPr lang="en-US" sz="1700" dirty="0"/>
-          </a:p>
-          <a:p>
-            <a:r>
-              <a:rPr lang="en-US" sz="1700" dirty="0">
-                <a:solidFill>
-                  <a:srgbClr val="17364A"/>
-                </a:solidFill>
-                <a:latin typeface="Aptos" pitchFamily="34" charset="0"/>
-                <a:ea typeface="Aptos" pitchFamily="34" charset="-122"/>
-                <a:cs typeface="Aptos" pitchFamily="34" charset="-120"/>
-              </a:rPr>
-              <a:t>Agentic workflows may create Tasks or update statuses, making permissions and approval steps essential.</a:t>
-            </a:r>
-            <a:endParaRPr lang="en-US" sz="1700" dirty="0"/>
-          </a:p>
-        </p:txBody>
-      </p:sp>
-      <p:sp>
-        <p:nvSpPr>
-          <p:cNvPr id="11" name="Shape 9"/>
+            <a:endParaRPr lang="en-US" sz="2100" dirty="0"/>
+          </a:p>
+        </p:txBody>
+      </p:sp>
+      <p:sp>
+        <p:nvSpPr>
+          <p:cNvPr id="12" name="Shape 10"/>
           <p:cNvSpPr/>
           <p:nvPr/>
         </p:nvSpPr>
@@ -6349,14 +6552,14 @@
       </p:sp>
       <p:sp>
         <p:nvSpPr>
-          <p:cNvPr id="12" name="Text 10"/>
+          <p:cNvPr id="13" name="Text 11"/>
           <p:cNvSpPr/>
           <p:nvPr/>
         </p:nvSpPr>
         <p:spPr>
           <a:xfrm>
             <a:off x="8074152" y="1563624"/>
-            <a:ext cx="2825496" cy="201168"/>
+            <a:ext cx="2825496" cy="256032"/>
           </a:xfrm>
           <a:prstGeom prst="rect">
             <a:avLst/>
@@ -6372,7 +6575,7 @@
               <a:buNone/>
             </a:pPr>
             <a:r>
-              <a:rPr lang="en-US" sz="950" b="1" dirty="0">
+              <a:rPr lang="en-US" sz="1300" b="1" dirty="0">
                 <a:solidFill>
                   <a:srgbClr val="0068B7"/>
                 </a:solidFill>
@@ -6382,20 +6585,20 @@
               </a:rPr>
               <a:t>Key idea</a:t>
             </a:r>
-            <a:endParaRPr lang="en-US" sz="950" dirty="0"/>
-          </a:p>
-        </p:txBody>
-      </p:sp>
-      <p:sp>
-        <p:nvSpPr>
-          <p:cNvPr id="13" name="Text 11"/>
-          <p:cNvSpPr/>
-          <p:nvPr/>
-        </p:nvSpPr>
-        <p:spPr>
-          <a:xfrm>
-            <a:off x="8074152" y="1856232"/>
-            <a:ext cx="2825496" cy="1261872"/>
+            <a:endParaRPr lang="en-US" sz="1300" dirty="0"/>
+          </a:p>
+        </p:txBody>
+      </p:sp>
+      <p:sp>
+        <p:nvSpPr>
+          <p:cNvPr id="14" name="Text 12"/>
+          <p:cNvSpPr/>
+          <p:nvPr/>
+        </p:nvSpPr>
+        <p:spPr>
+          <a:xfrm>
+            <a:off x="8074152" y="1920240"/>
+            <a:ext cx="2825496" cy="1188720"/>
           </a:xfrm>
           <a:prstGeom prst="rect">
             <a:avLst/>
@@ -6413,7 +6616,7 @@
               <a:buNone/>
             </a:pPr>
             <a:r>
-              <a:rPr lang="en-US" sz="1250" dirty="0">
+              <a:rPr lang="en-US" sz="1550" dirty="0">
                 <a:solidFill>
                   <a:srgbClr val="17364A"/>
                 </a:solidFill>
@@ -6421,15 +6624,15 @@
                 <a:ea typeface="Aptos" pitchFamily="34" charset="-122"/>
                 <a:cs typeface="Aptos" pitchFamily="34" charset="-120"/>
               </a:rPr>
-              <a:t>Generative AI can use FHIR data to draft case or patient summaries, but the output should be grounded in visible source.</a:t>
-            </a:r>
-            <a:endParaRPr lang="en-US" sz="1250" dirty="0"/>
-          </a:p>
-        </p:txBody>
-      </p:sp>
-      <p:sp>
-        <p:nvSpPr>
-          <p:cNvPr id="14" name="Shape 12"/>
+              <a:t>Generative AI can use FHIR data to draft case or patient summaries, but the output should be grounded.</a:t>
+            </a:r>
+            <a:endParaRPr lang="en-US" sz="1550" dirty="0"/>
+          </a:p>
+        </p:txBody>
+      </p:sp>
+      <p:sp>
+        <p:nvSpPr>
+          <p:cNvPr id="15" name="Shape 13"/>
           <p:cNvSpPr/>
           <p:nvPr/>
         </p:nvSpPr>
@@ -6456,14 +6659,14 @@
       </p:sp>
       <p:sp>
         <p:nvSpPr>
-          <p:cNvPr id="15" name="Text 13"/>
+          <p:cNvPr id="16" name="Text 14"/>
           <p:cNvSpPr/>
           <p:nvPr/>
         </p:nvSpPr>
         <p:spPr>
           <a:xfrm>
             <a:off x="8074152" y="3666744"/>
-            <a:ext cx="2825496" cy="201168"/>
+            <a:ext cx="2825496" cy="256032"/>
           </a:xfrm>
           <a:prstGeom prst="rect">
             <a:avLst/>
@@ -6479,7 +6682,7 @@
               <a:buNone/>
             </a:pPr>
             <a:r>
-              <a:rPr lang="en-US" sz="950" b="1" dirty="0">
+              <a:rPr lang="en-US" sz="1300" b="1" dirty="0">
                 <a:solidFill>
                   <a:srgbClr val="0068B7"/>
                 </a:solidFill>
@@ -6489,20 +6692,20 @@
               </a:rPr>
               <a:t>Use this for</a:t>
             </a:r>
-            <a:endParaRPr lang="en-US" sz="950" dirty="0"/>
-          </a:p>
-        </p:txBody>
-      </p:sp>
-      <p:sp>
-        <p:nvSpPr>
-          <p:cNvPr id="16" name="Text 14"/>
-          <p:cNvSpPr/>
-          <p:nvPr/>
-        </p:nvSpPr>
-        <p:spPr>
-          <a:xfrm>
-            <a:off x="8074152" y="3959352"/>
-            <a:ext cx="2825496" cy="1170432"/>
+            <a:endParaRPr lang="en-US" sz="1300" dirty="0"/>
+          </a:p>
+        </p:txBody>
+      </p:sp>
+      <p:sp>
+        <p:nvSpPr>
+          <p:cNvPr id="17" name="Text 15"/>
+          <p:cNvSpPr/>
+          <p:nvPr/>
+        </p:nvSpPr>
+        <p:spPr>
+          <a:xfrm>
+            <a:off x="8074152" y="4023360"/>
+            <a:ext cx="2825496" cy="1097280"/>
           </a:xfrm>
           <a:prstGeom prst="rect">
             <a:avLst/>
@@ -6520,7 +6723,7 @@
               <a:buNone/>
             </a:pPr>
             <a:r>
-              <a:rPr lang="en-US" sz="1250" dirty="0">
+              <a:rPr lang="en-US" sz="1550" dirty="0">
                 <a:solidFill>
                   <a:srgbClr val="17364A"/>
                 </a:solidFill>
@@ -6530,7 +6733,7 @@
               </a:rPr>
               <a:t>Connect the concept to public health decisions, safeguards, documentation, or implementation work.</a:t>
             </a:r>
-            <a:endParaRPr lang="en-US" sz="1250" dirty="0"/>
+            <a:endParaRPr lang="en-US" sz="1550" dirty="0"/>
           </a:p>
         </p:txBody>
       </p:sp>
@@ -6727,7 +6930,7 @@
                 <a:ea typeface="Aptos" pitchFamily="34" charset="-122"/>
                 <a:cs typeface="Aptos" pitchFamily="34" charset="-120"/>
               </a:rPr>
-              <a:t>© Paula Soper</a:t>
+              <a:t>Â© Paula Soper</a:t>
             </a:r>
             <a:endParaRPr lang="en-US" sz="800" dirty="0"/>
           </a:p>
@@ -6735,7 +6938,46 @@
       </p:sp>
       <p:sp>
         <p:nvSpPr>
-          <p:cNvPr id="7" name="Shape 5"/>
+          <p:cNvPr id="7" name="Text 5"/>
+          <p:cNvSpPr/>
+          <p:nvPr/>
+        </p:nvSpPr>
+        <p:spPr>
+          <a:xfrm>
+            <a:off x="11137392" y="6510528"/>
+            <a:ext cx="411480" cy="201168"/>
+          </a:xfrm>
+          <a:prstGeom prst="rect">
+            <a:avLst/>
+          </a:prstGeom>
+          <a:noFill/>
+          <a:ln/>
+        </p:spPr>
+        <p:txBody>
+          <a:bodyPr wrap="square" lIns="0" tIns="0" rIns="0" bIns="0" rtlCol="0" anchor="ctr"/>
+          <a:lstStyle/>
+          <a:p>
+            <a:pPr algn="r" indent="0" marL="0">
+              <a:buNone/>
+            </a:pPr>
+            <a:r>
+              <a:rPr lang="en-US" sz="900" dirty="0">
+                <a:solidFill>
+                  <a:srgbClr val="5F7181"/>
+                </a:solidFill>
+                <a:latin typeface="Aptos" pitchFamily="34" charset="0"/>
+                <a:ea typeface="Aptos" pitchFamily="34" charset="-122"/>
+                <a:cs typeface="Aptos" pitchFamily="34" charset="-120"/>
+              </a:rPr>
+              <a:t>16</a:t>
+            </a:r>
+            <a:endParaRPr lang="en-US" sz="900" dirty="0"/>
+          </a:p>
+        </p:txBody>
+      </p:sp>
+      <p:sp>
+        <p:nvSpPr>
+          <p:cNvPr id="8" name="Shape 6"/>
           <p:cNvSpPr/>
           <p:nvPr/>
         </p:nvSpPr>
@@ -6760,7 +7002,7 @@
       </p:sp>
       <p:sp>
         <p:nvSpPr>
-          <p:cNvPr id="8" name="Text 6"/>
+          <p:cNvPr id="9" name="Text 7"/>
           <p:cNvSpPr/>
           <p:nvPr/>
         </p:nvSpPr>
@@ -6799,14 +7041,14 @@
       </p:sp>
       <p:sp>
         <p:nvSpPr>
-          <p:cNvPr id="9" name="Text 7"/>
+          <p:cNvPr id="10" name="Text 8"/>
           <p:cNvSpPr/>
           <p:nvPr/>
         </p:nvSpPr>
         <p:spPr>
           <a:xfrm>
             <a:off x="640080" y="621792"/>
-            <a:ext cx="10881360" cy="566928"/>
+            <a:ext cx="10881360" cy="713232"/>
           </a:xfrm>
           <a:prstGeom prst="rect">
             <a:avLst/>
@@ -6824,7 +7066,7 @@
               <a:buNone/>
             </a:pPr>
             <a:r>
-              <a:rPr lang="en-US" sz="2700" b="1" dirty="0">
+              <a:rPr lang="en-US" sz="3400" b="1" dirty="0">
                 <a:solidFill>
                   <a:srgbClr val="003A63"/>
                 </a:solidFill>
@@ -6834,20 +7076,20 @@
               </a:rPr>
               <a:t>Reflection Questions</a:t>
             </a:r>
-            <a:endParaRPr lang="en-US" sz="2700" dirty="0"/>
-          </a:p>
-        </p:txBody>
-      </p:sp>
-      <p:sp>
-        <p:nvSpPr>
-          <p:cNvPr id="10" name="Text 8"/>
-          <p:cNvSpPr/>
-          <p:nvPr/>
-        </p:nvSpPr>
-        <p:spPr>
-          <a:xfrm>
-            <a:off x="868680" y="1417320"/>
-            <a:ext cx="6675120" cy="4434840"/>
+            <a:endParaRPr lang="en-US" sz="3400" dirty="0"/>
+          </a:p>
+        </p:txBody>
+      </p:sp>
+      <p:sp>
+        <p:nvSpPr>
+          <p:cNvPr id="11" name="Text 9"/>
+          <p:cNvSpPr/>
+          <p:nvPr/>
+        </p:nvSpPr>
+        <p:spPr>
+          <a:xfrm>
+            <a:off x="868680" y="1508760"/>
+            <a:ext cx="6537960" cy="4160520"/>
           </a:xfrm>
           <a:prstGeom prst="rect">
             <a:avLst/>
@@ -6862,7 +7104,7 @@
           <a:lstStyle/>
           <a:p>
             <a:r>
-              <a:rPr lang="en-US" sz="1700" dirty="0">
+              <a:rPr lang="en-US" sz="2100" dirty="0">
                 <a:solidFill>
                   <a:srgbClr val="17364A"/>
                 </a:solidFill>
@@ -6872,11 +7114,11 @@
               </a:rPr>
               <a:t>Which public health workflows could benefit from structured FHIR data?</a:t>
             </a:r>
-            <a:endParaRPr lang="en-US" sz="1700" dirty="0"/>
-          </a:p>
-          <a:p>
-            <a:r>
-              <a:rPr lang="en-US" sz="1700" dirty="0">
+            <a:endParaRPr lang="en-US" sz="2100" dirty="0"/>
+          </a:p>
+          <a:p>
+            <a:r>
+              <a:rPr lang="en-US" sz="2100" dirty="0">
                 <a:solidFill>
                   <a:srgbClr val="17364A"/>
                 </a:solidFill>
@@ -6886,11 +7128,11 @@
               </a:rPr>
               <a:t>Which data elements are required for the workflow?</a:t>
             </a:r>
-            <a:endParaRPr lang="en-US" sz="1700" dirty="0"/>
-          </a:p>
-          <a:p>
-            <a:r>
-              <a:rPr lang="en-US" sz="1700" dirty="0">
+            <a:endParaRPr lang="en-US" sz="2100" dirty="0"/>
+          </a:p>
+          <a:p>
+            <a:r>
+              <a:rPr lang="en-US" sz="2100" dirty="0">
                 <a:solidFill>
                   <a:srgbClr val="17364A"/>
                 </a:solidFill>
@@ -6900,13 +7142,13 @@
               </a:rPr>
               <a:t>Are those elements available through FHIR in the source systems?</a:t>
             </a:r>
-            <a:endParaRPr lang="en-US" sz="1700" dirty="0"/>
-          </a:p>
-        </p:txBody>
-      </p:sp>
-      <p:sp>
-        <p:nvSpPr>
-          <p:cNvPr id="11" name="Shape 9"/>
+            <a:endParaRPr lang="en-US" sz="2100" dirty="0"/>
+          </a:p>
+        </p:txBody>
+      </p:sp>
+      <p:sp>
+        <p:nvSpPr>
+          <p:cNvPr id="12" name="Shape 10"/>
           <p:cNvSpPr/>
           <p:nvPr/>
         </p:nvSpPr>
@@ -6933,14 +7175,14 @@
       </p:sp>
       <p:sp>
         <p:nvSpPr>
-          <p:cNvPr id="12" name="Text 10"/>
+          <p:cNvPr id="13" name="Text 11"/>
           <p:cNvSpPr/>
           <p:nvPr/>
         </p:nvSpPr>
         <p:spPr>
           <a:xfrm>
             <a:off x="8074152" y="1563624"/>
-            <a:ext cx="2825496" cy="201168"/>
+            <a:ext cx="2825496" cy="256032"/>
           </a:xfrm>
           <a:prstGeom prst="rect">
             <a:avLst/>
@@ -6956,7 +7198,7 @@
               <a:buNone/>
             </a:pPr>
             <a:r>
-              <a:rPr lang="en-US" sz="950" b="1" dirty="0">
+              <a:rPr lang="en-US" sz="1300" b="1" dirty="0">
                 <a:solidFill>
                   <a:srgbClr val="0068B7"/>
                 </a:solidFill>
@@ -6966,20 +7208,20 @@
               </a:rPr>
               <a:t>Key idea</a:t>
             </a:r>
-            <a:endParaRPr lang="en-US" sz="950" dirty="0"/>
-          </a:p>
-        </p:txBody>
-      </p:sp>
-      <p:sp>
-        <p:nvSpPr>
-          <p:cNvPr id="13" name="Text 11"/>
-          <p:cNvSpPr/>
-          <p:nvPr/>
-        </p:nvSpPr>
-        <p:spPr>
-          <a:xfrm>
-            <a:off x="8074152" y="1856232"/>
-            <a:ext cx="2825496" cy="1261872"/>
+            <a:endParaRPr lang="en-US" sz="1300" dirty="0"/>
+          </a:p>
+        </p:txBody>
+      </p:sp>
+      <p:sp>
+        <p:nvSpPr>
+          <p:cNvPr id="14" name="Text 12"/>
+          <p:cNvSpPr/>
+          <p:nvPr/>
+        </p:nvSpPr>
+        <p:spPr>
+          <a:xfrm>
+            <a:off x="8074152" y="1920240"/>
+            <a:ext cx="2825496" cy="1188720"/>
           </a:xfrm>
           <a:prstGeom prst="rect">
             <a:avLst/>
@@ -6997,7 +7239,7 @@
               <a:buNone/>
             </a:pPr>
             <a:r>
-              <a:rPr lang="en-US" sz="1250" dirty="0">
+              <a:rPr lang="en-US" sz="1550" dirty="0">
                 <a:solidFill>
                   <a:srgbClr val="17364A"/>
                 </a:solidFill>
@@ -7007,13 +7249,13 @@
               </a:rPr>
               <a:t>Which public health workflows could benefit from structured FHIR data?</a:t>
             </a:r>
-            <a:endParaRPr lang="en-US" sz="1250" dirty="0"/>
-          </a:p>
-        </p:txBody>
-      </p:sp>
-      <p:sp>
-        <p:nvSpPr>
-          <p:cNvPr id="14" name="Shape 12"/>
+            <a:endParaRPr lang="en-US" sz="1550" dirty="0"/>
+          </a:p>
+        </p:txBody>
+      </p:sp>
+      <p:sp>
+        <p:nvSpPr>
+          <p:cNvPr id="15" name="Shape 13"/>
           <p:cNvSpPr/>
           <p:nvPr/>
         </p:nvSpPr>
@@ -7040,14 +7282,14 @@
       </p:sp>
       <p:sp>
         <p:nvSpPr>
-          <p:cNvPr id="15" name="Text 13"/>
+          <p:cNvPr id="16" name="Text 14"/>
           <p:cNvSpPr/>
           <p:nvPr/>
         </p:nvSpPr>
         <p:spPr>
           <a:xfrm>
             <a:off x="8074152" y="3666744"/>
-            <a:ext cx="2825496" cy="201168"/>
+            <a:ext cx="2825496" cy="256032"/>
           </a:xfrm>
           <a:prstGeom prst="rect">
             <a:avLst/>
@@ -7063,7 +7305,7 @@
               <a:buNone/>
             </a:pPr>
             <a:r>
-              <a:rPr lang="en-US" sz="950" b="1" dirty="0">
+              <a:rPr lang="en-US" sz="1300" b="1" dirty="0">
                 <a:solidFill>
                   <a:srgbClr val="0068B7"/>
                 </a:solidFill>
@@ -7073,20 +7315,20 @@
               </a:rPr>
               <a:t>Use this for</a:t>
             </a:r>
-            <a:endParaRPr lang="en-US" sz="950" dirty="0"/>
-          </a:p>
-        </p:txBody>
-      </p:sp>
-      <p:sp>
-        <p:nvSpPr>
-          <p:cNvPr id="16" name="Text 14"/>
-          <p:cNvSpPr/>
-          <p:nvPr/>
-        </p:nvSpPr>
-        <p:spPr>
-          <a:xfrm>
-            <a:off x="8074152" y="3959352"/>
-            <a:ext cx="2825496" cy="1170432"/>
+            <a:endParaRPr lang="en-US" sz="1300" dirty="0"/>
+          </a:p>
+        </p:txBody>
+      </p:sp>
+      <p:sp>
+        <p:nvSpPr>
+          <p:cNvPr id="17" name="Text 15"/>
+          <p:cNvSpPr/>
+          <p:nvPr/>
+        </p:nvSpPr>
+        <p:spPr>
+          <a:xfrm>
+            <a:off x="8074152" y="4023360"/>
+            <a:ext cx="2825496" cy="1097280"/>
           </a:xfrm>
           <a:prstGeom prst="rect">
             <a:avLst/>
@@ -7104,7 +7346,7 @@
               <a:buNone/>
             </a:pPr>
             <a:r>
-              <a:rPr lang="en-US" sz="1250" dirty="0">
+              <a:rPr lang="en-US" sz="1550" dirty="0">
                 <a:solidFill>
                   <a:srgbClr val="17364A"/>
                 </a:solidFill>
@@ -7114,7 +7356,7 @@
               </a:rPr>
               <a:t>Connect the concept to public health decisions, safeguards, documentation, or implementation work.</a:t>
             </a:r>
-            <a:endParaRPr lang="en-US" sz="1250" dirty="0"/>
+            <a:endParaRPr lang="en-US" sz="1550" dirty="0"/>
           </a:p>
         </p:txBody>
       </p:sp>
@@ -7311,7 +7553,7 @@
                 <a:ea typeface="Aptos" pitchFamily="34" charset="-122"/>
                 <a:cs typeface="Aptos" pitchFamily="34" charset="-120"/>
               </a:rPr>
-              <a:t>© Paula Soper</a:t>
+              <a:t>Â© Paula Soper</a:t>
             </a:r>
             <a:endParaRPr lang="en-US" sz="800" dirty="0"/>
           </a:p>
@@ -7325,8 +7567,47 @@
         </p:nvSpPr>
         <p:spPr>
           <a:xfrm>
+            <a:off x="11137392" y="6510528"/>
+            <a:ext cx="411480" cy="201168"/>
+          </a:xfrm>
+          <a:prstGeom prst="rect">
+            <a:avLst/>
+          </a:prstGeom>
+          <a:noFill/>
+          <a:ln/>
+        </p:spPr>
+        <p:txBody>
+          <a:bodyPr wrap="square" lIns="0" tIns="0" rIns="0" bIns="0" rtlCol="0" anchor="ctr"/>
+          <a:lstStyle/>
+          <a:p>
+            <a:pPr algn="r" indent="0" marL="0">
+              <a:buNone/>
+            </a:pPr>
+            <a:r>
+              <a:rPr lang="en-US" sz="900" dirty="0">
+                <a:solidFill>
+                  <a:srgbClr val="5F7181"/>
+                </a:solidFill>
+                <a:latin typeface="Aptos" pitchFamily="34" charset="0"/>
+                <a:ea typeface="Aptos" pitchFamily="34" charset="-122"/>
+                <a:cs typeface="Aptos" pitchFamily="34" charset="-120"/>
+              </a:rPr>
+              <a:t>17</a:t>
+            </a:r>
+            <a:endParaRPr lang="en-US" sz="900" dirty="0"/>
+          </a:p>
+        </p:txBody>
+      </p:sp>
+      <p:sp>
+        <p:nvSpPr>
+          <p:cNvPr id="8" name="Text 6"/>
+          <p:cNvSpPr/>
+          <p:nvPr/>
+        </p:nvSpPr>
+        <p:spPr>
+          <a:xfrm>
             <a:off x="640080" y="658368"/>
-            <a:ext cx="10881360" cy="566928"/>
+            <a:ext cx="10881360" cy="713232"/>
           </a:xfrm>
           <a:prstGeom prst="rect">
             <a:avLst/>
@@ -7344,7 +7625,7 @@
               <a:buNone/>
             </a:pPr>
             <a:r>
-              <a:rPr lang="en-US" sz="2700" b="1" dirty="0">
+              <a:rPr lang="en-US" sz="3400" b="1" dirty="0">
                 <a:solidFill>
                   <a:srgbClr val="003A63"/>
                 </a:solidFill>
@@ -7354,20 +7635,20 @@
               </a:rPr>
               <a:t>Reflection Questions Continued</a:t>
             </a:r>
-            <a:endParaRPr lang="en-US" sz="2700" dirty="0"/>
-          </a:p>
-        </p:txBody>
-      </p:sp>
-      <p:sp>
-        <p:nvSpPr>
-          <p:cNvPr id="8" name="Text 6"/>
-          <p:cNvSpPr/>
-          <p:nvPr/>
-        </p:nvSpPr>
-        <p:spPr>
-          <a:xfrm>
-            <a:off x="868680" y="1417320"/>
-            <a:ext cx="6675120" cy="4434840"/>
+            <a:endParaRPr lang="en-US" sz="3400" dirty="0"/>
+          </a:p>
+        </p:txBody>
+      </p:sp>
+      <p:sp>
+        <p:nvSpPr>
+          <p:cNvPr id="9" name="Text 7"/>
+          <p:cNvSpPr/>
+          <p:nvPr/>
+        </p:nvSpPr>
+        <p:spPr>
+          <a:xfrm>
+            <a:off x="868680" y="1508760"/>
+            <a:ext cx="6537960" cy="4160520"/>
           </a:xfrm>
           <a:prstGeom prst="rect">
             <a:avLst/>
@@ -7382,7 +7663,7 @@
           <a:lstStyle/>
           <a:p>
             <a:r>
-              <a:rPr lang="en-US" sz="1700" dirty="0">
+              <a:rPr lang="en-US" sz="2100" dirty="0">
                 <a:solidFill>
                   <a:srgbClr val="17364A"/>
                 </a:solidFill>
@@ -7392,11 +7673,11 @@
               </a:rPr>
               <a:t>Which profiles or implementation guides apply?</a:t>
             </a:r>
-            <a:endParaRPr lang="en-US" sz="1700" dirty="0"/>
-          </a:p>
-          <a:p>
-            <a:r>
-              <a:rPr lang="en-US" sz="1700" dirty="0">
+            <a:endParaRPr lang="en-US" sz="2100" dirty="0"/>
+          </a:p>
+          <a:p>
+            <a:r>
+              <a:rPr lang="en-US" sz="2100" dirty="0">
                 <a:solidFill>
                   <a:srgbClr val="17364A"/>
                 </a:solidFill>
@@ -7406,13 +7687,13 @@
               </a:rPr>
               <a:t>How will staff verify that the AI tool used the correct FHIR data?</a:t>
             </a:r>
-            <a:endParaRPr lang="en-US" sz="1700" dirty="0"/>
-          </a:p>
-        </p:txBody>
-      </p:sp>
-      <p:sp>
-        <p:nvSpPr>
-          <p:cNvPr id="9" name="Shape 7"/>
+            <a:endParaRPr lang="en-US" sz="2100" dirty="0"/>
+          </a:p>
+        </p:txBody>
+      </p:sp>
+      <p:sp>
+        <p:nvSpPr>
+          <p:cNvPr id="10" name="Shape 8"/>
           <p:cNvSpPr/>
           <p:nvPr/>
         </p:nvSpPr>
@@ -7439,14 +7720,14 @@
       </p:sp>
       <p:sp>
         <p:nvSpPr>
-          <p:cNvPr id="10" name="Text 8"/>
+          <p:cNvPr id="11" name="Text 9"/>
           <p:cNvSpPr/>
           <p:nvPr/>
         </p:nvSpPr>
         <p:spPr>
           <a:xfrm>
             <a:off x="8074152" y="1563624"/>
-            <a:ext cx="2825496" cy="201168"/>
+            <a:ext cx="2825496" cy="256032"/>
           </a:xfrm>
           <a:prstGeom prst="rect">
             <a:avLst/>
@@ -7462,7 +7743,7 @@
               <a:buNone/>
             </a:pPr>
             <a:r>
-              <a:rPr lang="en-US" sz="950" b="1" dirty="0">
+              <a:rPr lang="en-US" sz="1300" b="1" dirty="0">
                 <a:solidFill>
                   <a:srgbClr val="0068B7"/>
                 </a:solidFill>
@@ -7472,20 +7753,20 @@
               </a:rPr>
               <a:t>Key idea</a:t>
             </a:r>
-            <a:endParaRPr lang="en-US" sz="950" dirty="0"/>
-          </a:p>
-        </p:txBody>
-      </p:sp>
-      <p:sp>
-        <p:nvSpPr>
-          <p:cNvPr id="11" name="Text 9"/>
-          <p:cNvSpPr/>
-          <p:nvPr/>
-        </p:nvSpPr>
-        <p:spPr>
-          <a:xfrm>
-            <a:off x="8074152" y="1856232"/>
-            <a:ext cx="2825496" cy="1261872"/>
+            <a:endParaRPr lang="en-US" sz="1300" dirty="0"/>
+          </a:p>
+        </p:txBody>
+      </p:sp>
+      <p:sp>
+        <p:nvSpPr>
+          <p:cNvPr id="12" name="Text 10"/>
+          <p:cNvSpPr/>
+          <p:nvPr/>
+        </p:nvSpPr>
+        <p:spPr>
+          <a:xfrm>
+            <a:off x="8074152" y="1920240"/>
+            <a:ext cx="2825496" cy="1188720"/>
           </a:xfrm>
           <a:prstGeom prst="rect">
             <a:avLst/>
@@ -7503,7 +7784,7 @@
               <a:buNone/>
             </a:pPr>
             <a:r>
-              <a:rPr lang="en-US" sz="1250" dirty="0">
+              <a:rPr lang="en-US" sz="1550" dirty="0">
                 <a:solidFill>
                   <a:srgbClr val="17364A"/>
                 </a:solidFill>
@@ -7513,13 +7794,13 @@
               </a:rPr>
               <a:t>Which profiles or implementation guides apply?</a:t>
             </a:r>
-            <a:endParaRPr lang="en-US" sz="1250" dirty="0"/>
-          </a:p>
-        </p:txBody>
-      </p:sp>
-      <p:sp>
-        <p:nvSpPr>
-          <p:cNvPr id="12" name="Shape 10"/>
+            <a:endParaRPr lang="en-US" sz="1550" dirty="0"/>
+          </a:p>
+        </p:txBody>
+      </p:sp>
+      <p:sp>
+        <p:nvSpPr>
+          <p:cNvPr id="13" name="Shape 11"/>
           <p:cNvSpPr/>
           <p:nvPr/>
         </p:nvSpPr>
@@ -7546,14 +7827,14 @@
       </p:sp>
       <p:sp>
         <p:nvSpPr>
-          <p:cNvPr id="13" name="Text 11"/>
+          <p:cNvPr id="14" name="Text 12"/>
           <p:cNvSpPr/>
           <p:nvPr/>
         </p:nvSpPr>
         <p:spPr>
           <a:xfrm>
             <a:off x="8074152" y="3666744"/>
-            <a:ext cx="2825496" cy="201168"/>
+            <a:ext cx="2825496" cy="256032"/>
           </a:xfrm>
           <a:prstGeom prst="rect">
             <a:avLst/>
@@ -7569,7 +7850,7 @@
               <a:buNone/>
             </a:pPr>
             <a:r>
-              <a:rPr lang="en-US" sz="950" b="1" dirty="0">
+              <a:rPr lang="en-US" sz="1300" b="1" dirty="0">
                 <a:solidFill>
                   <a:srgbClr val="0068B7"/>
                 </a:solidFill>
@@ -7579,20 +7860,20 @@
               </a:rPr>
               <a:t>Use this for</a:t>
             </a:r>
-            <a:endParaRPr lang="en-US" sz="950" dirty="0"/>
-          </a:p>
-        </p:txBody>
-      </p:sp>
-      <p:sp>
-        <p:nvSpPr>
-          <p:cNvPr id="14" name="Text 12"/>
-          <p:cNvSpPr/>
-          <p:nvPr/>
-        </p:nvSpPr>
-        <p:spPr>
-          <a:xfrm>
-            <a:off x="8074152" y="3959352"/>
-            <a:ext cx="2825496" cy="1170432"/>
+            <a:endParaRPr lang="en-US" sz="1300" dirty="0"/>
+          </a:p>
+        </p:txBody>
+      </p:sp>
+      <p:sp>
+        <p:nvSpPr>
+          <p:cNvPr id="15" name="Text 13"/>
+          <p:cNvSpPr/>
+          <p:nvPr/>
+        </p:nvSpPr>
+        <p:spPr>
+          <a:xfrm>
+            <a:off x="8074152" y="4023360"/>
+            <a:ext cx="2825496" cy="1097280"/>
           </a:xfrm>
           <a:prstGeom prst="rect">
             <a:avLst/>
@@ -7610,7 +7891,7 @@
               <a:buNone/>
             </a:pPr>
             <a:r>
-              <a:rPr lang="en-US" sz="1250" dirty="0">
+              <a:rPr lang="en-US" sz="1550" dirty="0">
                 <a:solidFill>
                   <a:srgbClr val="17364A"/>
                 </a:solidFill>
@@ -7620,7 +7901,7 @@
               </a:rPr>
               <a:t>Connect the concept to public health decisions, safeguards, documentation, or implementation work.</a:t>
             </a:r>
-            <a:endParaRPr lang="en-US" sz="1250" dirty="0"/>
+            <a:endParaRPr lang="en-US" sz="1550" dirty="0"/>
           </a:p>
         </p:txBody>
       </p:sp>
@@ -7817,7 +8098,7 @@
                 <a:ea typeface="Aptos" pitchFamily="34" charset="-122"/>
                 <a:cs typeface="Aptos" pitchFamily="34" charset="-120"/>
               </a:rPr>
-              <a:t>© Paula Soper</a:t>
+              <a:t>Â© Paula Soper</a:t>
             </a:r>
             <a:endParaRPr lang="en-US" sz="800" dirty="0"/>
           </a:p>
@@ -7825,7 +8106,46 @@
       </p:sp>
       <p:sp>
         <p:nvSpPr>
-          <p:cNvPr id="7" name="Shape 5"/>
+          <p:cNvPr id="7" name="Text 5"/>
+          <p:cNvSpPr/>
+          <p:nvPr/>
+        </p:nvSpPr>
+        <p:spPr>
+          <a:xfrm>
+            <a:off x="11137392" y="6510528"/>
+            <a:ext cx="411480" cy="201168"/>
+          </a:xfrm>
+          <a:prstGeom prst="rect">
+            <a:avLst/>
+          </a:prstGeom>
+          <a:noFill/>
+          <a:ln/>
+        </p:spPr>
+        <p:txBody>
+          <a:bodyPr wrap="square" lIns="0" tIns="0" rIns="0" bIns="0" rtlCol="0" anchor="ctr"/>
+          <a:lstStyle/>
+          <a:p>
+            <a:pPr algn="r" indent="0" marL="0">
+              <a:buNone/>
+            </a:pPr>
+            <a:r>
+              <a:rPr lang="en-US" sz="900" dirty="0">
+                <a:solidFill>
+                  <a:srgbClr val="5F7181"/>
+                </a:solidFill>
+                <a:latin typeface="Aptos" pitchFamily="34" charset="0"/>
+                <a:ea typeface="Aptos" pitchFamily="34" charset="-122"/>
+                <a:cs typeface="Aptos" pitchFamily="34" charset="-120"/>
+              </a:rPr>
+              <a:t>18</a:t>
+            </a:r>
+            <a:endParaRPr lang="en-US" sz="900" dirty="0"/>
+          </a:p>
+        </p:txBody>
+      </p:sp>
+      <p:sp>
+        <p:nvSpPr>
+          <p:cNvPr id="8" name="Shape 6"/>
           <p:cNvSpPr/>
           <p:nvPr/>
         </p:nvSpPr>
@@ -7850,7 +8170,7 @@
       </p:sp>
       <p:sp>
         <p:nvSpPr>
-          <p:cNvPr id="8" name="Text 6"/>
+          <p:cNvPr id="9" name="Text 7"/>
           <p:cNvSpPr/>
           <p:nvPr/>
         </p:nvSpPr>
@@ -7889,14 +8209,14 @@
       </p:sp>
       <p:sp>
         <p:nvSpPr>
-          <p:cNvPr id="9" name="Text 7"/>
+          <p:cNvPr id="10" name="Text 8"/>
           <p:cNvSpPr/>
           <p:nvPr/>
         </p:nvSpPr>
         <p:spPr>
           <a:xfrm>
             <a:off x="640080" y="621792"/>
-            <a:ext cx="10881360" cy="566928"/>
+            <a:ext cx="10881360" cy="713232"/>
           </a:xfrm>
           <a:prstGeom prst="rect">
             <a:avLst/>
@@ -7914,7 +8234,7 @@
               <a:buNone/>
             </a:pPr>
             <a:r>
-              <a:rPr lang="en-US" sz="2700" b="1" dirty="0">
+              <a:rPr lang="en-US" sz="3400" b="1" dirty="0">
                 <a:solidFill>
                   <a:srgbClr val="003A63"/>
                 </a:solidFill>
@@ -7924,20 +8244,20 @@
               </a:rPr>
               <a:t>Practical Exercise</a:t>
             </a:r>
-            <a:endParaRPr lang="en-US" sz="2700" dirty="0"/>
-          </a:p>
-        </p:txBody>
-      </p:sp>
-      <p:sp>
-        <p:nvSpPr>
-          <p:cNvPr id="10" name="Text 8"/>
-          <p:cNvSpPr/>
-          <p:nvPr/>
-        </p:nvSpPr>
-        <p:spPr>
-          <a:xfrm>
-            <a:off x="868680" y="1417320"/>
-            <a:ext cx="6675120" cy="4434840"/>
+            <a:endParaRPr lang="en-US" sz="3400" dirty="0"/>
+          </a:p>
+        </p:txBody>
+      </p:sp>
+      <p:sp>
+        <p:nvSpPr>
+          <p:cNvPr id="11" name="Text 9"/>
+          <p:cNvSpPr/>
+          <p:nvPr/>
+        </p:nvSpPr>
+        <p:spPr>
+          <a:xfrm>
+            <a:off x="868680" y="1508760"/>
+            <a:ext cx="6537960" cy="4160520"/>
           </a:xfrm>
           <a:prstGeom prst="rect">
             <a:avLst/>
@@ -7952,7 +8272,7 @@
           <a:lstStyle/>
           <a:p>
             <a:r>
-              <a:rPr lang="en-US" sz="1700" dirty="0">
+              <a:rPr lang="en-US" sz="2100" dirty="0">
                 <a:solidFill>
                   <a:srgbClr val="17364A"/>
                 </a:solidFill>
@@ -7962,11 +8282,11 @@
               </a:rPr>
               <a:t>Create a FHIR data needs worksheet for one AI-supported public health use case.</a:t>
             </a:r>
-            <a:endParaRPr lang="en-US" sz="1700" dirty="0"/>
-          </a:p>
-          <a:p>
-            <a:r>
-              <a:rPr lang="en-US" sz="1700" dirty="0">
+            <a:endParaRPr lang="en-US" sz="2100" dirty="0"/>
+          </a:p>
+          <a:p>
+            <a:r>
+              <a:rPr lang="en-US" sz="2100" dirty="0">
                 <a:solidFill>
                   <a:srgbClr val="17364A"/>
                 </a:solidFill>
@@ -7974,15 +8294,15 @@
                 <a:ea typeface="Aptos" pitchFamily="34" charset="-122"/>
                 <a:cs typeface="Aptos" pitchFamily="34" charset="-120"/>
               </a:rPr>
-              <a:t>Include the use case, required data elements, relevant FHIR resources, source systems, API method, terminology.</a:t>
-            </a:r>
-            <a:endParaRPr lang="en-US" sz="1700" dirty="0"/>
-          </a:p>
-        </p:txBody>
-      </p:sp>
-      <p:sp>
-        <p:nvSpPr>
-          <p:cNvPr id="11" name="Shape 9"/>
+              <a:t>Include the use case, required data elements, relevant FHIR resources, source systems, API method,.</a:t>
+            </a:r>
+            <a:endParaRPr lang="en-US" sz="2100" dirty="0"/>
+          </a:p>
+        </p:txBody>
+      </p:sp>
+      <p:sp>
+        <p:nvSpPr>
+          <p:cNvPr id="12" name="Shape 10"/>
           <p:cNvSpPr/>
           <p:nvPr/>
         </p:nvSpPr>
@@ -8009,14 +8329,14 @@
       </p:sp>
       <p:sp>
         <p:nvSpPr>
-          <p:cNvPr id="12" name="Text 10"/>
+          <p:cNvPr id="13" name="Text 11"/>
           <p:cNvSpPr/>
           <p:nvPr/>
         </p:nvSpPr>
         <p:spPr>
           <a:xfrm>
             <a:off x="8074152" y="1563624"/>
-            <a:ext cx="2825496" cy="201168"/>
+            <a:ext cx="2825496" cy="256032"/>
           </a:xfrm>
           <a:prstGeom prst="rect">
             <a:avLst/>
@@ -8032,7 +8352,7 @@
               <a:buNone/>
             </a:pPr>
             <a:r>
-              <a:rPr lang="en-US" sz="950" b="1" dirty="0">
+              <a:rPr lang="en-US" sz="1300" b="1" dirty="0">
                 <a:solidFill>
                   <a:srgbClr val="0068B7"/>
                 </a:solidFill>
@@ -8042,20 +8362,20 @@
               </a:rPr>
               <a:t>Key idea</a:t>
             </a:r>
-            <a:endParaRPr lang="en-US" sz="950" dirty="0"/>
-          </a:p>
-        </p:txBody>
-      </p:sp>
-      <p:sp>
-        <p:nvSpPr>
-          <p:cNvPr id="13" name="Text 11"/>
-          <p:cNvSpPr/>
-          <p:nvPr/>
-        </p:nvSpPr>
-        <p:spPr>
-          <a:xfrm>
-            <a:off x="8074152" y="1856232"/>
-            <a:ext cx="2825496" cy="1261872"/>
+            <a:endParaRPr lang="en-US" sz="1300" dirty="0"/>
+          </a:p>
+        </p:txBody>
+      </p:sp>
+      <p:sp>
+        <p:nvSpPr>
+          <p:cNvPr id="14" name="Text 12"/>
+          <p:cNvSpPr/>
+          <p:nvPr/>
+        </p:nvSpPr>
+        <p:spPr>
+          <a:xfrm>
+            <a:off x="8074152" y="1920240"/>
+            <a:ext cx="2825496" cy="1188720"/>
           </a:xfrm>
           <a:prstGeom prst="rect">
             <a:avLst/>
@@ -8073,7 +8393,7 @@
               <a:buNone/>
             </a:pPr>
             <a:r>
-              <a:rPr lang="en-US" sz="1250" dirty="0">
+              <a:rPr lang="en-US" sz="1550" dirty="0">
                 <a:solidFill>
                   <a:srgbClr val="17364A"/>
                 </a:solidFill>
@@ -8083,13 +8403,13 @@
               </a:rPr>
               <a:t>Create a FHIR data needs worksheet for one AI-supported public health use case.</a:t>
             </a:r>
-            <a:endParaRPr lang="en-US" sz="1250" dirty="0"/>
-          </a:p>
-        </p:txBody>
-      </p:sp>
-      <p:sp>
-        <p:nvSpPr>
-          <p:cNvPr id="14" name="Shape 12"/>
+            <a:endParaRPr lang="en-US" sz="1550" dirty="0"/>
+          </a:p>
+        </p:txBody>
+      </p:sp>
+      <p:sp>
+        <p:nvSpPr>
+          <p:cNvPr id="15" name="Shape 13"/>
           <p:cNvSpPr/>
           <p:nvPr/>
         </p:nvSpPr>
@@ -8116,14 +8436,14 @@
       </p:sp>
       <p:sp>
         <p:nvSpPr>
-          <p:cNvPr id="15" name="Text 13"/>
+          <p:cNvPr id="16" name="Text 14"/>
           <p:cNvSpPr/>
           <p:nvPr/>
         </p:nvSpPr>
         <p:spPr>
           <a:xfrm>
             <a:off x="8074152" y="3666744"/>
-            <a:ext cx="2825496" cy="201168"/>
+            <a:ext cx="2825496" cy="256032"/>
           </a:xfrm>
           <a:prstGeom prst="rect">
             <a:avLst/>
@@ -8139,7 +8459,7 @@
               <a:buNone/>
             </a:pPr>
             <a:r>
-              <a:rPr lang="en-US" sz="950" b="1" dirty="0">
+              <a:rPr lang="en-US" sz="1300" b="1" dirty="0">
                 <a:solidFill>
                   <a:srgbClr val="0068B7"/>
                 </a:solidFill>
@@ -8149,20 +8469,20 @@
               </a:rPr>
               <a:t>Use this for</a:t>
             </a:r>
-            <a:endParaRPr lang="en-US" sz="950" dirty="0"/>
-          </a:p>
-        </p:txBody>
-      </p:sp>
-      <p:sp>
-        <p:nvSpPr>
-          <p:cNvPr id="16" name="Text 14"/>
-          <p:cNvSpPr/>
-          <p:nvPr/>
-        </p:nvSpPr>
-        <p:spPr>
-          <a:xfrm>
-            <a:off x="8074152" y="3959352"/>
-            <a:ext cx="2825496" cy="1170432"/>
+            <a:endParaRPr lang="en-US" sz="1300" dirty="0"/>
+          </a:p>
+        </p:txBody>
+      </p:sp>
+      <p:sp>
+        <p:nvSpPr>
+          <p:cNvPr id="17" name="Text 15"/>
+          <p:cNvSpPr/>
+          <p:nvPr/>
+        </p:nvSpPr>
+        <p:spPr>
+          <a:xfrm>
+            <a:off x="8074152" y="4023360"/>
+            <a:ext cx="2825496" cy="1097280"/>
           </a:xfrm>
           <a:prstGeom prst="rect">
             <a:avLst/>
@@ -8180,7 +8500,7 @@
               <a:buNone/>
             </a:pPr>
             <a:r>
-              <a:rPr lang="en-US" sz="1250" dirty="0">
+              <a:rPr lang="en-US" sz="1550" dirty="0">
                 <a:solidFill>
                   <a:srgbClr val="17364A"/>
                 </a:solidFill>
@@ -8190,7 +8510,7 @@
               </a:rPr>
               <a:t>Connect the concept to public health decisions, safeguards, documentation, or implementation work.</a:t>
             </a:r>
-            <a:endParaRPr lang="en-US" sz="1250" dirty="0"/>
+            <a:endParaRPr lang="en-US" sz="1550" dirty="0"/>
           </a:p>
         </p:txBody>
       </p:sp>
@@ -8387,7 +8707,7 @@
                 <a:ea typeface="Aptos" pitchFamily="34" charset="-122"/>
                 <a:cs typeface="Aptos" pitchFamily="34" charset="-120"/>
               </a:rPr>
-              <a:t>© Paula Soper</a:t>
+              <a:t>Â© Paula Soper</a:t>
             </a:r>
             <a:endParaRPr lang="en-US" sz="800" dirty="0"/>
           </a:p>
@@ -8395,7 +8715,46 @@
       </p:sp>
       <p:sp>
         <p:nvSpPr>
-          <p:cNvPr id="7" name="Shape 5"/>
+          <p:cNvPr id="7" name="Text 5"/>
+          <p:cNvSpPr/>
+          <p:nvPr/>
+        </p:nvSpPr>
+        <p:spPr>
+          <a:xfrm>
+            <a:off x="11137392" y="6510528"/>
+            <a:ext cx="411480" cy="201168"/>
+          </a:xfrm>
+          <a:prstGeom prst="rect">
+            <a:avLst/>
+          </a:prstGeom>
+          <a:noFill/>
+          <a:ln/>
+        </p:spPr>
+        <p:txBody>
+          <a:bodyPr wrap="square" lIns="0" tIns="0" rIns="0" bIns="0" rtlCol="0" anchor="ctr"/>
+          <a:lstStyle/>
+          <a:p>
+            <a:pPr algn="r" indent="0" marL="0">
+              <a:buNone/>
+            </a:pPr>
+            <a:r>
+              <a:rPr lang="en-US" sz="900" dirty="0">
+                <a:solidFill>
+                  <a:srgbClr val="5F7181"/>
+                </a:solidFill>
+                <a:latin typeface="Aptos" pitchFamily="34" charset="0"/>
+                <a:ea typeface="Aptos" pitchFamily="34" charset="-122"/>
+                <a:cs typeface="Aptos" pitchFamily="34" charset="-120"/>
+              </a:rPr>
+              <a:t>19</a:t>
+            </a:r>
+            <a:endParaRPr lang="en-US" sz="900" dirty="0"/>
+          </a:p>
+        </p:txBody>
+      </p:sp>
+      <p:sp>
+        <p:nvSpPr>
+          <p:cNvPr id="8" name="Shape 6"/>
           <p:cNvSpPr/>
           <p:nvPr/>
         </p:nvSpPr>
@@ -8420,7 +8779,7 @@
       </p:sp>
       <p:sp>
         <p:nvSpPr>
-          <p:cNvPr id="8" name="Text 6"/>
+          <p:cNvPr id="9" name="Text 7"/>
           <p:cNvSpPr/>
           <p:nvPr/>
         </p:nvSpPr>
@@ -8459,14 +8818,14 @@
       </p:sp>
       <p:sp>
         <p:nvSpPr>
-          <p:cNvPr id="9" name="Text 7"/>
+          <p:cNvPr id="10" name="Text 8"/>
           <p:cNvSpPr/>
           <p:nvPr/>
         </p:nvSpPr>
         <p:spPr>
           <a:xfrm>
             <a:off x="640080" y="621792"/>
-            <a:ext cx="10881360" cy="566928"/>
+            <a:ext cx="10881360" cy="713232"/>
           </a:xfrm>
           <a:prstGeom prst="rect">
             <a:avLst/>
@@ -8484,7 +8843,7 @@
               <a:buNone/>
             </a:pPr>
             <a:r>
-              <a:rPr lang="en-US" sz="2700" b="1" dirty="0">
+              <a:rPr lang="en-US" sz="3400" b="1" dirty="0">
                 <a:solidFill>
                   <a:srgbClr val="003A63"/>
                 </a:solidFill>
@@ -8494,20 +8853,20 @@
               </a:rPr>
               <a:t>Expected Artifact or Evidence</a:t>
             </a:r>
-            <a:endParaRPr lang="en-US" sz="2700" dirty="0"/>
-          </a:p>
-        </p:txBody>
-      </p:sp>
-      <p:sp>
-        <p:nvSpPr>
-          <p:cNvPr id="10" name="Text 8"/>
-          <p:cNvSpPr/>
-          <p:nvPr/>
-        </p:nvSpPr>
-        <p:spPr>
-          <a:xfrm>
-            <a:off x="868680" y="1417320"/>
-            <a:ext cx="6675120" cy="4434840"/>
+            <a:endParaRPr lang="en-US" sz="3400" dirty="0"/>
+          </a:p>
+        </p:txBody>
+      </p:sp>
+      <p:sp>
+        <p:nvSpPr>
+          <p:cNvPr id="11" name="Text 9"/>
+          <p:cNvSpPr/>
+          <p:nvPr/>
+        </p:nvSpPr>
+        <p:spPr>
+          <a:xfrm>
+            <a:off x="868680" y="1508760"/>
+            <a:ext cx="6537960" cy="4160520"/>
           </a:xfrm>
           <a:prstGeom prst="rect">
             <a:avLst/>
@@ -8522,7 +8881,7 @@
           <a:lstStyle/>
           <a:p>
             <a:r>
-              <a:rPr lang="en-US" sz="1700" dirty="0">
+              <a:rPr lang="en-US" sz="2100" dirty="0">
                 <a:solidFill>
                   <a:srgbClr val="17364A"/>
                 </a:solidFill>
@@ -8532,11 +8891,11 @@
               </a:rPr>
               <a:t>FHIR data needs worksheet</a:t>
             </a:r>
-            <a:endParaRPr lang="en-US" sz="1700" dirty="0"/>
-          </a:p>
-          <a:p>
-            <a:r>
-              <a:rPr lang="en-US" sz="1700" dirty="0">
+            <a:endParaRPr lang="en-US" sz="2100" dirty="0"/>
+          </a:p>
+          <a:p>
+            <a:r>
+              <a:rPr lang="en-US" sz="2100" dirty="0">
                 <a:solidFill>
                   <a:srgbClr val="17364A"/>
                 </a:solidFill>
@@ -8546,11 +8905,11 @@
               </a:rPr>
               <a:t>List of relevant FHIR resources</a:t>
             </a:r>
-            <a:endParaRPr lang="en-US" sz="1700" dirty="0"/>
-          </a:p>
-          <a:p>
-            <a:r>
-              <a:rPr lang="en-US" sz="1700" dirty="0">
+            <a:endParaRPr lang="en-US" sz="2100" dirty="0"/>
+          </a:p>
+          <a:p>
+            <a:r>
+              <a:rPr lang="en-US" sz="2100" dirty="0">
                 <a:solidFill>
                   <a:srgbClr val="17364A"/>
                 </a:solidFill>
@@ -8560,13 +8919,13 @@
               </a:rPr>
               <a:t>Vendor or implementation questions</a:t>
             </a:r>
-            <a:endParaRPr lang="en-US" sz="1700" dirty="0"/>
-          </a:p>
-        </p:txBody>
-      </p:sp>
-      <p:sp>
-        <p:nvSpPr>
-          <p:cNvPr id="11" name="Shape 9"/>
+            <a:endParaRPr lang="en-US" sz="2100" dirty="0"/>
+          </a:p>
+        </p:txBody>
+      </p:sp>
+      <p:sp>
+        <p:nvSpPr>
+          <p:cNvPr id="12" name="Shape 10"/>
           <p:cNvSpPr/>
           <p:nvPr/>
         </p:nvSpPr>
@@ -8593,14 +8952,14 @@
       </p:sp>
       <p:sp>
         <p:nvSpPr>
-          <p:cNvPr id="12" name="Text 10"/>
+          <p:cNvPr id="13" name="Text 11"/>
           <p:cNvSpPr/>
           <p:nvPr/>
         </p:nvSpPr>
         <p:spPr>
           <a:xfrm>
             <a:off x="8074152" y="1563624"/>
-            <a:ext cx="2825496" cy="201168"/>
+            <a:ext cx="2825496" cy="256032"/>
           </a:xfrm>
           <a:prstGeom prst="rect">
             <a:avLst/>
@@ -8616,7 +8975,7 @@
               <a:buNone/>
             </a:pPr>
             <a:r>
-              <a:rPr lang="en-US" sz="950" b="1" dirty="0">
+              <a:rPr lang="en-US" sz="1300" b="1" dirty="0">
                 <a:solidFill>
                   <a:srgbClr val="0068B7"/>
                 </a:solidFill>
@@ -8626,20 +8985,20 @@
               </a:rPr>
               <a:t>Key idea</a:t>
             </a:r>
-            <a:endParaRPr lang="en-US" sz="950" dirty="0"/>
-          </a:p>
-        </p:txBody>
-      </p:sp>
-      <p:sp>
-        <p:nvSpPr>
-          <p:cNvPr id="13" name="Text 11"/>
-          <p:cNvSpPr/>
-          <p:nvPr/>
-        </p:nvSpPr>
-        <p:spPr>
-          <a:xfrm>
-            <a:off x="8074152" y="1856232"/>
-            <a:ext cx="2825496" cy="1261872"/>
+            <a:endParaRPr lang="en-US" sz="1300" dirty="0"/>
+          </a:p>
+        </p:txBody>
+      </p:sp>
+      <p:sp>
+        <p:nvSpPr>
+          <p:cNvPr id="14" name="Text 12"/>
+          <p:cNvSpPr/>
+          <p:nvPr/>
+        </p:nvSpPr>
+        <p:spPr>
+          <a:xfrm>
+            <a:off x="8074152" y="1920240"/>
+            <a:ext cx="2825496" cy="1188720"/>
           </a:xfrm>
           <a:prstGeom prst="rect">
             <a:avLst/>
@@ -8657,7 +9016,7 @@
               <a:buNone/>
             </a:pPr>
             <a:r>
-              <a:rPr lang="en-US" sz="1250" dirty="0">
+              <a:rPr lang="en-US" sz="1550" dirty="0">
                 <a:solidFill>
                   <a:srgbClr val="17364A"/>
                 </a:solidFill>
@@ -8667,13 +9026,13 @@
               </a:rPr>
               <a:t>FHIR data needs worksheet</a:t>
             </a:r>
-            <a:endParaRPr lang="en-US" sz="1250" dirty="0"/>
-          </a:p>
-        </p:txBody>
-      </p:sp>
-      <p:sp>
-        <p:nvSpPr>
-          <p:cNvPr id="14" name="Shape 12"/>
+            <a:endParaRPr lang="en-US" sz="1550" dirty="0"/>
+          </a:p>
+        </p:txBody>
+      </p:sp>
+      <p:sp>
+        <p:nvSpPr>
+          <p:cNvPr id="15" name="Shape 13"/>
           <p:cNvSpPr/>
           <p:nvPr/>
         </p:nvSpPr>
@@ -8700,14 +9059,14 @@
       </p:sp>
       <p:sp>
         <p:nvSpPr>
-          <p:cNvPr id="15" name="Text 13"/>
+          <p:cNvPr id="16" name="Text 14"/>
           <p:cNvSpPr/>
           <p:nvPr/>
         </p:nvSpPr>
         <p:spPr>
           <a:xfrm>
             <a:off x="8074152" y="3666744"/>
-            <a:ext cx="2825496" cy="201168"/>
+            <a:ext cx="2825496" cy="256032"/>
           </a:xfrm>
           <a:prstGeom prst="rect">
             <a:avLst/>
@@ -8723,7 +9082,7 @@
               <a:buNone/>
             </a:pPr>
             <a:r>
-              <a:rPr lang="en-US" sz="950" b="1" dirty="0">
+              <a:rPr lang="en-US" sz="1300" b="1" dirty="0">
                 <a:solidFill>
                   <a:srgbClr val="0068B7"/>
                 </a:solidFill>
@@ -8733,20 +9092,20 @@
               </a:rPr>
               <a:t>Use this for</a:t>
             </a:r>
-            <a:endParaRPr lang="en-US" sz="950" dirty="0"/>
-          </a:p>
-        </p:txBody>
-      </p:sp>
-      <p:sp>
-        <p:nvSpPr>
-          <p:cNvPr id="16" name="Text 14"/>
-          <p:cNvSpPr/>
-          <p:nvPr/>
-        </p:nvSpPr>
-        <p:spPr>
-          <a:xfrm>
-            <a:off x="8074152" y="3959352"/>
-            <a:ext cx="2825496" cy="1170432"/>
+            <a:endParaRPr lang="en-US" sz="1300" dirty="0"/>
+          </a:p>
+        </p:txBody>
+      </p:sp>
+      <p:sp>
+        <p:nvSpPr>
+          <p:cNvPr id="17" name="Text 15"/>
+          <p:cNvSpPr/>
+          <p:nvPr/>
+        </p:nvSpPr>
+        <p:spPr>
+          <a:xfrm>
+            <a:off x="8074152" y="4023360"/>
+            <a:ext cx="2825496" cy="1097280"/>
           </a:xfrm>
           <a:prstGeom prst="rect">
             <a:avLst/>
@@ -8764,7 +9123,7 @@
               <a:buNone/>
             </a:pPr>
             <a:r>
-              <a:rPr lang="en-US" sz="1250" dirty="0">
+              <a:rPr lang="en-US" sz="1550" dirty="0">
                 <a:solidFill>
                   <a:srgbClr val="17364A"/>
                 </a:solidFill>
@@ -8774,7 +9133,7 @@
               </a:rPr>
               <a:t>Connect the concept to public health decisions, safeguards, documentation, or implementation work.</a:t>
             </a:r>
-            <a:endParaRPr lang="en-US" sz="1250" dirty="0"/>
+            <a:endParaRPr lang="en-US" sz="1550" dirty="0"/>
           </a:p>
         </p:txBody>
       </p:sp>
@@ -8971,7 +9330,7 @@
                 <a:ea typeface="Aptos" pitchFamily="34" charset="-122"/>
                 <a:cs typeface="Aptos" pitchFamily="34" charset="-120"/>
               </a:rPr>
-              <a:t>© Paula Soper</a:t>
+              <a:t>Â© Paula Soper</a:t>
             </a:r>
             <a:endParaRPr lang="en-US" sz="800" dirty="0"/>
           </a:p>
@@ -8985,8 +9344,47 @@
         </p:nvSpPr>
         <p:spPr>
           <a:xfrm>
+            <a:off x="11137392" y="6510528"/>
+            <a:ext cx="411480" cy="201168"/>
+          </a:xfrm>
+          <a:prstGeom prst="rect">
+            <a:avLst/>
+          </a:prstGeom>
+          <a:noFill/>
+          <a:ln/>
+        </p:spPr>
+        <p:txBody>
+          <a:bodyPr wrap="square" lIns="0" tIns="0" rIns="0" bIns="0" rtlCol="0" anchor="ctr"/>
+          <a:lstStyle/>
+          <a:p>
+            <a:pPr algn="r" indent="0" marL="0">
+              <a:buNone/>
+            </a:pPr>
+            <a:r>
+              <a:rPr lang="en-US" sz="900" dirty="0">
+                <a:solidFill>
+                  <a:srgbClr val="5F7181"/>
+                </a:solidFill>
+                <a:latin typeface="Aptos" pitchFamily="34" charset="0"/>
+                <a:ea typeface="Aptos" pitchFamily="34" charset="-122"/>
+                <a:cs typeface="Aptos" pitchFamily="34" charset="-120"/>
+              </a:rPr>
+              <a:t>2</a:t>
+            </a:r>
+            <a:endParaRPr lang="en-US" sz="900" dirty="0"/>
+          </a:p>
+        </p:txBody>
+      </p:sp>
+      <p:sp>
+        <p:nvSpPr>
+          <p:cNvPr id="8" name="Text 6"/>
+          <p:cNvSpPr/>
+          <p:nvPr/>
+        </p:nvSpPr>
+        <p:spPr>
+          <a:xfrm>
             <a:off x="640080" y="658368"/>
-            <a:ext cx="10881360" cy="566928"/>
+            <a:ext cx="10881360" cy="713232"/>
           </a:xfrm>
           <a:prstGeom prst="rect">
             <a:avLst/>
@@ -9004,7 +9402,7 @@
               <a:buNone/>
             </a:pPr>
             <a:r>
-              <a:rPr lang="en-US" sz="2700" b="1" dirty="0">
+              <a:rPr lang="en-US" sz="3400" b="1" dirty="0">
                 <a:solidFill>
                   <a:srgbClr val="003A63"/>
                 </a:solidFill>
@@ -9014,20 +9412,20 @@
               </a:rPr>
               <a:t>What this module helps you do</a:t>
             </a:r>
-            <a:endParaRPr lang="en-US" sz="2700" dirty="0"/>
-          </a:p>
-        </p:txBody>
-      </p:sp>
-      <p:sp>
-        <p:nvSpPr>
-          <p:cNvPr id="8" name="Text 6"/>
-          <p:cNvSpPr/>
-          <p:nvPr/>
-        </p:nvSpPr>
-        <p:spPr>
-          <a:xfrm>
-            <a:off x="868680" y="1417320"/>
-            <a:ext cx="6675120" cy="3291840"/>
+            <a:endParaRPr lang="en-US" sz="3400" dirty="0"/>
+          </a:p>
+        </p:txBody>
+      </p:sp>
+      <p:sp>
+        <p:nvSpPr>
+          <p:cNvPr id="9" name="Text 7"/>
+          <p:cNvSpPr/>
+          <p:nvPr/>
+        </p:nvSpPr>
+        <p:spPr>
+          <a:xfrm>
+            <a:off x="868680" y="1508760"/>
+            <a:ext cx="6446520" cy="2926080"/>
           </a:xfrm>
           <a:prstGeom prst="rect">
             <a:avLst/>
@@ -9042,7 +9440,7 @@
           <a:lstStyle/>
           <a:p>
             <a:r>
-              <a:rPr lang="en-US" sz="1700" dirty="0">
+              <a:rPr lang="en-US" sz="2100" dirty="0">
                 <a:solidFill>
                   <a:srgbClr val="17364A"/>
                 </a:solidFill>
@@ -9052,11 +9450,11 @@
               </a:rPr>
               <a:t>FHIR is increasingly important for public health because it supports structured, API-based access to health data.</a:t>
             </a:r>
-            <a:endParaRPr lang="en-US" sz="1700" dirty="0"/>
-          </a:p>
-          <a:p>
-            <a:r>
-              <a:rPr lang="en-US" sz="1700" dirty="0">
+            <a:endParaRPr lang="en-US" sz="2100" dirty="0"/>
+          </a:p>
+          <a:p>
+            <a:r>
+              <a:rPr lang="en-US" sz="2100" dirty="0">
                 <a:solidFill>
                   <a:srgbClr val="17364A"/>
                 </a:solidFill>
@@ -9064,13 +9462,13 @@
                 <a:ea typeface="Aptos" pitchFamily="34" charset="-122"/>
                 <a:cs typeface="Aptos" pitchFamily="34" charset="-120"/>
               </a:rPr>
-              <a:t>Public health staff do not need to become FHIR developers to participate in AI planning, but they do need to understand what FHIR can and cannot.</a:t>
-            </a:r>
-            <a:endParaRPr lang="en-US" sz="1700" dirty="0"/>
-          </a:p>
-          <a:p>
-            <a:r>
-              <a:rPr lang="en-US" sz="1700" dirty="0">
+              <a:t>Public health staff do not need to become FHIR developers to participate in AI planning, but they do need to.</a:t>
+            </a:r>
+            <a:endParaRPr lang="en-US" sz="2100" dirty="0"/>
+          </a:p>
+          <a:p>
+            <a:r>
+              <a:rPr lang="en-US" sz="2100" dirty="0">
                 <a:solidFill>
                   <a:srgbClr val="17364A"/>
                 </a:solidFill>
@@ -9078,15 +9476,15 @@
                 <a:ea typeface="Aptos" pitchFamily="34" charset="-122"/>
                 <a:cs typeface="Aptos" pitchFamily="34" charset="-120"/>
               </a:rPr>
-              <a:t>This module explains how FHIR resources, profiles, implementation guides, and APIs may support AI-enabled public health workflows.</a:t>
-            </a:r>
-            <a:endParaRPr lang="en-US" sz="1700" dirty="0"/>
-          </a:p>
-        </p:txBody>
-      </p:sp>
-      <p:sp>
-        <p:nvSpPr>
-          <p:cNvPr id="9" name="Shape 7"/>
+              <a:t>This module explains how FHIR resources, profiles, implementation guides, and APIs may support AI-enabled public.</a:t>
+            </a:r>
+            <a:endParaRPr lang="en-US" sz="2100" dirty="0"/>
+          </a:p>
+        </p:txBody>
+      </p:sp>
+      <p:sp>
+        <p:nvSpPr>
+          <p:cNvPr id="10" name="Shape 8"/>
           <p:cNvSpPr/>
           <p:nvPr/>
         </p:nvSpPr>
@@ -9113,14 +9511,14 @@
       </p:sp>
       <p:sp>
         <p:nvSpPr>
-          <p:cNvPr id="10" name="Text 8"/>
+          <p:cNvPr id="11" name="Text 9"/>
           <p:cNvSpPr/>
           <p:nvPr/>
         </p:nvSpPr>
         <p:spPr>
           <a:xfrm>
             <a:off x="8074152" y="1563624"/>
-            <a:ext cx="2825496" cy="201168"/>
+            <a:ext cx="2825496" cy="256032"/>
           </a:xfrm>
           <a:prstGeom prst="rect">
             <a:avLst/>
@@ -9136,7 +9534,7 @@
               <a:buNone/>
             </a:pPr>
             <a:r>
-              <a:rPr lang="en-US" sz="950" b="1" dirty="0">
+              <a:rPr lang="en-US" sz="1300" b="1" dirty="0">
                 <a:solidFill>
                   <a:srgbClr val="0068B7"/>
                 </a:solidFill>
@@ -9146,20 +9544,20 @@
               </a:rPr>
               <a:t>Module details</a:t>
             </a:r>
-            <a:endParaRPr lang="en-US" sz="950" dirty="0"/>
-          </a:p>
-        </p:txBody>
-      </p:sp>
-      <p:sp>
-        <p:nvSpPr>
-          <p:cNvPr id="11" name="Text 9"/>
-          <p:cNvSpPr/>
-          <p:nvPr/>
-        </p:nvSpPr>
-        <p:spPr>
-          <a:xfrm>
-            <a:off x="8074152" y="1856232"/>
-            <a:ext cx="2825496" cy="1353312"/>
+            <a:endParaRPr lang="en-US" sz="1300" dirty="0"/>
+          </a:p>
+        </p:txBody>
+      </p:sp>
+      <p:sp>
+        <p:nvSpPr>
+          <p:cNvPr id="12" name="Text 10"/>
+          <p:cNvSpPr/>
+          <p:nvPr/>
+        </p:nvSpPr>
+        <p:spPr>
+          <a:xfrm>
+            <a:off x="8074152" y="1920240"/>
+            <a:ext cx="2825496" cy="1280160"/>
           </a:xfrm>
           <a:prstGeom prst="rect">
             <a:avLst/>
@@ -9177,7 +9575,7 @@
               <a:buNone/>
             </a:pPr>
             <a:r>
-              <a:rPr lang="en-US" sz="1250" dirty="0">
+              <a:rPr lang="en-US" sz="1550" dirty="0">
                 <a:solidFill>
                   <a:srgbClr val="17364A"/>
                 </a:solidFill>
@@ -9187,14 +9585,14 @@
               </a:rPr>
               <a:t>Level: applied/foundational</a:t>
             </a:r>
-            <a:endParaRPr lang="en-US" sz="1250" dirty="0"/>
+            <a:endParaRPr lang="en-US" sz="1550" dirty="0"/>
           </a:p>
           <a:p>
             <a:pPr indent="0" marL="0">
               <a:buNone/>
             </a:pPr>
             <a:r>
-              <a:rPr lang="en-US" sz="1250" dirty="0">
+              <a:rPr lang="en-US" sz="1550" dirty="0">
                 <a:solidFill>
                   <a:srgbClr val="17364A"/>
                 </a:solidFill>
@@ -9204,14 +9602,14 @@
               </a:rPr>
               <a:t>Primary track: Technical Architecture Track</a:t>
             </a:r>
-            <a:endParaRPr lang="en-US" sz="1250" dirty="0"/>
+            <a:endParaRPr lang="en-US" sz="1550" dirty="0"/>
           </a:p>
           <a:p>
             <a:pPr indent="0" marL="0">
               <a:buNone/>
             </a:pPr>
             <a:r>
-              <a:rPr lang="en-US" sz="1250" dirty="0">
+              <a:rPr lang="en-US" sz="1550" dirty="0">
                 <a:solidFill>
                   <a:srgbClr val="17364A"/>
                 </a:solidFill>
@@ -9221,32 +9619,32 @@
               </a:rPr>
               <a:t>Appears in tracks: technical-architecture</a:t>
             </a:r>
-            <a:endParaRPr lang="en-US" sz="1250" dirty="0"/>
-          </a:p>
-        </p:txBody>
-      </p:sp>
-      <p:sp>
-        <p:nvSpPr>
-          <p:cNvPr id="12" name="Shape 10"/>
-          <p:cNvSpPr/>
-          <p:nvPr/>
-        </p:nvSpPr>
-        <p:spPr>
-          <a:xfrm>
-            <a:off x="7909560" y="3611880"/>
-            <a:ext cx="3154680" cy="1783080"/>
+            <a:endParaRPr lang="en-US" sz="1550" dirty="0"/>
+          </a:p>
+        </p:txBody>
+      </p:sp>
+      <p:sp>
+        <p:nvSpPr>
+          <p:cNvPr id="13" name="Shape 11"/>
+          <p:cNvSpPr/>
+          <p:nvPr/>
+        </p:nvSpPr>
+        <p:spPr>
+          <a:xfrm>
+            <a:off x="7635240" y="3730752"/>
+            <a:ext cx="1033272" cy="749808"/>
           </a:xfrm>
           <a:prstGeom prst="roundRect">
             <a:avLst>
-              <a:gd name="adj" fmla="val 6154"/>
+              <a:gd name="adj" fmla="val 14634"/>
             </a:avLst>
           </a:prstGeom>
           <a:solidFill>
-            <a:srgbClr val="EEF8ED"/>
+            <a:srgbClr val="0068B7"/>
           </a:solidFill>
           <a:ln w="12700">
             <a:solidFill>
-              <a:srgbClr val="B9D7E6"/>
+              <a:srgbClr val="0068B7"/>
             </a:solidFill>
             <a:prstDash val="solid"/>
           </a:ln>
@@ -9254,81 +9652,256 @@
       </p:sp>
       <p:sp>
         <p:nvSpPr>
-          <p:cNvPr id="13" name="Text 11"/>
-          <p:cNvSpPr/>
-          <p:nvPr/>
-        </p:nvSpPr>
-        <p:spPr>
-          <a:xfrm>
-            <a:off x="8074152" y="3758184"/>
-            <a:ext cx="2825496" cy="201168"/>
-          </a:xfrm>
-          <a:prstGeom prst="rect">
-            <a:avLst/>
-          </a:prstGeom>
-          <a:noFill/>
-          <a:ln/>
-        </p:spPr>
-        <p:txBody>
-          <a:bodyPr wrap="square" lIns="0" tIns="0" rIns="0" bIns="0" rtlCol="0" anchor="ctr"/>
-          <a:lstStyle/>
-          <a:p>
-            <a:pPr indent="0" marL="0">
-              <a:buNone/>
-            </a:pPr>
-            <a:r>
-              <a:rPr lang="en-US" sz="950" b="1" dirty="0">
-                <a:solidFill>
-                  <a:srgbClr val="0068B7"/>
-                </a:solidFill>
-                <a:latin typeface="Aptos" pitchFamily="34" charset="0"/>
-                <a:ea typeface="Aptos" pitchFamily="34" charset="-122"/>
-                <a:cs typeface="Aptos" pitchFamily="34" charset="-120"/>
-              </a:rPr>
-              <a:t>Learning approach</a:t>
-            </a:r>
-            <a:endParaRPr lang="en-US" sz="950" dirty="0"/>
-          </a:p>
-        </p:txBody>
-      </p:sp>
-      <p:sp>
-        <p:nvSpPr>
           <p:cNvPr id="14" name="Text 12"/>
           <p:cNvSpPr/>
           <p:nvPr/>
         </p:nvSpPr>
         <p:spPr>
           <a:xfrm>
-            <a:off x="8074152" y="4050792"/>
-            <a:ext cx="2825496" cy="1216152"/>
-          </a:xfrm>
-          <a:prstGeom prst="rect">
-            <a:avLst/>
-          </a:prstGeom>
-          <a:noFill/>
-          <a:ln/>
-        </p:spPr>
-        <p:txBody>
-          <a:bodyPr wrap="square" lIns="0" tIns="0" rIns="0" bIns="0" rtlCol="0" anchor="t">
+            <a:off x="7708392" y="3922776"/>
+            <a:ext cx="886968" cy="310896"/>
+          </a:xfrm>
+          <a:prstGeom prst="rect">
+            <a:avLst/>
+          </a:prstGeom>
+          <a:noFill/>
+          <a:ln/>
+        </p:spPr>
+        <p:txBody>
+          <a:bodyPr wrap="square" lIns="0" tIns="0" rIns="0" bIns="0" rtlCol="0" anchor="ctr">
             <a:normAutofit/>
           </a:bodyPr>
           <a:lstStyle/>
           <a:p>
-            <a:pPr indent="0" marL="0">
-              <a:buNone/>
-            </a:pPr>
-            <a:r>
-              <a:rPr lang="en-US" sz="1250" dirty="0">
-                <a:solidFill>
-                  <a:srgbClr val="17364A"/>
-                </a:solidFill>
-                <a:latin typeface="Aptos" pitchFamily="34" charset="0"/>
-                <a:ea typeface="Aptos" pitchFamily="34" charset="-122"/>
-                <a:cs typeface="Aptos" pitchFamily="34" charset="-120"/>
-              </a:rPr>
-              <a:t>Review the core ideas, complete the practical exercise, check your understanding, and use the related plays and tools to apply the lesson.</a:t>
-            </a:r>
-            <a:endParaRPr lang="en-US" sz="1250" dirty="0"/>
+            <a:pPr algn="ctr" indent="0" marL="0">
+              <a:buNone/>
+            </a:pPr>
+            <a:r>
+              <a:rPr lang="en-US" sz="1500" b="1" dirty="0">
+                <a:solidFill>
+                  <a:srgbClr val="FFFFFF"/>
+                </a:solidFill>
+                <a:latin typeface="Aptos" pitchFamily="34" charset="0"/>
+                <a:ea typeface="Aptos" pitchFamily="34" charset="-122"/>
+                <a:cs typeface="Aptos" pitchFamily="34" charset="-120"/>
+              </a:rPr>
+              <a:t>Learn</a:t>
+            </a:r>
+            <a:endParaRPr lang="en-US" sz="1500" dirty="0"/>
+          </a:p>
+        </p:txBody>
+      </p:sp>
+      <p:sp>
+        <p:nvSpPr>
+          <p:cNvPr id="15" name="Text 13"/>
+          <p:cNvSpPr/>
+          <p:nvPr/>
+        </p:nvSpPr>
+        <p:spPr>
+          <a:xfrm>
+            <a:off x="8695944" y="3941064"/>
+            <a:ext cx="201168" cy="256032"/>
+          </a:xfrm>
+          <a:prstGeom prst="rect">
+            <a:avLst/>
+          </a:prstGeom>
+          <a:noFill/>
+          <a:ln/>
+        </p:spPr>
+        <p:txBody>
+          <a:bodyPr wrap="square" lIns="0" tIns="0" rIns="0" bIns="0" rtlCol="0" anchor="ctr"/>
+          <a:lstStyle/>
+          <a:p>
+            <a:pPr algn="ctr" indent="0" marL="0">
+              <a:buNone/>
+            </a:pPr>
+            <a:r>
+              <a:rPr lang="en-US" sz="1800" b="1" dirty="0">
+                <a:solidFill>
+                  <a:srgbClr val="0068B7"/>
+                </a:solidFill>
+                <a:latin typeface="Aptos" pitchFamily="34" charset="0"/>
+                <a:ea typeface="Aptos" pitchFamily="34" charset="-122"/>
+                <a:cs typeface="Aptos" pitchFamily="34" charset="-120"/>
+              </a:rPr>
+              <a:t>â†’</a:t>
+            </a:r>
+            <a:endParaRPr lang="en-US" sz="1800" dirty="0"/>
+          </a:p>
+        </p:txBody>
+      </p:sp>
+      <p:sp>
+        <p:nvSpPr>
+          <p:cNvPr id="16" name="Shape 14"/>
+          <p:cNvSpPr/>
+          <p:nvPr/>
+        </p:nvSpPr>
+        <p:spPr>
+          <a:xfrm>
+            <a:off x="8924544" y="3730752"/>
+            <a:ext cx="1033272" cy="749808"/>
+          </a:xfrm>
+          <a:prstGeom prst="roundRect">
+            <a:avLst>
+              <a:gd name="adj" fmla="val 14634"/>
+            </a:avLst>
+          </a:prstGeom>
+          <a:solidFill>
+            <a:srgbClr val="2F8A28"/>
+          </a:solidFill>
+          <a:ln w="12700">
+            <a:solidFill>
+              <a:srgbClr val="2F8A28"/>
+            </a:solidFill>
+            <a:prstDash val="solid"/>
+          </a:ln>
+        </p:spPr>
+      </p:sp>
+      <p:sp>
+        <p:nvSpPr>
+          <p:cNvPr id="17" name="Text 15"/>
+          <p:cNvSpPr/>
+          <p:nvPr/>
+        </p:nvSpPr>
+        <p:spPr>
+          <a:xfrm>
+            <a:off x="8997696" y="3922776"/>
+            <a:ext cx="886968" cy="310896"/>
+          </a:xfrm>
+          <a:prstGeom prst="rect">
+            <a:avLst/>
+          </a:prstGeom>
+          <a:noFill/>
+          <a:ln/>
+        </p:spPr>
+        <p:txBody>
+          <a:bodyPr wrap="square" lIns="0" tIns="0" rIns="0" bIns="0" rtlCol="0" anchor="ctr">
+            <a:normAutofit/>
+          </a:bodyPr>
+          <a:lstStyle/>
+          <a:p>
+            <a:pPr algn="ctr" indent="0" marL="0">
+              <a:buNone/>
+            </a:pPr>
+            <a:r>
+              <a:rPr lang="en-US" sz="1500" b="1" dirty="0">
+                <a:solidFill>
+                  <a:srgbClr val="FFFFFF"/>
+                </a:solidFill>
+                <a:latin typeface="Aptos" pitchFamily="34" charset="0"/>
+                <a:ea typeface="Aptos" pitchFamily="34" charset="-122"/>
+                <a:cs typeface="Aptos" pitchFamily="34" charset="-120"/>
+              </a:rPr>
+              <a:t>Apply</a:t>
+            </a:r>
+            <a:endParaRPr lang="en-US" sz="1500" dirty="0"/>
+          </a:p>
+        </p:txBody>
+      </p:sp>
+      <p:sp>
+        <p:nvSpPr>
+          <p:cNvPr id="18" name="Text 16"/>
+          <p:cNvSpPr/>
+          <p:nvPr/>
+        </p:nvSpPr>
+        <p:spPr>
+          <a:xfrm>
+            <a:off x="9985248" y="3941064"/>
+            <a:ext cx="201168" cy="256032"/>
+          </a:xfrm>
+          <a:prstGeom prst="rect">
+            <a:avLst/>
+          </a:prstGeom>
+          <a:noFill/>
+          <a:ln/>
+        </p:spPr>
+        <p:txBody>
+          <a:bodyPr wrap="square" lIns="0" tIns="0" rIns="0" bIns="0" rtlCol="0" anchor="ctr"/>
+          <a:lstStyle/>
+          <a:p>
+            <a:pPr algn="ctr" indent="0" marL="0">
+              <a:buNone/>
+            </a:pPr>
+            <a:r>
+              <a:rPr lang="en-US" sz="1800" b="1" dirty="0">
+                <a:solidFill>
+                  <a:srgbClr val="0068B7"/>
+                </a:solidFill>
+                <a:latin typeface="Aptos" pitchFamily="34" charset="0"/>
+                <a:ea typeface="Aptos" pitchFamily="34" charset="-122"/>
+                <a:cs typeface="Aptos" pitchFamily="34" charset="-120"/>
+              </a:rPr>
+              <a:t>â†’</a:t>
+            </a:r>
+            <a:endParaRPr lang="en-US" sz="1800" dirty="0"/>
+          </a:p>
+        </p:txBody>
+      </p:sp>
+      <p:sp>
+        <p:nvSpPr>
+          <p:cNvPr id="19" name="Shape 17"/>
+          <p:cNvSpPr/>
+          <p:nvPr/>
+        </p:nvSpPr>
+        <p:spPr>
+          <a:xfrm>
+            <a:off x="10213848" y="3730752"/>
+            <a:ext cx="1033272" cy="749808"/>
+          </a:xfrm>
+          <a:prstGeom prst="roundRect">
+            <a:avLst>
+              <a:gd name="adj" fmla="val 14634"/>
+            </a:avLst>
+          </a:prstGeom>
+          <a:solidFill>
+            <a:srgbClr val="6A4CA3"/>
+          </a:solidFill>
+          <a:ln w="12700">
+            <a:solidFill>
+              <a:srgbClr val="6A4CA3"/>
+            </a:solidFill>
+            <a:prstDash val="solid"/>
+          </a:ln>
+        </p:spPr>
+      </p:sp>
+      <p:sp>
+        <p:nvSpPr>
+          <p:cNvPr id="20" name="Text 18"/>
+          <p:cNvSpPr/>
+          <p:nvPr/>
+        </p:nvSpPr>
+        <p:spPr>
+          <a:xfrm>
+            <a:off x="10287000" y="3922776"/>
+            <a:ext cx="886968" cy="310896"/>
+          </a:xfrm>
+          <a:prstGeom prst="rect">
+            <a:avLst/>
+          </a:prstGeom>
+          <a:noFill/>
+          <a:ln/>
+        </p:spPr>
+        <p:txBody>
+          <a:bodyPr wrap="square" lIns="0" tIns="0" rIns="0" bIns="0" rtlCol="0" anchor="ctr">
+            <a:normAutofit/>
+          </a:bodyPr>
+          <a:lstStyle/>
+          <a:p>
+            <a:pPr algn="ctr" indent="0" marL="0">
+              <a:buNone/>
+            </a:pPr>
+            <a:r>
+              <a:rPr lang="en-US" sz="1500" b="1" dirty="0">
+                <a:solidFill>
+                  <a:srgbClr val="FFFFFF"/>
+                </a:solidFill>
+                <a:latin typeface="Aptos" pitchFamily="34" charset="0"/>
+                <a:ea typeface="Aptos" pitchFamily="34" charset="-122"/>
+                <a:cs typeface="Aptos" pitchFamily="34" charset="-120"/>
+              </a:rPr>
+              <a:t>Document</a:t>
+            </a:r>
+            <a:endParaRPr lang="en-US" sz="1500" dirty="0"/>
           </a:p>
         </p:txBody>
       </p:sp>
@@ -9525,7 +10098,7 @@
                 <a:ea typeface="Aptos" pitchFamily="34" charset="-122"/>
                 <a:cs typeface="Aptos" pitchFamily="34" charset="-120"/>
               </a:rPr>
-              <a:t>© Paula Soper</a:t>
+              <a:t>Â© Paula Soper</a:t>
             </a:r>
             <a:endParaRPr lang="en-US" sz="800" dirty="0"/>
           </a:p>
@@ -9539,8 +10112,47 @@
         </p:nvSpPr>
         <p:spPr>
           <a:xfrm>
+            <a:off x="11137392" y="6510528"/>
+            <a:ext cx="411480" cy="201168"/>
+          </a:xfrm>
+          <a:prstGeom prst="rect">
+            <a:avLst/>
+          </a:prstGeom>
+          <a:noFill/>
+          <a:ln/>
+        </p:spPr>
+        <p:txBody>
+          <a:bodyPr wrap="square" lIns="0" tIns="0" rIns="0" bIns="0" rtlCol="0" anchor="ctr"/>
+          <a:lstStyle/>
+          <a:p>
+            <a:pPr algn="r" indent="0" marL="0">
+              <a:buNone/>
+            </a:pPr>
+            <a:r>
+              <a:rPr lang="en-US" sz="900" dirty="0">
+                <a:solidFill>
+                  <a:srgbClr val="5F7181"/>
+                </a:solidFill>
+                <a:latin typeface="Aptos" pitchFamily="34" charset="0"/>
+                <a:ea typeface="Aptos" pitchFamily="34" charset="-122"/>
+                <a:cs typeface="Aptos" pitchFamily="34" charset="-120"/>
+              </a:rPr>
+              <a:t>20</a:t>
+            </a:r>
+            <a:endParaRPr lang="en-US" sz="900" dirty="0"/>
+          </a:p>
+        </p:txBody>
+      </p:sp>
+      <p:sp>
+        <p:nvSpPr>
+          <p:cNvPr id="8" name="Text 6"/>
+          <p:cNvSpPr/>
+          <p:nvPr/>
+        </p:nvSpPr>
+        <p:spPr>
+          <a:xfrm>
             <a:off x="640080" y="658368"/>
-            <a:ext cx="10881360" cy="566928"/>
+            <a:ext cx="10881360" cy="713232"/>
           </a:xfrm>
           <a:prstGeom prst="rect">
             <a:avLst/>
@@ -9558,7 +10170,7 @@
               <a:buNone/>
             </a:pPr>
             <a:r>
-              <a:rPr lang="en-US" sz="2700" b="1" dirty="0">
+              <a:rPr lang="en-US" sz="3400" b="1" dirty="0">
                 <a:solidFill>
                   <a:srgbClr val="003A63"/>
                 </a:solidFill>
@@ -9568,20 +10180,20 @@
               </a:rPr>
               <a:t>Expected Artifact or Evidence Continued</a:t>
             </a:r>
-            <a:endParaRPr lang="en-US" sz="2700" dirty="0"/>
-          </a:p>
-        </p:txBody>
-      </p:sp>
-      <p:sp>
-        <p:nvSpPr>
-          <p:cNvPr id="8" name="Text 6"/>
-          <p:cNvSpPr/>
-          <p:nvPr/>
-        </p:nvSpPr>
-        <p:spPr>
-          <a:xfrm>
-            <a:off x="868680" y="1417320"/>
-            <a:ext cx="6675120" cy="4434840"/>
+            <a:endParaRPr lang="en-US" sz="3400" dirty="0"/>
+          </a:p>
+        </p:txBody>
+      </p:sp>
+      <p:sp>
+        <p:nvSpPr>
+          <p:cNvPr id="9" name="Text 7"/>
+          <p:cNvSpPr/>
+          <p:nvPr/>
+        </p:nvSpPr>
+        <p:spPr>
+          <a:xfrm>
+            <a:off x="868680" y="1508760"/>
+            <a:ext cx="6537960" cy="4160520"/>
           </a:xfrm>
           <a:prstGeom prst="rect">
             <a:avLst/>
@@ -9596,7 +10208,7 @@
           <a:lstStyle/>
           <a:p>
             <a:r>
-              <a:rPr lang="en-US" sz="1700" dirty="0">
+              <a:rPr lang="en-US" sz="2100" dirty="0">
                 <a:solidFill>
                   <a:srgbClr val="17364A"/>
                 </a:solidFill>
@@ -9606,13 +10218,13 @@
               </a:rPr>
               <a:t>Validation checklist</a:t>
             </a:r>
-            <a:endParaRPr lang="en-US" sz="1700" dirty="0"/>
-          </a:p>
-        </p:txBody>
-      </p:sp>
-      <p:sp>
-        <p:nvSpPr>
-          <p:cNvPr id="9" name="Shape 7"/>
+            <a:endParaRPr lang="en-US" sz="2100" dirty="0"/>
+          </a:p>
+        </p:txBody>
+      </p:sp>
+      <p:sp>
+        <p:nvSpPr>
+          <p:cNvPr id="10" name="Shape 8"/>
           <p:cNvSpPr/>
           <p:nvPr/>
         </p:nvSpPr>
@@ -9639,14 +10251,14 @@
       </p:sp>
       <p:sp>
         <p:nvSpPr>
-          <p:cNvPr id="10" name="Text 8"/>
+          <p:cNvPr id="11" name="Text 9"/>
           <p:cNvSpPr/>
           <p:nvPr/>
         </p:nvSpPr>
         <p:spPr>
           <a:xfrm>
             <a:off x="8074152" y="1563624"/>
-            <a:ext cx="2825496" cy="201168"/>
+            <a:ext cx="2825496" cy="256032"/>
           </a:xfrm>
           <a:prstGeom prst="rect">
             <a:avLst/>
@@ -9662,7 +10274,7 @@
               <a:buNone/>
             </a:pPr>
             <a:r>
-              <a:rPr lang="en-US" sz="950" b="1" dirty="0">
+              <a:rPr lang="en-US" sz="1300" b="1" dirty="0">
                 <a:solidFill>
                   <a:srgbClr val="0068B7"/>
                 </a:solidFill>
@@ -9672,20 +10284,20 @@
               </a:rPr>
               <a:t>Key idea</a:t>
             </a:r>
-            <a:endParaRPr lang="en-US" sz="950" dirty="0"/>
-          </a:p>
-        </p:txBody>
-      </p:sp>
-      <p:sp>
-        <p:nvSpPr>
-          <p:cNvPr id="11" name="Text 9"/>
-          <p:cNvSpPr/>
-          <p:nvPr/>
-        </p:nvSpPr>
-        <p:spPr>
-          <a:xfrm>
-            <a:off x="8074152" y="1856232"/>
-            <a:ext cx="2825496" cy="1261872"/>
+            <a:endParaRPr lang="en-US" sz="1300" dirty="0"/>
+          </a:p>
+        </p:txBody>
+      </p:sp>
+      <p:sp>
+        <p:nvSpPr>
+          <p:cNvPr id="12" name="Text 10"/>
+          <p:cNvSpPr/>
+          <p:nvPr/>
+        </p:nvSpPr>
+        <p:spPr>
+          <a:xfrm>
+            <a:off x="8074152" y="1920240"/>
+            <a:ext cx="2825496" cy="1188720"/>
           </a:xfrm>
           <a:prstGeom prst="rect">
             <a:avLst/>
@@ -9703,7 +10315,7 @@
               <a:buNone/>
             </a:pPr>
             <a:r>
-              <a:rPr lang="en-US" sz="1250" dirty="0">
+              <a:rPr lang="en-US" sz="1550" dirty="0">
                 <a:solidFill>
                   <a:srgbClr val="17364A"/>
                 </a:solidFill>
@@ -9713,13 +10325,13 @@
               </a:rPr>
               <a:t>Validation checklist</a:t>
             </a:r>
-            <a:endParaRPr lang="en-US" sz="1250" dirty="0"/>
-          </a:p>
-        </p:txBody>
-      </p:sp>
-      <p:sp>
-        <p:nvSpPr>
-          <p:cNvPr id="12" name="Shape 10"/>
+            <a:endParaRPr lang="en-US" sz="1550" dirty="0"/>
+          </a:p>
+        </p:txBody>
+      </p:sp>
+      <p:sp>
+        <p:nvSpPr>
+          <p:cNvPr id="13" name="Shape 11"/>
           <p:cNvSpPr/>
           <p:nvPr/>
         </p:nvSpPr>
@@ -9746,14 +10358,14 @@
       </p:sp>
       <p:sp>
         <p:nvSpPr>
-          <p:cNvPr id="13" name="Text 11"/>
+          <p:cNvPr id="14" name="Text 12"/>
           <p:cNvSpPr/>
           <p:nvPr/>
         </p:nvSpPr>
         <p:spPr>
           <a:xfrm>
             <a:off x="8074152" y="3666744"/>
-            <a:ext cx="2825496" cy="201168"/>
+            <a:ext cx="2825496" cy="256032"/>
           </a:xfrm>
           <a:prstGeom prst="rect">
             <a:avLst/>
@@ -9769,7 +10381,7 @@
               <a:buNone/>
             </a:pPr>
             <a:r>
-              <a:rPr lang="en-US" sz="950" b="1" dirty="0">
+              <a:rPr lang="en-US" sz="1300" b="1" dirty="0">
                 <a:solidFill>
                   <a:srgbClr val="0068B7"/>
                 </a:solidFill>
@@ -9779,20 +10391,20 @@
               </a:rPr>
               <a:t>Use this for</a:t>
             </a:r>
-            <a:endParaRPr lang="en-US" sz="950" dirty="0"/>
-          </a:p>
-        </p:txBody>
-      </p:sp>
-      <p:sp>
-        <p:nvSpPr>
-          <p:cNvPr id="14" name="Text 12"/>
-          <p:cNvSpPr/>
-          <p:nvPr/>
-        </p:nvSpPr>
-        <p:spPr>
-          <a:xfrm>
-            <a:off x="8074152" y="3959352"/>
-            <a:ext cx="2825496" cy="1170432"/>
+            <a:endParaRPr lang="en-US" sz="1300" dirty="0"/>
+          </a:p>
+        </p:txBody>
+      </p:sp>
+      <p:sp>
+        <p:nvSpPr>
+          <p:cNvPr id="15" name="Text 13"/>
+          <p:cNvSpPr/>
+          <p:nvPr/>
+        </p:nvSpPr>
+        <p:spPr>
+          <a:xfrm>
+            <a:off x="8074152" y="4023360"/>
+            <a:ext cx="2825496" cy="1097280"/>
           </a:xfrm>
           <a:prstGeom prst="rect">
             <a:avLst/>
@@ -9810,7 +10422,7 @@
               <a:buNone/>
             </a:pPr>
             <a:r>
-              <a:rPr lang="en-US" sz="1250" dirty="0">
+              <a:rPr lang="en-US" sz="1550" dirty="0">
                 <a:solidFill>
                   <a:srgbClr val="17364A"/>
                 </a:solidFill>
@@ -9820,7 +10432,7 @@
               </a:rPr>
               <a:t>Connect the concept to public health decisions, safeguards, documentation, or implementation work.</a:t>
             </a:r>
-            <a:endParaRPr lang="en-US" sz="1250" dirty="0"/>
+            <a:endParaRPr lang="en-US" sz="1550" dirty="0"/>
           </a:p>
         </p:txBody>
       </p:sp>
@@ -10017,7 +10629,7 @@
                 <a:ea typeface="Aptos" pitchFamily="34" charset="-122"/>
                 <a:cs typeface="Aptos" pitchFamily="34" charset="-120"/>
               </a:rPr>
-              <a:t>© Paula Soper</a:t>
+              <a:t>Â© Paula Soper</a:t>
             </a:r>
             <a:endParaRPr lang="en-US" sz="800" dirty="0"/>
           </a:p>
@@ -10025,7 +10637,46 @@
       </p:sp>
       <p:sp>
         <p:nvSpPr>
-          <p:cNvPr id="7" name="Shape 5"/>
+          <p:cNvPr id="7" name="Text 5"/>
+          <p:cNvSpPr/>
+          <p:nvPr/>
+        </p:nvSpPr>
+        <p:spPr>
+          <a:xfrm>
+            <a:off x="11137392" y="6510528"/>
+            <a:ext cx="411480" cy="201168"/>
+          </a:xfrm>
+          <a:prstGeom prst="rect">
+            <a:avLst/>
+          </a:prstGeom>
+          <a:noFill/>
+          <a:ln/>
+        </p:spPr>
+        <p:txBody>
+          <a:bodyPr wrap="square" lIns="0" tIns="0" rIns="0" bIns="0" rtlCol="0" anchor="ctr"/>
+          <a:lstStyle/>
+          <a:p>
+            <a:pPr algn="r" indent="0" marL="0">
+              <a:buNone/>
+            </a:pPr>
+            <a:r>
+              <a:rPr lang="en-US" sz="900" dirty="0">
+                <a:solidFill>
+                  <a:srgbClr val="5F7181"/>
+                </a:solidFill>
+                <a:latin typeface="Aptos" pitchFamily="34" charset="0"/>
+                <a:ea typeface="Aptos" pitchFamily="34" charset="-122"/>
+                <a:cs typeface="Aptos" pitchFamily="34" charset="-120"/>
+              </a:rPr>
+              <a:t>21</a:t>
+            </a:r>
+            <a:endParaRPr lang="en-US" sz="900" dirty="0"/>
+          </a:p>
+        </p:txBody>
+      </p:sp>
+      <p:sp>
+        <p:nvSpPr>
+          <p:cNvPr id="8" name="Shape 6"/>
           <p:cNvSpPr/>
           <p:nvPr/>
         </p:nvSpPr>
@@ -10050,7 +10701,7 @@
       </p:sp>
       <p:sp>
         <p:nvSpPr>
-          <p:cNvPr id="8" name="Text 6"/>
+          <p:cNvPr id="9" name="Text 7"/>
           <p:cNvSpPr/>
           <p:nvPr/>
         </p:nvSpPr>
@@ -10089,14 +10740,14 @@
       </p:sp>
       <p:sp>
         <p:nvSpPr>
-          <p:cNvPr id="9" name="Text 7"/>
+          <p:cNvPr id="10" name="Text 8"/>
           <p:cNvSpPr/>
           <p:nvPr/>
         </p:nvSpPr>
         <p:spPr>
           <a:xfrm>
             <a:off x="640080" y="621792"/>
-            <a:ext cx="10881360" cy="566928"/>
+            <a:ext cx="10881360" cy="713232"/>
           </a:xfrm>
           <a:prstGeom prst="rect">
             <a:avLst/>
@@ -10114,7 +10765,7 @@
               <a:buNone/>
             </a:pPr>
             <a:r>
-              <a:rPr lang="en-US" sz="2700" b="1" dirty="0">
+              <a:rPr lang="en-US" sz="3400" b="1" dirty="0">
                 <a:solidFill>
                   <a:srgbClr val="003A63"/>
                 </a:solidFill>
@@ -10124,20 +10775,20 @@
               </a:rPr>
               <a:t>Expected Assignment</a:t>
             </a:r>
-            <a:endParaRPr lang="en-US" sz="2700" dirty="0"/>
-          </a:p>
-        </p:txBody>
-      </p:sp>
-      <p:sp>
-        <p:nvSpPr>
-          <p:cNvPr id="10" name="Text 8"/>
-          <p:cNvSpPr/>
-          <p:nvPr/>
-        </p:nvSpPr>
-        <p:spPr>
-          <a:xfrm>
-            <a:off x="868680" y="1417320"/>
-            <a:ext cx="6675120" cy="4434840"/>
+            <a:endParaRPr lang="en-US" sz="3400" dirty="0"/>
+          </a:p>
+        </p:txBody>
+      </p:sp>
+      <p:sp>
+        <p:nvSpPr>
+          <p:cNvPr id="11" name="Text 9"/>
+          <p:cNvSpPr/>
+          <p:nvPr/>
+        </p:nvSpPr>
+        <p:spPr>
+          <a:xfrm>
+            <a:off x="868680" y="1508760"/>
+            <a:ext cx="6537960" cy="4160520"/>
           </a:xfrm>
           <a:prstGeom prst="rect">
             <a:avLst/>
@@ -10152,7 +10803,7 @@
           <a:lstStyle/>
           <a:p>
             <a:r>
-              <a:rPr lang="en-US" sz="1700" dirty="0">
+              <a:rPr lang="en-US" sz="2100" dirty="0">
                 <a:solidFill>
                   <a:srgbClr val="17364A"/>
                 </a:solidFill>
@@ -10162,11 +10813,11 @@
               </a:rPr>
               <a:t>FHIR data needs worksheet</a:t>
             </a:r>
-            <a:endParaRPr lang="en-US" sz="1700" dirty="0"/>
-          </a:p>
-          <a:p>
-            <a:r>
-              <a:rPr lang="en-US" sz="1700" dirty="0">
+            <a:endParaRPr lang="en-US" sz="2100" dirty="0"/>
+          </a:p>
+          <a:p>
+            <a:r>
+              <a:rPr lang="en-US" sz="2100" dirty="0">
                 <a:solidFill>
                   <a:srgbClr val="17364A"/>
                 </a:solidFill>
@@ -10176,11 +10827,11 @@
               </a:rPr>
               <a:t>List of relevant FHIR resources</a:t>
             </a:r>
-            <a:endParaRPr lang="en-US" sz="1700" dirty="0"/>
-          </a:p>
-          <a:p>
-            <a:r>
-              <a:rPr lang="en-US" sz="1700" dirty="0">
+            <a:endParaRPr lang="en-US" sz="2100" dirty="0"/>
+          </a:p>
+          <a:p>
+            <a:r>
+              <a:rPr lang="en-US" sz="2100" dirty="0">
                 <a:solidFill>
                   <a:srgbClr val="17364A"/>
                 </a:solidFill>
@@ -10190,27 +10841,13 @@
               </a:rPr>
               <a:t>Vendor or implementation questions</a:t>
             </a:r>
-            <a:endParaRPr lang="en-US" sz="1700" dirty="0"/>
-          </a:p>
-          <a:p>
-            <a:r>
-              <a:rPr lang="en-US" sz="1700" dirty="0">
-                <a:solidFill>
-                  <a:srgbClr val="17364A"/>
-                </a:solidFill>
-                <a:latin typeface="Aptos" pitchFamily="34" charset="0"/>
-                <a:ea typeface="Aptos" pitchFamily="34" charset="-122"/>
-                <a:cs typeface="Aptos" pitchFamily="34" charset="-120"/>
-              </a:rPr>
-              <a:t>Validation checklist</a:t>
-            </a:r>
-            <a:endParaRPr lang="en-US" sz="1700" dirty="0"/>
-          </a:p>
-        </p:txBody>
-      </p:sp>
-      <p:sp>
-        <p:nvSpPr>
-          <p:cNvPr id="11" name="Shape 9"/>
+            <a:endParaRPr lang="en-US" sz="2100" dirty="0"/>
+          </a:p>
+        </p:txBody>
+      </p:sp>
+      <p:sp>
+        <p:nvSpPr>
+          <p:cNvPr id="12" name="Shape 10"/>
           <p:cNvSpPr/>
           <p:nvPr/>
         </p:nvSpPr>
@@ -10237,14 +10874,14 @@
       </p:sp>
       <p:sp>
         <p:nvSpPr>
-          <p:cNvPr id="12" name="Text 10"/>
+          <p:cNvPr id="13" name="Text 11"/>
           <p:cNvSpPr/>
           <p:nvPr/>
         </p:nvSpPr>
         <p:spPr>
           <a:xfrm>
             <a:off x="8074152" y="1563624"/>
-            <a:ext cx="2825496" cy="201168"/>
+            <a:ext cx="2825496" cy="256032"/>
           </a:xfrm>
           <a:prstGeom prst="rect">
             <a:avLst/>
@@ -10260,7 +10897,7 @@
               <a:buNone/>
             </a:pPr>
             <a:r>
-              <a:rPr lang="en-US" sz="950" b="1" dirty="0">
+              <a:rPr lang="en-US" sz="1300" b="1" dirty="0">
                 <a:solidFill>
                   <a:srgbClr val="0068B7"/>
                 </a:solidFill>
@@ -10270,20 +10907,20 @@
               </a:rPr>
               <a:t>Key idea</a:t>
             </a:r>
-            <a:endParaRPr lang="en-US" sz="950" dirty="0"/>
-          </a:p>
-        </p:txBody>
-      </p:sp>
-      <p:sp>
-        <p:nvSpPr>
-          <p:cNvPr id="13" name="Text 11"/>
-          <p:cNvSpPr/>
-          <p:nvPr/>
-        </p:nvSpPr>
-        <p:spPr>
-          <a:xfrm>
-            <a:off x="8074152" y="1856232"/>
-            <a:ext cx="2825496" cy="1261872"/>
+            <a:endParaRPr lang="en-US" sz="1300" dirty="0"/>
+          </a:p>
+        </p:txBody>
+      </p:sp>
+      <p:sp>
+        <p:nvSpPr>
+          <p:cNvPr id="14" name="Text 12"/>
+          <p:cNvSpPr/>
+          <p:nvPr/>
+        </p:nvSpPr>
+        <p:spPr>
+          <a:xfrm>
+            <a:off x="8074152" y="1920240"/>
+            <a:ext cx="2825496" cy="1188720"/>
           </a:xfrm>
           <a:prstGeom prst="rect">
             <a:avLst/>
@@ -10301,7 +10938,7 @@
               <a:buNone/>
             </a:pPr>
             <a:r>
-              <a:rPr lang="en-US" sz="1250" dirty="0">
+              <a:rPr lang="en-US" sz="1550" dirty="0">
                 <a:solidFill>
                   <a:srgbClr val="17364A"/>
                 </a:solidFill>
@@ -10311,13 +10948,13 @@
               </a:rPr>
               <a:t>FHIR data needs worksheet</a:t>
             </a:r>
-            <a:endParaRPr lang="en-US" sz="1250" dirty="0"/>
-          </a:p>
-        </p:txBody>
-      </p:sp>
-      <p:sp>
-        <p:nvSpPr>
-          <p:cNvPr id="14" name="Shape 12"/>
+            <a:endParaRPr lang="en-US" sz="1550" dirty="0"/>
+          </a:p>
+        </p:txBody>
+      </p:sp>
+      <p:sp>
+        <p:nvSpPr>
+          <p:cNvPr id="15" name="Shape 13"/>
           <p:cNvSpPr/>
           <p:nvPr/>
         </p:nvSpPr>
@@ -10344,14 +10981,14 @@
       </p:sp>
       <p:sp>
         <p:nvSpPr>
-          <p:cNvPr id="15" name="Text 13"/>
+          <p:cNvPr id="16" name="Text 14"/>
           <p:cNvSpPr/>
           <p:nvPr/>
         </p:nvSpPr>
         <p:spPr>
           <a:xfrm>
             <a:off x="8074152" y="3666744"/>
-            <a:ext cx="2825496" cy="201168"/>
+            <a:ext cx="2825496" cy="256032"/>
           </a:xfrm>
           <a:prstGeom prst="rect">
             <a:avLst/>
@@ -10367,7 +11004,7 @@
               <a:buNone/>
             </a:pPr>
             <a:r>
-              <a:rPr lang="en-US" sz="950" b="1" dirty="0">
+              <a:rPr lang="en-US" sz="1300" b="1" dirty="0">
                 <a:solidFill>
                   <a:srgbClr val="0068B7"/>
                 </a:solidFill>
@@ -10377,20 +11014,20 @@
               </a:rPr>
               <a:t>Use this for</a:t>
             </a:r>
-            <a:endParaRPr lang="en-US" sz="950" dirty="0"/>
-          </a:p>
-        </p:txBody>
-      </p:sp>
-      <p:sp>
-        <p:nvSpPr>
-          <p:cNvPr id="16" name="Text 14"/>
-          <p:cNvSpPr/>
-          <p:nvPr/>
-        </p:nvSpPr>
-        <p:spPr>
-          <a:xfrm>
-            <a:off x="8074152" y="3959352"/>
-            <a:ext cx="2825496" cy="1170432"/>
+            <a:endParaRPr lang="en-US" sz="1300" dirty="0"/>
+          </a:p>
+        </p:txBody>
+      </p:sp>
+      <p:sp>
+        <p:nvSpPr>
+          <p:cNvPr id="17" name="Text 15"/>
+          <p:cNvSpPr/>
+          <p:nvPr/>
+        </p:nvSpPr>
+        <p:spPr>
+          <a:xfrm>
+            <a:off x="8074152" y="4023360"/>
+            <a:ext cx="2825496" cy="1097280"/>
           </a:xfrm>
           <a:prstGeom prst="rect">
             <a:avLst/>
@@ -10408,7 +11045,7 @@
               <a:buNone/>
             </a:pPr>
             <a:r>
-              <a:rPr lang="en-US" sz="1250" dirty="0">
+              <a:rPr lang="en-US" sz="1550" dirty="0">
                 <a:solidFill>
                   <a:srgbClr val="17364A"/>
                 </a:solidFill>
@@ -10418,7 +11055,7 @@
               </a:rPr>
               <a:t>Connect the concept to public health decisions, safeguards, documentation, or implementation work.</a:t>
             </a:r>
-            <a:endParaRPr lang="en-US" sz="1250" dirty="0"/>
+            <a:endParaRPr lang="en-US" sz="1550" dirty="0"/>
           </a:p>
         </p:txBody>
       </p:sp>
@@ -10615,7 +11252,7 @@
                 <a:ea typeface="Aptos" pitchFamily="34" charset="-122"/>
                 <a:cs typeface="Aptos" pitchFamily="34" charset="-120"/>
               </a:rPr>
-              <a:t>© Paula Soper</a:t>
+              <a:t>Â© Paula Soper</a:t>
             </a:r>
             <a:endParaRPr lang="en-US" sz="800" dirty="0"/>
           </a:p>
@@ -10623,7 +11260,46 @@
       </p:sp>
       <p:sp>
         <p:nvSpPr>
-          <p:cNvPr id="7" name="Shape 5"/>
+          <p:cNvPr id="7" name="Text 5"/>
+          <p:cNvSpPr/>
+          <p:nvPr/>
+        </p:nvSpPr>
+        <p:spPr>
+          <a:xfrm>
+            <a:off x="11137392" y="6510528"/>
+            <a:ext cx="411480" cy="201168"/>
+          </a:xfrm>
+          <a:prstGeom prst="rect">
+            <a:avLst/>
+          </a:prstGeom>
+          <a:noFill/>
+          <a:ln/>
+        </p:spPr>
+        <p:txBody>
+          <a:bodyPr wrap="square" lIns="0" tIns="0" rIns="0" bIns="0" rtlCol="0" anchor="ctr"/>
+          <a:lstStyle/>
+          <a:p>
+            <a:pPr algn="r" indent="0" marL="0">
+              <a:buNone/>
+            </a:pPr>
+            <a:r>
+              <a:rPr lang="en-US" sz="900" dirty="0">
+                <a:solidFill>
+                  <a:srgbClr val="5F7181"/>
+                </a:solidFill>
+                <a:latin typeface="Aptos" pitchFamily="34" charset="0"/>
+                <a:ea typeface="Aptos" pitchFamily="34" charset="-122"/>
+                <a:cs typeface="Aptos" pitchFamily="34" charset="-120"/>
+              </a:rPr>
+              <a:t>22</a:t>
+            </a:r>
+            <a:endParaRPr lang="en-US" sz="900" dirty="0"/>
+          </a:p>
+        </p:txBody>
+      </p:sp>
+      <p:sp>
+        <p:nvSpPr>
+          <p:cNvPr id="8" name="Shape 6"/>
           <p:cNvSpPr/>
           <p:nvPr/>
         </p:nvSpPr>
@@ -10648,7 +11324,7 @@
       </p:sp>
       <p:sp>
         <p:nvSpPr>
-          <p:cNvPr id="8" name="Text 6"/>
+          <p:cNvPr id="9" name="Text 7"/>
           <p:cNvSpPr/>
           <p:nvPr/>
         </p:nvSpPr>
@@ -10687,14 +11363,14 @@
       </p:sp>
       <p:sp>
         <p:nvSpPr>
-          <p:cNvPr id="9" name="Text 7"/>
+          <p:cNvPr id="10" name="Text 8"/>
           <p:cNvSpPr/>
           <p:nvPr/>
         </p:nvSpPr>
         <p:spPr>
           <a:xfrm>
             <a:off x="640080" y="621792"/>
-            <a:ext cx="10881360" cy="566928"/>
+            <a:ext cx="10881360" cy="713232"/>
           </a:xfrm>
           <a:prstGeom prst="rect">
             <a:avLst/>
@@ -10712,7 +11388,7 @@
               <a:buNone/>
             </a:pPr>
             <a:r>
-              <a:rPr lang="en-US" sz="2700" b="1" dirty="0">
+              <a:rPr lang="en-US" sz="3400" b="1" dirty="0">
                 <a:solidFill>
                   <a:srgbClr val="003A63"/>
                 </a:solidFill>
@@ -10722,20 +11398,20 @@
               </a:rPr>
               <a:t>Knowledge Check</a:t>
             </a:r>
-            <a:endParaRPr lang="en-US" sz="2700" dirty="0"/>
-          </a:p>
-        </p:txBody>
-      </p:sp>
-      <p:sp>
-        <p:nvSpPr>
-          <p:cNvPr id="10" name="Text 8"/>
-          <p:cNvSpPr/>
-          <p:nvPr/>
-        </p:nvSpPr>
-        <p:spPr>
-          <a:xfrm>
-            <a:off x="868680" y="1417320"/>
-            <a:ext cx="6675120" cy="4434840"/>
+            <a:endParaRPr lang="en-US" sz="3400" dirty="0"/>
+          </a:p>
+        </p:txBody>
+      </p:sp>
+      <p:sp>
+        <p:nvSpPr>
+          <p:cNvPr id="11" name="Text 9"/>
+          <p:cNvSpPr/>
+          <p:nvPr/>
+        </p:nvSpPr>
+        <p:spPr>
+          <a:xfrm>
+            <a:off x="868680" y="1508760"/>
+            <a:ext cx="6537960" cy="4160520"/>
           </a:xfrm>
           <a:prstGeom prst="rect">
             <a:avLst/>
@@ -10750,7 +11426,7 @@
           <a:lstStyle/>
           <a:p>
             <a:r>
-              <a:rPr lang="en-US" sz="1700" dirty="0">
+              <a:rPr lang="en-US" sz="2100" dirty="0">
                 <a:solidFill>
                   <a:srgbClr val="17364A"/>
                 </a:solidFill>
@@ -10760,11 +11436,11 @@
               </a:rPr>
               <a:t>1. What is a FHIR resource?</a:t>
             </a:r>
-            <a:endParaRPr lang="en-US" sz="1700" dirty="0"/>
-          </a:p>
-          <a:p>
-            <a:r>
-              <a:rPr lang="en-US" sz="1700" dirty="0">
+            <a:endParaRPr lang="en-US" sz="2100" dirty="0"/>
+          </a:p>
+          <a:p>
+            <a:r>
+              <a:rPr lang="en-US" sz="2100" dirty="0">
                 <a:solidFill>
                   <a:srgbClr val="17364A"/>
                 </a:solidFill>
@@ -10774,11 +11450,11 @@
               </a:rPr>
               <a:t>2. Why does FHIR matter for AI-supported public health workflows?</a:t>
             </a:r>
-            <a:endParaRPr lang="en-US" sz="1700" dirty="0"/>
-          </a:p>
-          <a:p>
-            <a:r>
-              <a:rPr lang="en-US" sz="1700" dirty="0">
+            <a:endParaRPr lang="en-US" sz="2100" dirty="0"/>
+          </a:p>
+          <a:p>
+            <a:r>
+              <a:rPr lang="en-US" sz="2100" dirty="0">
                 <a:solidFill>
                   <a:srgbClr val="17364A"/>
                 </a:solidFill>
@@ -10788,27 +11464,13 @@
               </a:rPr>
               <a:t>3. What should staff verify when a vendor says a product is FHIR-compatible?</a:t>
             </a:r>
-            <a:endParaRPr lang="en-US" sz="1700" dirty="0"/>
-          </a:p>
-          <a:p>
-            <a:r>
-              <a:rPr lang="en-US" sz="1700" dirty="0">
-                <a:solidFill>
-                  <a:srgbClr val="17364A"/>
-                </a:solidFill>
-                <a:latin typeface="Aptos" pitchFamily="34" charset="0"/>
-                <a:ea typeface="Aptos" pitchFamily="34" charset="-122"/>
-                <a:cs typeface="Aptos" pitchFamily="34" charset="-120"/>
-              </a:rPr>
-              <a:t>4. Which FHIR resource is commonly relevant to lab observations?</a:t>
-            </a:r>
-            <a:endParaRPr lang="en-US" sz="1700" dirty="0"/>
-          </a:p>
-        </p:txBody>
-      </p:sp>
-      <p:sp>
-        <p:nvSpPr>
-          <p:cNvPr id="11" name="Shape 9"/>
+            <a:endParaRPr lang="en-US" sz="2100" dirty="0"/>
+          </a:p>
+        </p:txBody>
+      </p:sp>
+      <p:sp>
+        <p:nvSpPr>
+          <p:cNvPr id="12" name="Shape 10"/>
           <p:cNvSpPr/>
           <p:nvPr/>
         </p:nvSpPr>
@@ -10835,14 +11497,14 @@
       </p:sp>
       <p:sp>
         <p:nvSpPr>
-          <p:cNvPr id="12" name="Text 10"/>
+          <p:cNvPr id="13" name="Text 11"/>
           <p:cNvSpPr/>
           <p:nvPr/>
         </p:nvSpPr>
         <p:spPr>
           <a:xfrm>
             <a:off x="8074152" y="1563624"/>
-            <a:ext cx="2825496" cy="201168"/>
+            <a:ext cx="2825496" cy="256032"/>
           </a:xfrm>
           <a:prstGeom prst="rect">
             <a:avLst/>
@@ -10858,7 +11520,7 @@
               <a:buNone/>
             </a:pPr>
             <a:r>
-              <a:rPr lang="en-US" sz="950" b="1" dirty="0">
+              <a:rPr lang="en-US" sz="1300" b="1" dirty="0">
                 <a:solidFill>
                   <a:srgbClr val="0068B7"/>
                 </a:solidFill>
@@ -10868,20 +11530,20 @@
               </a:rPr>
               <a:t>Key idea</a:t>
             </a:r>
-            <a:endParaRPr lang="en-US" sz="950" dirty="0"/>
-          </a:p>
-        </p:txBody>
-      </p:sp>
-      <p:sp>
-        <p:nvSpPr>
-          <p:cNvPr id="13" name="Text 11"/>
-          <p:cNvSpPr/>
-          <p:nvPr/>
-        </p:nvSpPr>
-        <p:spPr>
-          <a:xfrm>
-            <a:off x="8074152" y="1856232"/>
-            <a:ext cx="2825496" cy="1261872"/>
+            <a:endParaRPr lang="en-US" sz="1300" dirty="0"/>
+          </a:p>
+        </p:txBody>
+      </p:sp>
+      <p:sp>
+        <p:nvSpPr>
+          <p:cNvPr id="14" name="Text 12"/>
+          <p:cNvSpPr/>
+          <p:nvPr/>
+        </p:nvSpPr>
+        <p:spPr>
+          <a:xfrm>
+            <a:off x="8074152" y="1920240"/>
+            <a:ext cx="2825496" cy="1188720"/>
           </a:xfrm>
           <a:prstGeom prst="rect">
             <a:avLst/>
@@ -10899,7 +11561,7 @@
               <a:buNone/>
             </a:pPr>
             <a:r>
-              <a:rPr lang="en-US" sz="1250" dirty="0">
+              <a:rPr lang="en-US" sz="1550" dirty="0">
                 <a:solidFill>
                   <a:srgbClr val="17364A"/>
                 </a:solidFill>
@@ -10909,13 +11571,13 @@
               </a:rPr>
               <a:t>1. What is a FHIR resource?</a:t>
             </a:r>
-            <a:endParaRPr lang="en-US" sz="1250" dirty="0"/>
-          </a:p>
-        </p:txBody>
-      </p:sp>
-      <p:sp>
-        <p:nvSpPr>
-          <p:cNvPr id="14" name="Shape 12"/>
+            <a:endParaRPr lang="en-US" sz="1550" dirty="0"/>
+          </a:p>
+        </p:txBody>
+      </p:sp>
+      <p:sp>
+        <p:nvSpPr>
+          <p:cNvPr id="15" name="Shape 13"/>
           <p:cNvSpPr/>
           <p:nvPr/>
         </p:nvSpPr>
@@ -10942,14 +11604,14 @@
       </p:sp>
       <p:sp>
         <p:nvSpPr>
-          <p:cNvPr id="15" name="Text 13"/>
+          <p:cNvPr id="16" name="Text 14"/>
           <p:cNvSpPr/>
           <p:nvPr/>
         </p:nvSpPr>
         <p:spPr>
           <a:xfrm>
             <a:off x="8074152" y="3666744"/>
-            <a:ext cx="2825496" cy="201168"/>
+            <a:ext cx="2825496" cy="256032"/>
           </a:xfrm>
           <a:prstGeom prst="rect">
             <a:avLst/>
@@ -10965,7 +11627,7 @@
               <a:buNone/>
             </a:pPr>
             <a:r>
-              <a:rPr lang="en-US" sz="950" b="1" dirty="0">
+              <a:rPr lang="en-US" sz="1300" b="1" dirty="0">
                 <a:solidFill>
                   <a:srgbClr val="0068B7"/>
                 </a:solidFill>
@@ -10975,20 +11637,20 @@
               </a:rPr>
               <a:t>Use this for</a:t>
             </a:r>
-            <a:endParaRPr lang="en-US" sz="950" dirty="0"/>
-          </a:p>
-        </p:txBody>
-      </p:sp>
-      <p:sp>
-        <p:nvSpPr>
-          <p:cNvPr id="16" name="Text 14"/>
-          <p:cNvSpPr/>
-          <p:nvPr/>
-        </p:nvSpPr>
-        <p:spPr>
-          <a:xfrm>
-            <a:off x="8074152" y="3959352"/>
-            <a:ext cx="2825496" cy="1170432"/>
+            <a:endParaRPr lang="en-US" sz="1300" dirty="0"/>
+          </a:p>
+        </p:txBody>
+      </p:sp>
+      <p:sp>
+        <p:nvSpPr>
+          <p:cNvPr id="17" name="Text 15"/>
+          <p:cNvSpPr/>
+          <p:nvPr/>
+        </p:nvSpPr>
+        <p:spPr>
+          <a:xfrm>
+            <a:off x="8074152" y="4023360"/>
+            <a:ext cx="2825496" cy="1097280"/>
           </a:xfrm>
           <a:prstGeom prst="rect">
             <a:avLst/>
@@ -11006,7 +11668,7 @@
               <a:buNone/>
             </a:pPr>
             <a:r>
-              <a:rPr lang="en-US" sz="1250" dirty="0">
+              <a:rPr lang="en-US" sz="1550" dirty="0">
                 <a:solidFill>
                   <a:srgbClr val="17364A"/>
                 </a:solidFill>
@@ -11016,7 +11678,7 @@
               </a:rPr>
               <a:t>Connect the concept to public health decisions, safeguards, documentation, or implementation work.</a:t>
             </a:r>
-            <a:endParaRPr lang="en-US" sz="1250" dirty="0"/>
+            <a:endParaRPr lang="en-US" sz="1550" dirty="0"/>
           </a:p>
         </p:txBody>
       </p:sp>
@@ -11213,7 +11875,7 @@
                 <a:ea typeface="Aptos" pitchFamily="34" charset="-122"/>
                 <a:cs typeface="Aptos" pitchFamily="34" charset="-120"/>
               </a:rPr>
-              <a:t>© Paula Soper</a:t>
+              <a:t>Â© Paula Soper</a:t>
             </a:r>
             <a:endParaRPr lang="en-US" sz="800" dirty="0"/>
           </a:p>
@@ -11221,7 +11883,46 @@
       </p:sp>
       <p:sp>
         <p:nvSpPr>
-          <p:cNvPr id="7" name="Shape 5"/>
+          <p:cNvPr id="7" name="Text 5"/>
+          <p:cNvSpPr/>
+          <p:nvPr/>
+        </p:nvSpPr>
+        <p:spPr>
+          <a:xfrm>
+            <a:off x="11137392" y="6510528"/>
+            <a:ext cx="411480" cy="201168"/>
+          </a:xfrm>
+          <a:prstGeom prst="rect">
+            <a:avLst/>
+          </a:prstGeom>
+          <a:noFill/>
+          <a:ln/>
+        </p:spPr>
+        <p:txBody>
+          <a:bodyPr wrap="square" lIns="0" tIns="0" rIns="0" bIns="0" rtlCol="0" anchor="ctr"/>
+          <a:lstStyle/>
+          <a:p>
+            <a:pPr algn="r" indent="0" marL="0">
+              <a:buNone/>
+            </a:pPr>
+            <a:r>
+              <a:rPr lang="en-US" sz="900" dirty="0">
+                <a:solidFill>
+                  <a:srgbClr val="5F7181"/>
+                </a:solidFill>
+                <a:latin typeface="Aptos" pitchFamily="34" charset="0"/>
+                <a:ea typeface="Aptos" pitchFamily="34" charset="-122"/>
+                <a:cs typeface="Aptos" pitchFamily="34" charset="-120"/>
+              </a:rPr>
+              <a:t>23</a:t>
+            </a:r>
+            <a:endParaRPr lang="en-US" sz="900" dirty="0"/>
+          </a:p>
+        </p:txBody>
+      </p:sp>
+      <p:sp>
+        <p:nvSpPr>
+          <p:cNvPr id="8" name="Shape 6"/>
           <p:cNvSpPr/>
           <p:nvPr/>
         </p:nvSpPr>
@@ -11246,7 +11947,7 @@
       </p:sp>
       <p:sp>
         <p:nvSpPr>
-          <p:cNvPr id="8" name="Text 6"/>
+          <p:cNvPr id="9" name="Text 7"/>
           <p:cNvSpPr/>
           <p:nvPr/>
         </p:nvSpPr>
@@ -11285,14 +11986,14 @@
       </p:sp>
       <p:sp>
         <p:nvSpPr>
-          <p:cNvPr id="9" name="Text 7"/>
+          <p:cNvPr id="10" name="Text 8"/>
           <p:cNvSpPr/>
           <p:nvPr/>
         </p:nvSpPr>
         <p:spPr>
           <a:xfrm>
             <a:off x="640080" y="621792"/>
-            <a:ext cx="10881360" cy="566928"/>
+            <a:ext cx="10881360" cy="713232"/>
           </a:xfrm>
           <a:prstGeom prst="rect">
             <a:avLst/>
@@ -11310,7 +12011,7 @@
               <a:buNone/>
             </a:pPr>
             <a:r>
-              <a:rPr lang="en-US" sz="2700" b="1" dirty="0">
+              <a:rPr lang="en-US" sz="3400" b="1" dirty="0">
                 <a:solidFill>
                   <a:srgbClr val="003A63"/>
                 </a:solidFill>
@@ -11320,20 +12021,20 @@
               </a:rPr>
               <a:t>References and Resources</a:t>
             </a:r>
-            <a:endParaRPr lang="en-US" sz="2700" dirty="0"/>
-          </a:p>
-        </p:txBody>
-      </p:sp>
-      <p:sp>
-        <p:nvSpPr>
-          <p:cNvPr id="10" name="Text 8"/>
-          <p:cNvSpPr/>
-          <p:nvPr/>
-        </p:nvSpPr>
-        <p:spPr>
-          <a:xfrm>
-            <a:off x="868680" y="1417320"/>
-            <a:ext cx="6675120" cy="4434840"/>
+            <a:endParaRPr lang="en-US" sz="3400" dirty="0"/>
+          </a:p>
+        </p:txBody>
+      </p:sp>
+      <p:sp>
+        <p:nvSpPr>
+          <p:cNvPr id="11" name="Text 9"/>
+          <p:cNvSpPr/>
+          <p:nvPr/>
+        </p:nvSpPr>
+        <p:spPr>
+          <a:xfrm>
+            <a:off x="868680" y="1508760"/>
+            <a:ext cx="6537960" cy="4160520"/>
           </a:xfrm>
           <a:prstGeom prst="rect">
             <a:avLst/>
@@ -11348,7 +12049,7 @@
           <a:lstStyle/>
           <a:p>
             <a:r>
-              <a:rPr lang="en-US" sz="1700" dirty="0">
+              <a:rPr lang="en-US" sz="2100" dirty="0">
                 <a:solidFill>
                   <a:srgbClr val="17364A"/>
                 </a:solidFill>
@@ -11358,11 +12059,11 @@
               </a:rPr>
               <a:t>HL7 FHIR resources: https://hl7.org/fhir/</a:t>
             </a:r>
-            <a:endParaRPr lang="en-US" sz="1700" dirty="0"/>
-          </a:p>
-          <a:p>
-            <a:r>
-              <a:rPr lang="en-US" sz="1700" dirty="0">
+            <a:endParaRPr lang="en-US" sz="2100" dirty="0"/>
+          </a:p>
+          <a:p>
+            <a:r>
+              <a:rPr lang="en-US" sz="2100" dirty="0">
                 <a:solidFill>
                   <a:srgbClr val="17364A"/>
                 </a:solidFill>
@@ -11372,11 +12073,11 @@
               </a:rPr>
               <a:t>HL7 US Core Implementation Guide: https://build.fhir.org/ig/HL7/US-Core/</a:t>
             </a:r>
-            <a:endParaRPr lang="en-US" sz="1700" dirty="0"/>
-          </a:p>
-          <a:p>
-            <a:r>
-              <a:rPr lang="en-US" sz="1700" dirty="0">
+            <a:endParaRPr lang="en-US" sz="2100" dirty="0"/>
+          </a:p>
+          <a:p>
+            <a:r>
+              <a:rPr lang="en-US" sz="2100" dirty="0">
                 <a:solidFill>
                   <a:srgbClr val="17364A"/>
                 </a:solidFill>
@@ -11386,27 +12087,13 @@
               </a:rPr>
               <a:t>HL7 eCR FHIR Implementation Guide: https://hl7.org/fhir/us/ecr/</a:t>
             </a:r>
-            <a:endParaRPr lang="en-US" sz="1700" dirty="0"/>
-          </a:p>
-          <a:p>
-            <a:r>
-              <a:rPr lang="en-US" sz="1700" dirty="0">
-                <a:solidFill>
-                  <a:srgbClr val="17364A"/>
-                </a:solidFill>
-                <a:latin typeface="Aptos" pitchFamily="34" charset="0"/>
-                <a:ea typeface="Aptos" pitchFamily="34" charset="-122"/>
-                <a:cs typeface="Aptos" pitchFamily="34" charset="-120"/>
-              </a:rPr>
-              <a:t>US Public Health Profiles Library</a:t>
-            </a:r>
-            <a:endParaRPr lang="en-US" sz="1700" dirty="0"/>
-          </a:p>
-        </p:txBody>
-      </p:sp>
-      <p:sp>
-        <p:nvSpPr>
-          <p:cNvPr id="11" name="Shape 9"/>
+            <a:endParaRPr lang="en-US" sz="2100" dirty="0"/>
+          </a:p>
+        </p:txBody>
+      </p:sp>
+      <p:sp>
+        <p:nvSpPr>
+          <p:cNvPr id="12" name="Shape 10"/>
           <p:cNvSpPr/>
           <p:nvPr/>
         </p:nvSpPr>
@@ -11433,14 +12120,14 @@
       </p:sp>
       <p:sp>
         <p:nvSpPr>
-          <p:cNvPr id="12" name="Text 10"/>
+          <p:cNvPr id="13" name="Text 11"/>
           <p:cNvSpPr/>
           <p:nvPr/>
         </p:nvSpPr>
         <p:spPr>
           <a:xfrm>
             <a:off x="8074152" y="1563624"/>
-            <a:ext cx="2825496" cy="201168"/>
+            <a:ext cx="2825496" cy="256032"/>
           </a:xfrm>
           <a:prstGeom prst="rect">
             <a:avLst/>
@@ -11456,7 +12143,7 @@
               <a:buNone/>
             </a:pPr>
             <a:r>
-              <a:rPr lang="en-US" sz="950" b="1" dirty="0">
+              <a:rPr lang="en-US" sz="1300" b="1" dirty="0">
                 <a:solidFill>
                   <a:srgbClr val="0068B7"/>
                 </a:solidFill>
@@ -11466,20 +12153,20 @@
               </a:rPr>
               <a:t>Key idea</a:t>
             </a:r>
-            <a:endParaRPr lang="en-US" sz="950" dirty="0"/>
-          </a:p>
-        </p:txBody>
-      </p:sp>
-      <p:sp>
-        <p:nvSpPr>
-          <p:cNvPr id="13" name="Text 11"/>
-          <p:cNvSpPr/>
-          <p:nvPr/>
-        </p:nvSpPr>
-        <p:spPr>
-          <a:xfrm>
-            <a:off x="8074152" y="1856232"/>
-            <a:ext cx="2825496" cy="1261872"/>
+            <a:endParaRPr lang="en-US" sz="1300" dirty="0"/>
+          </a:p>
+        </p:txBody>
+      </p:sp>
+      <p:sp>
+        <p:nvSpPr>
+          <p:cNvPr id="14" name="Text 12"/>
+          <p:cNvSpPr/>
+          <p:nvPr/>
+        </p:nvSpPr>
+        <p:spPr>
+          <a:xfrm>
+            <a:off x="8074152" y="1920240"/>
+            <a:ext cx="2825496" cy="1188720"/>
           </a:xfrm>
           <a:prstGeom prst="rect">
             <a:avLst/>
@@ -11497,7 +12184,7 @@
               <a:buNone/>
             </a:pPr>
             <a:r>
-              <a:rPr lang="en-US" sz="1250" dirty="0">
+              <a:rPr lang="en-US" sz="1550" dirty="0">
                 <a:solidFill>
                   <a:srgbClr val="17364A"/>
                 </a:solidFill>
@@ -11507,13 +12194,13 @@
               </a:rPr>
               <a:t>HL7 FHIR resources: https://hl7.org/fhir/</a:t>
             </a:r>
-            <a:endParaRPr lang="en-US" sz="1250" dirty="0"/>
-          </a:p>
-        </p:txBody>
-      </p:sp>
-      <p:sp>
-        <p:nvSpPr>
-          <p:cNvPr id="14" name="Shape 12"/>
+            <a:endParaRPr lang="en-US" sz="1550" dirty="0"/>
+          </a:p>
+        </p:txBody>
+      </p:sp>
+      <p:sp>
+        <p:nvSpPr>
+          <p:cNvPr id="15" name="Shape 13"/>
           <p:cNvSpPr/>
           <p:nvPr/>
         </p:nvSpPr>
@@ -11540,14 +12227,14 @@
       </p:sp>
       <p:sp>
         <p:nvSpPr>
-          <p:cNvPr id="15" name="Text 13"/>
+          <p:cNvPr id="16" name="Text 14"/>
           <p:cNvSpPr/>
           <p:nvPr/>
         </p:nvSpPr>
         <p:spPr>
           <a:xfrm>
             <a:off x="8074152" y="3666744"/>
-            <a:ext cx="2825496" cy="201168"/>
+            <a:ext cx="2825496" cy="256032"/>
           </a:xfrm>
           <a:prstGeom prst="rect">
             <a:avLst/>
@@ -11563,7 +12250,7 @@
               <a:buNone/>
             </a:pPr>
             <a:r>
-              <a:rPr lang="en-US" sz="950" b="1" dirty="0">
+              <a:rPr lang="en-US" sz="1300" b="1" dirty="0">
                 <a:solidFill>
                   <a:srgbClr val="0068B7"/>
                 </a:solidFill>
@@ -11573,20 +12260,20 @@
               </a:rPr>
               <a:t>Use this for</a:t>
             </a:r>
-            <a:endParaRPr lang="en-US" sz="950" dirty="0"/>
-          </a:p>
-        </p:txBody>
-      </p:sp>
-      <p:sp>
-        <p:nvSpPr>
-          <p:cNvPr id="16" name="Text 14"/>
-          <p:cNvSpPr/>
-          <p:nvPr/>
-        </p:nvSpPr>
-        <p:spPr>
-          <a:xfrm>
-            <a:off x="8074152" y="3959352"/>
-            <a:ext cx="2825496" cy="1170432"/>
+            <a:endParaRPr lang="en-US" sz="1300" dirty="0"/>
+          </a:p>
+        </p:txBody>
+      </p:sp>
+      <p:sp>
+        <p:nvSpPr>
+          <p:cNvPr id="17" name="Text 15"/>
+          <p:cNvSpPr/>
+          <p:nvPr/>
+        </p:nvSpPr>
+        <p:spPr>
+          <a:xfrm>
+            <a:off x="8074152" y="4023360"/>
+            <a:ext cx="2825496" cy="1097280"/>
           </a:xfrm>
           <a:prstGeom prst="rect">
             <a:avLst/>
@@ -11604,7 +12291,7 @@
               <a:buNone/>
             </a:pPr>
             <a:r>
-              <a:rPr lang="en-US" sz="1250" dirty="0">
+              <a:rPr lang="en-US" sz="1550" dirty="0">
                 <a:solidFill>
                   <a:srgbClr val="17364A"/>
                 </a:solidFill>
@@ -11614,7 +12301,7 @@
               </a:rPr>
               <a:t>Connect the concept to public health decisions, safeguards, documentation, or implementation work.</a:t>
             </a:r>
-            <a:endParaRPr lang="en-US" sz="1250" dirty="0"/>
+            <a:endParaRPr lang="en-US" sz="1550" dirty="0"/>
           </a:p>
         </p:txBody>
       </p:sp>
@@ -11811,7 +12498,7 @@
                 <a:ea typeface="Aptos" pitchFamily="34" charset="-122"/>
                 <a:cs typeface="Aptos" pitchFamily="34" charset="-120"/>
               </a:rPr>
-              <a:t>© Paula Soper</a:t>
+              <a:t>Â© Paula Soper</a:t>
             </a:r>
             <a:endParaRPr lang="en-US" sz="800" dirty="0"/>
           </a:p>
@@ -11825,8 +12512,47 @@
         </p:nvSpPr>
         <p:spPr>
           <a:xfrm>
+            <a:off x="11137392" y="6510528"/>
+            <a:ext cx="411480" cy="201168"/>
+          </a:xfrm>
+          <a:prstGeom prst="rect">
+            <a:avLst/>
+          </a:prstGeom>
+          <a:noFill/>
+          <a:ln/>
+        </p:spPr>
+        <p:txBody>
+          <a:bodyPr wrap="square" lIns="0" tIns="0" rIns="0" bIns="0" rtlCol="0" anchor="ctr"/>
+          <a:lstStyle/>
+          <a:p>
+            <a:pPr algn="r" indent="0" marL="0">
+              <a:buNone/>
+            </a:pPr>
+            <a:r>
+              <a:rPr lang="en-US" sz="900" dirty="0">
+                <a:solidFill>
+                  <a:srgbClr val="5F7181"/>
+                </a:solidFill>
+                <a:latin typeface="Aptos" pitchFamily="34" charset="0"/>
+                <a:ea typeface="Aptos" pitchFamily="34" charset="-122"/>
+                <a:cs typeface="Aptos" pitchFamily="34" charset="-120"/>
+              </a:rPr>
+              <a:t>3</a:t>
+            </a:r>
+            <a:endParaRPr lang="en-US" sz="900" dirty="0"/>
+          </a:p>
+        </p:txBody>
+      </p:sp>
+      <p:sp>
+        <p:nvSpPr>
+          <p:cNvPr id="8" name="Text 6"/>
+          <p:cNvSpPr/>
+          <p:nvPr/>
+        </p:nvSpPr>
+        <p:spPr>
+          <a:xfrm>
             <a:off x="640080" y="658368"/>
-            <a:ext cx="10881360" cy="566928"/>
+            <a:ext cx="10881360" cy="713232"/>
           </a:xfrm>
           <a:prstGeom prst="rect">
             <a:avLst/>
@@ -11844,7 +12570,7 @@
               <a:buNone/>
             </a:pPr>
             <a:r>
-              <a:rPr lang="en-US" sz="2700" b="1" dirty="0">
+              <a:rPr lang="en-US" sz="3400" b="1" dirty="0">
                 <a:solidFill>
                   <a:srgbClr val="003A63"/>
                 </a:solidFill>
@@ -11854,20 +12580,20 @@
               </a:rPr>
               <a:t>How this module connects to the playbook</a:t>
             </a:r>
-            <a:endParaRPr lang="en-US" sz="2700" dirty="0"/>
-          </a:p>
-        </p:txBody>
-      </p:sp>
-      <p:sp>
-        <p:nvSpPr>
-          <p:cNvPr id="8" name="Text 6"/>
-          <p:cNvSpPr/>
-          <p:nvPr/>
-        </p:nvSpPr>
-        <p:spPr>
-          <a:xfrm>
-            <a:off x="868680" y="1417320"/>
-            <a:ext cx="6903720" cy="4480560"/>
+            <a:endParaRPr lang="en-US" sz="3400" dirty="0"/>
+          </a:p>
+        </p:txBody>
+      </p:sp>
+      <p:sp>
+        <p:nvSpPr>
+          <p:cNvPr id="9" name="Text 7"/>
+          <p:cNvSpPr/>
+          <p:nvPr/>
+        </p:nvSpPr>
+        <p:spPr>
+          <a:xfrm>
+            <a:off x="868680" y="1508760"/>
+            <a:ext cx="6812280" cy="3977640"/>
           </a:xfrm>
           <a:prstGeom prst="rect">
             <a:avLst/>
@@ -11882,7 +12608,7 @@
           <a:lstStyle/>
           <a:p>
             <a:r>
-              <a:rPr lang="en-US" sz="1540" dirty="0">
+              <a:rPr lang="en-US" sz="1900" dirty="0">
                 <a:solidFill>
                   <a:srgbClr val="17364A"/>
                 </a:solidFill>
@@ -11890,13 +12616,13 @@
                 <a:ea typeface="Aptos" pitchFamily="34" charset="-122"/>
                 <a:cs typeface="Aptos" pitchFamily="34" charset="-120"/>
               </a:rPr>
-              <a:t>Play 11: Build and Deploy AI Solutions - This lesson informs Play 11 by helping learners connect the lesson topic to build and deploy.</a:t>
-            </a:r>
-            <a:endParaRPr lang="en-US" sz="1540" dirty="0"/>
-          </a:p>
-          <a:p>
-            <a:r>
-              <a:rPr lang="en-US" sz="1540" dirty="0">
+              <a:t>Play 11: Build and Deploy AI Solutions - This lesson informs Play 11 by helping learners connect the lesson.</a:t>
+            </a:r>
+            <a:endParaRPr lang="en-US" sz="1900" dirty="0"/>
+          </a:p>
+          <a:p>
+            <a:r>
+              <a:rPr lang="en-US" sz="1900" dirty="0">
                 <a:solidFill>
                   <a:srgbClr val="17364A"/>
                 </a:solidFill>
@@ -11904,13 +12630,13 @@
                 <a:ea typeface="Aptos" pitchFamily="34" charset="-122"/>
                 <a:cs typeface="Aptos" pitchFamily="34" charset="-120"/>
               </a:rPr>
-              <a:t>Play 2: Readiness Assessment - This lesson informs Play 2 by helping learners connect the lesson topic to readiness assessment work.</a:t>
-            </a:r>
-            <a:endParaRPr lang="en-US" sz="1540" dirty="0"/>
-          </a:p>
-          <a:p>
-            <a:r>
-              <a:rPr lang="en-US" sz="1540" dirty="0">
+              <a:t>Play 2: Readiness Assessment - This lesson informs Play 2 by helping learners connect the lesson topic to.</a:t>
+            </a:r>
+            <a:endParaRPr lang="en-US" sz="1900" dirty="0"/>
+          </a:p>
+          <a:p>
+            <a:r>
+              <a:rPr lang="en-US" sz="1900" dirty="0">
                 <a:solidFill>
                   <a:srgbClr val="17364A"/>
                 </a:solidFill>
@@ -11918,13 +12644,13 @@
                 <a:ea typeface="Aptos" pitchFamily="34" charset="-122"/>
                 <a:cs typeface="Aptos" pitchFamily="34" charset="-120"/>
               </a:rPr>
-              <a:t>Play 1: Vision &amp; Guardrails - This lesson informs Play 1 by helping learners connect the lesson topic to vision &amp; guardrails work in.</a:t>
-            </a:r>
-            <a:endParaRPr lang="en-US" sz="1540" dirty="0"/>
-          </a:p>
-          <a:p>
-            <a:r>
-              <a:rPr lang="en-US" sz="1540" dirty="0">
+              <a:t>Play 1: Vision &amp; Guardrails - This lesson informs Play 1 by helping learners connect the lesson topic to.</a:t>
+            </a:r>
+            <a:endParaRPr lang="en-US" sz="1900" dirty="0"/>
+          </a:p>
+          <a:p>
+            <a:r>
+              <a:rPr lang="en-US" sz="1900" dirty="0">
                 <a:solidFill>
                   <a:srgbClr val="17364A"/>
                 </a:solidFill>
@@ -11932,15 +12658,15 @@
                 <a:ea typeface="Aptos" pitchFamily="34" charset="-122"/>
                 <a:cs typeface="Aptos" pitchFamily="34" charset="-120"/>
               </a:rPr>
-              <a:t>Play 7: Prioritize Use Cases - This lesson informs Play 7 by helping learners connect the lesson topic to prioritize use cases work.</a:t>
-            </a:r>
-            <a:endParaRPr lang="en-US" sz="1540" dirty="0"/>
-          </a:p>
-        </p:txBody>
-      </p:sp>
-      <p:sp>
-        <p:nvSpPr>
-          <p:cNvPr id="9" name="Shape 7"/>
+              <a:t>Play 7: Prioritize Use Cases - This lesson informs Play 7 by helping learners connect the lesson topic to.</a:t>
+            </a:r>
+            <a:endParaRPr lang="en-US" sz="1900" dirty="0"/>
+          </a:p>
+        </p:txBody>
+      </p:sp>
+      <p:sp>
+        <p:nvSpPr>
+          <p:cNvPr id="10" name="Shape 8"/>
           <p:cNvSpPr/>
           <p:nvPr/>
         </p:nvSpPr>
@@ -11967,14 +12693,14 @@
       </p:sp>
       <p:sp>
         <p:nvSpPr>
-          <p:cNvPr id="10" name="Text 8"/>
+          <p:cNvPr id="11" name="Text 9"/>
           <p:cNvSpPr/>
           <p:nvPr/>
         </p:nvSpPr>
         <p:spPr>
           <a:xfrm>
             <a:off x="8211312" y="1563624"/>
-            <a:ext cx="2734056" cy="201168"/>
+            <a:ext cx="2734056" cy="256032"/>
           </a:xfrm>
           <a:prstGeom prst="rect">
             <a:avLst/>
@@ -11990,7 +12716,7 @@
               <a:buNone/>
             </a:pPr>
             <a:r>
-              <a:rPr lang="en-US" sz="950" b="1" dirty="0">
+              <a:rPr lang="en-US" sz="1300" b="1" dirty="0">
                 <a:solidFill>
                   <a:srgbClr val="0068B7"/>
                 </a:solidFill>
@@ -12000,20 +12726,20 @@
               </a:rPr>
               <a:t>Apply the lesson</a:t>
             </a:r>
-            <a:endParaRPr lang="en-US" sz="950" dirty="0"/>
-          </a:p>
-        </p:txBody>
-      </p:sp>
-      <p:sp>
-        <p:nvSpPr>
-          <p:cNvPr id="11" name="Text 9"/>
-          <p:cNvSpPr/>
-          <p:nvPr/>
-        </p:nvSpPr>
-        <p:spPr>
-          <a:xfrm>
-            <a:off x="8211312" y="1856232"/>
-            <a:ext cx="2734056" cy="1536192"/>
+            <a:endParaRPr lang="en-US" sz="1300" dirty="0"/>
+          </a:p>
+        </p:txBody>
+      </p:sp>
+      <p:sp>
+        <p:nvSpPr>
+          <p:cNvPr id="12" name="Text 10"/>
+          <p:cNvSpPr/>
+          <p:nvPr/>
+        </p:nvSpPr>
+        <p:spPr>
+          <a:xfrm>
+            <a:off x="8211312" y="1920240"/>
+            <a:ext cx="2734056" cy="1463040"/>
           </a:xfrm>
           <a:prstGeom prst="rect">
             <a:avLst/>
@@ -12031,7 +12757,7 @@
               <a:buNone/>
             </a:pPr>
             <a:r>
-              <a:rPr lang="en-US" sz="1250" dirty="0">
+              <a:rPr lang="en-US" sz="1550" dirty="0">
                 <a:solidFill>
                   <a:srgbClr val="17364A"/>
                 </a:solidFill>
@@ -12041,32 +12767,32 @@
               </a:rPr>
               <a:t>Use the related plays to identify decisions, participants, timing, approvals, and documentation needed for responsible implementation.</a:t>
             </a:r>
-            <a:endParaRPr lang="en-US" sz="1250" dirty="0"/>
-          </a:p>
-        </p:txBody>
-      </p:sp>
-      <p:sp>
-        <p:nvSpPr>
-          <p:cNvPr id="12" name="Shape 10"/>
-          <p:cNvSpPr/>
-          <p:nvPr/>
-        </p:nvSpPr>
-        <p:spPr>
-          <a:xfrm>
-            <a:off x="8046720" y="3794760"/>
-            <a:ext cx="3063240" cy="1508760"/>
+            <a:endParaRPr lang="en-US" sz="1550" dirty="0"/>
+          </a:p>
+        </p:txBody>
+      </p:sp>
+      <p:sp>
+        <p:nvSpPr>
+          <p:cNvPr id="13" name="Shape 11"/>
+          <p:cNvSpPr/>
+          <p:nvPr/>
+        </p:nvSpPr>
+        <p:spPr>
+          <a:xfrm>
+            <a:off x="7818120" y="3977640"/>
+            <a:ext cx="972312" cy="749808"/>
           </a:xfrm>
           <a:prstGeom prst="roundRect">
             <a:avLst>
-              <a:gd name="adj" fmla="val 7273"/>
+              <a:gd name="adj" fmla="val 14634"/>
             </a:avLst>
           </a:prstGeom>
           <a:solidFill>
-            <a:srgbClr val="FFF4D9"/>
+            <a:srgbClr val="0068B7"/>
           </a:solidFill>
           <a:ln w="12700">
             <a:solidFill>
-              <a:srgbClr val="B9D7E6"/>
+              <a:srgbClr val="0068B7"/>
             </a:solidFill>
             <a:prstDash val="solid"/>
           </a:ln>
@@ -12074,81 +12800,256 @@
       </p:sp>
       <p:sp>
         <p:nvSpPr>
-          <p:cNvPr id="13" name="Text 11"/>
-          <p:cNvSpPr/>
-          <p:nvPr/>
-        </p:nvSpPr>
-        <p:spPr>
-          <a:xfrm>
-            <a:off x="8211312" y="3941064"/>
-            <a:ext cx="2734056" cy="201168"/>
-          </a:xfrm>
-          <a:prstGeom prst="rect">
-            <a:avLst/>
-          </a:prstGeom>
-          <a:noFill/>
-          <a:ln/>
-        </p:spPr>
-        <p:txBody>
-          <a:bodyPr wrap="square" lIns="0" tIns="0" rIns="0" bIns="0" rtlCol="0" anchor="ctr"/>
-          <a:lstStyle/>
-          <a:p>
-            <a:pPr indent="0" marL="0">
-              <a:buNone/>
-            </a:pPr>
-            <a:r>
-              <a:rPr lang="en-US" sz="950" b="1" dirty="0">
-                <a:solidFill>
-                  <a:srgbClr val="0068B7"/>
-                </a:solidFill>
-                <a:latin typeface="Aptos" pitchFamily="34" charset="0"/>
-                <a:ea typeface="Aptos" pitchFamily="34" charset="-122"/>
-                <a:cs typeface="Aptos" pitchFamily="34" charset="-120"/>
-              </a:rPr>
-              <a:t>Keep in mind</a:t>
-            </a:r>
-            <a:endParaRPr lang="en-US" sz="950" dirty="0"/>
-          </a:p>
-        </p:txBody>
-      </p:sp>
-      <p:sp>
-        <p:nvSpPr>
           <p:cNvPr id="14" name="Text 12"/>
           <p:cNvSpPr/>
           <p:nvPr/>
         </p:nvSpPr>
         <p:spPr>
           <a:xfrm>
-            <a:off x="8211312" y="4233672"/>
-            <a:ext cx="2734056" cy="941832"/>
-          </a:xfrm>
-          <a:prstGeom prst="rect">
-            <a:avLst/>
-          </a:prstGeom>
-          <a:noFill/>
-          <a:ln/>
-        </p:spPr>
-        <p:txBody>
-          <a:bodyPr wrap="square" lIns="0" tIns="0" rIns="0" bIns="0" rtlCol="0" anchor="t">
+            <a:off x="7891272" y="4169664"/>
+            <a:ext cx="826008" cy="310896"/>
+          </a:xfrm>
+          <a:prstGeom prst="rect">
+            <a:avLst/>
+          </a:prstGeom>
+          <a:noFill/>
+          <a:ln/>
+        </p:spPr>
+        <p:txBody>
+          <a:bodyPr wrap="square" lIns="0" tIns="0" rIns="0" bIns="0" rtlCol="0" anchor="ctr">
             <a:normAutofit/>
           </a:bodyPr>
           <a:lstStyle/>
           <a:p>
-            <a:pPr indent="0" marL="0">
-              <a:buNone/>
-            </a:pPr>
-            <a:r>
-              <a:rPr lang="en-US" sz="1250" dirty="0">
-                <a:solidFill>
-                  <a:srgbClr val="17364A"/>
-                </a:solidFill>
-                <a:latin typeface="Aptos" pitchFamily="34" charset="0"/>
-                <a:ea typeface="Aptos" pitchFamily="34" charset="-122"/>
-                <a:cs typeface="Aptos" pitchFamily="34" charset="-120"/>
-              </a:rPr>
-              <a:t>The playbook connection helps turn training into agency work, not just individual knowledge.</a:t>
-            </a:r>
-            <a:endParaRPr lang="en-US" sz="1250" dirty="0"/>
+            <a:pPr algn="ctr" indent="0" marL="0">
+              <a:buNone/>
+            </a:pPr>
+            <a:r>
+              <a:rPr lang="en-US" sz="1500" b="1" dirty="0">
+                <a:solidFill>
+                  <a:srgbClr val="FFFFFF"/>
+                </a:solidFill>
+                <a:latin typeface="Aptos" pitchFamily="34" charset="0"/>
+                <a:ea typeface="Aptos" pitchFamily="34" charset="-122"/>
+                <a:cs typeface="Aptos" pitchFamily="34" charset="-120"/>
+              </a:rPr>
+              <a:t>Lesson</a:t>
+            </a:r>
+            <a:endParaRPr lang="en-US" sz="1500" dirty="0"/>
+          </a:p>
+        </p:txBody>
+      </p:sp>
+      <p:sp>
+        <p:nvSpPr>
+          <p:cNvPr id="15" name="Text 13"/>
+          <p:cNvSpPr/>
+          <p:nvPr/>
+        </p:nvSpPr>
+        <p:spPr>
+          <a:xfrm>
+            <a:off x="8817864" y="4187952"/>
+            <a:ext cx="201168" cy="256032"/>
+          </a:xfrm>
+          <a:prstGeom prst="rect">
+            <a:avLst/>
+          </a:prstGeom>
+          <a:noFill/>
+          <a:ln/>
+        </p:spPr>
+        <p:txBody>
+          <a:bodyPr wrap="square" lIns="0" tIns="0" rIns="0" bIns="0" rtlCol="0" anchor="ctr"/>
+          <a:lstStyle/>
+          <a:p>
+            <a:pPr algn="ctr" indent="0" marL="0">
+              <a:buNone/>
+            </a:pPr>
+            <a:r>
+              <a:rPr lang="en-US" sz="1800" b="1" dirty="0">
+                <a:solidFill>
+                  <a:srgbClr val="0068B7"/>
+                </a:solidFill>
+                <a:latin typeface="Aptos" pitchFamily="34" charset="0"/>
+                <a:ea typeface="Aptos" pitchFamily="34" charset="-122"/>
+                <a:cs typeface="Aptos" pitchFamily="34" charset="-120"/>
+              </a:rPr>
+              <a:t>â†’</a:t>
+            </a:r>
+            <a:endParaRPr lang="en-US" sz="1800" dirty="0"/>
+          </a:p>
+        </p:txBody>
+      </p:sp>
+      <p:sp>
+        <p:nvSpPr>
+          <p:cNvPr id="16" name="Shape 14"/>
+          <p:cNvSpPr/>
+          <p:nvPr/>
+        </p:nvSpPr>
+        <p:spPr>
+          <a:xfrm>
+            <a:off x="9046464" y="3977640"/>
+            <a:ext cx="972312" cy="749808"/>
+          </a:xfrm>
+          <a:prstGeom prst="roundRect">
+            <a:avLst>
+              <a:gd name="adj" fmla="val 14634"/>
+            </a:avLst>
+          </a:prstGeom>
+          <a:solidFill>
+            <a:srgbClr val="2F8A28"/>
+          </a:solidFill>
+          <a:ln w="12700">
+            <a:solidFill>
+              <a:srgbClr val="2F8A28"/>
+            </a:solidFill>
+            <a:prstDash val="solid"/>
+          </a:ln>
+        </p:spPr>
+      </p:sp>
+      <p:sp>
+        <p:nvSpPr>
+          <p:cNvPr id="17" name="Text 15"/>
+          <p:cNvSpPr/>
+          <p:nvPr/>
+        </p:nvSpPr>
+        <p:spPr>
+          <a:xfrm>
+            <a:off x="9119616" y="4169664"/>
+            <a:ext cx="826008" cy="310896"/>
+          </a:xfrm>
+          <a:prstGeom prst="rect">
+            <a:avLst/>
+          </a:prstGeom>
+          <a:noFill/>
+          <a:ln/>
+        </p:spPr>
+        <p:txBody>
+          <a:bodyPr wrap="square" lIns="0" tIns="0" rIns="0" bIns="0" rtlCol="0" anchor="ctr">
+            <a:normAutofit/>
+          </a:bodyPr>
+          <a:lstStyle/>
+          <a:p>
+            <a:pPr algn="ctr" indent="0" marL="0">
+              <a:buNone/>
+            </a:pPr>
+            <a:r>
+              <a:rPr lang="en-US" sz="1500" b="1" dirty="0">
+                <a:solidFill>
+                  <a:srgbClr val="FFFFFF"/>
+                </a:solidFill>
+                <a:latin typeface="Aptos" pitchFamily="34" charset="0"/>
+                <a:ea typeface="Aptos" pitchFamily="34" charset="-122"/>
+                <a:cs typeface="Aptos" pitchFamily="34" charset="-120"/>
+              </a:rPr>
+              <a:t>Plays</a:t>
+            </a:r>
+            <a:endParaRPr lang="en-US" sz="1500" dirty="0"/>
+          </a:p>
+        </p:txBody>
+      </p:sp>
+      <p:sp>
+        <p:nvSpPr>
+          <p:cNvPr id="18" name="Text 16"/>
+          <p:cNvSpPr/>
+          <p:nvPr/>
+        </p:nvSpPr>
+        <p:spPr>
+          <a:xfrm>
+            <a:off x="10046208" y="4187952"/>
+            <a:ext cx="201168" cy="256032"/>
+          </a:xfrm>
+          <a:prstGeom prst="rect">
+            <a:avLst/>
+          </a:prstGeom>
+          <a:noFill/>
+          <a:ln/>
+        </p:spPr>
+        <p:txBody>
+          <a:bodyPr wrap="square" lIns="0" tIns="0" rIns="0" bIns="0" rtlCol="0" anchor="ctr"/>
+          <a:lstStyle/>
+          <a:p>
+            <a:pPr algn="ctr" indent="0" marL="0">
+              <a:buNone/>
+            </a:pPr>
+            <a:r>
+              <a:rPr lang="en-US" sz="1800" b="1" dirty="0">
+                <a:solidFill>
+                  <a:srgbClr val="0068B7"/>
+                </a:solidFill>
+                <a:latin typeface="Aptos" pitchFamily="34" charset="0"/>
+                <a:ea typeface="Aptos" pitchFamily="34" charset="-122"/>
+                <a:cs typeface="Aptos" pitchFamily="34" charset="-120"/>
+              </a:rPr>
+              <a:t>â†’</a:t>
+            </a:r>
+            <a:endParaRPr lang="en-US" sz="1800" dirty="0"/>
+          </a:p>
+        </p:txBody>
+      </p:sp>
+      <p:sp>
+        <p:nvSpPr>
+          <p:cNvPr id="19" name="Shape 17"/>
+          <p:cNvSpPr/>
+          <p:nvPr/>
+        </p:nvSpPr>
+        <p:spPr>
+          <a:xfrm>
+            <a:off x="10274808" y="3977640"/>
+            <a:ext cx="972312" cy="749808"/>
+          </a:xfrm>
+          <a:prstGeom prst="roundRect">
+            <a:avLst>
+              <a:gd name="adj" fmla="val 14634"/>
+            </a:avLst>
+          </a:prstGeom>
+          <a:solidFill>
+            <a:srgbClr val="6A4CA3"/>
+          </a:solidFill>
+          <a:ln w="12700">
+            <a:solidFill>
+              <a:srgbClr val="6A4CA3"/>
+            </a:solidFill>
+            <a:prstDash val="solid"/>
+          </a:ln>
+        </p:spPr>
+      </p:sp>
+      <p:sp>
+        <p:nvSpPr>
+          <p:cNvPr id="20" name="Text 18"/>
+          <p:cNvSpPr/>
+          <p:nvPr/>
+        </p:nvSpPr>
+        <p:spPr>
+          <a:xfrm>
+            <a:off x="10347960" y="4169664"/>
+            <a:ext cx="826008" cy="310896"/>
+          </a:xfrm>
+          <a:prstGeom prst="rect">
+            <a:avLst/>
+          </a:prstGeom>
+          <a:noFill/>
+          <a:ln/>
+        </p:spPr>
+        <p:txBody>
+          <a:bodyPr wrap="square" lIns="0" tIns="0" rIns="0" bIns="0" rtlCol="0" anchor="ctr">
+            <a:normAutofit/>
+          </a:bodyPr>
+          <a:lstStyle/>
+          <a:p>
+            <a:pPr algn="ctr" indent="0" marL="0">
+              <a:buNone/>
+            </a:pPr>
+            <a:r>
+              <a:rPr lang="en-US" sz="1500" b="1" dirty="0">
+                <a:solidFill>
+                  <a:srgbClr val="FFFFFF"/>
+                </a:solidFill>
+                <a:latin typeface="Aptos" pitchFamily="34" charset="0"/>
+                <a:ea typeface="Aptos" pitchFamily="34" charset="-122"/>
+                <a:cs typeface="Aptos" pitchFamily="34" charset="-120"/>
+              </a:rPr>
+              <a:t>Action</a:t>
+            </a:r>
+            <a:endParaRPr lang="en-US" sz="1500" dirty="0"/>
           </a:p>
         </p:txBody>
       </p:sp>
@@ -12345,7 +13246,7 @@
                 <a:ea typeface="Aptos" pitchFamily="34" charset="-122"/>
                 <a:cs typeface="Aptos" pitchFamily="34" charset="-120"/>
               </a:rPr>
-              <a:t>© Paula Soper</a:t>
+              <a:t>Â© Paula Soper</a:t>
             </a:r>
             <a:endParaRPr lang="en-US" sz="800" dirty="0"/>
           </a:p>
@@ -12359,8 +13260,47 @@
         </p:nvSpPr>
         <p:spPr>
           <a:xfrm>
+            <a:off x="11137392" y="6510528"/>
+            <a:ext cx="411480" cy="201168"/>
+          </a:xfrm>
+          <a:prstGeom prst="rect">
+            <a:avLst/>
+          </a:prstGeom>
+          <a:noFill/>
+          <a:ln/>
+        </p:spPr>
+        <p:txBody>
+          <a:bodyPr wrap="square" lIns="0" tIns="0" rIns="0" bIns="0" rtlCol="0" anchor="ctr"/>
+          <a:lstStyle/>
+          <a:p>
+            <a:pPr algn="r" indent="0" marL="0">
+              <a:buNone/>
+            </a:pPr>
+            <a:r>
+              <a:rPr lang="en-US" sz="900" dirty="0">
+                <a:solidFill>
+                  <a:srgbClr val="5F7181"/>
+                </a:solidFill>
+                <a:latin typeface="Aptos" pitchFamily="34" charset="0"/>
+                <a:ea typeface="Aptos" pitchFamily="34" charset="-122"/>
+                <a:cs typeface="Aptos" pitchFamily="34" charset="-120"/>
+              </a:rPr>
+              <a:t>4</a:t>
+            </a:r>
+            <a:endParaRPr lang="en-US" sz="900" dirty="0"/>
+          </a:p>
+        </p:txBody>
+      </p:sp>
+      <p:sp>
+        <p:nvSpPr>
+          <p:cNvPr id="8" name="Text 6"/>
+          <p:cNvSpPr/>
+          <p:nvPr/>
+        </p:nvSpPr>
+        <p:spPr>
+          <a:xfrm>
             <a:off x="640080" y="658368"/>
-            <a:ext cx="10881360" cy="566928"/>
+            <a:ext cx="10881360" cy="713232"/>
           </a:xfrm>
           <a:prstGeom prst="rect">
             <a:avLst/>
@@ -12378,7 +13318,7 @@
               <a:buNone/>
             </a:pPr>
             <a:r>
-              <a:rPr lang="en-US" sz="2700" b="1" dirty="0">
+              <a:rPr lang="en-US" sz="3400" b="1" dirty="0">
                 <a:solidFill>
                   <a:srgbClr val="003A63"/>
                 </a:solidFill>
@@ -12388,20 +13328,20 @@
               </a:rPr>
               <a:t>Related toolkit resources</a:t>
             </a:r>
-            <a:endParaRPr lang="en-US" sz="2700" dirty="0"/>
-          </a:p>
-        </p:txBody>
-      </p:sp>
-      <p:sp>
-        <p:nvSpPr>
-          <p:cNvPr id="8" name="Text 6"/>
-          <p:cNvSpPr/>
-          <p:nvPr/>
-        </p:nvSpPr>
-        <p:spPr>
-          <a:xfrm>
-            <a:off x="868680" y="1417320"/>
-            <a:ext cx="6903720" cy="4480560"/>
+            <a:endParaRPr lang="en-US" sz="3400" dirty="0"/>
+          </a:p>
+        </p:txBody>
+      </p:sp>
+      <p:sp>
+        <p:nvSpPr>
+          <p:cNvPr id="9" name="Text 7"/>
+          <p:cNvSpPr/>
+          <p:nvPr/>
+        </p:nvSpPr>
+        <p:spPr>
+          <a:xfrm>
+            <a:off x="868680" y="1508760"/>
+            <a:ext cx="6812280" cy="3977640"/>
           </a:xfrm>
           <a:prstGeom prst="rect">
             <a:avLst/>
@@ -12416,7 +13356,7 @@
           <a:lstStyle/>
           <a:p>
             <a:r>
-              <a:rPr lang="en-US" sz="1460" dirty="0">
+              <a:rPr lang="en-US" sz="1850" dirty="0">
                 <a:solidFill>
                   <a:srgbClr val="17364A"/>
                 </a:solidFill>
@@ -12424,13 +13364,13 @@
                 <a:ea typeface="Aptos" pitchFamily="34" charset="-122"/>
                 <a:cs typeface="Aptos" pitchFamily="34" charset="-120"/>
               </a:rPr>
-              <a:t>Tool 4: AI Policy Landscape Scan (Worksheet) - Use AI Policy Landscape Scan to translate this lesson into a documented public health.</a:t>
-            </a:r>
-            <a:endParaRPr lang="en-US" sz="1460" dirty="0"/>
-          </a:p>
-          <a:p>
-            <a:r>
-              <a:rPr lang="en-US" sz="1460" dirty="0">
+              <a:t>Tool 4: AI Policy Landscape Scan (Worksheet) - Use AI Policy Landscape Scan to translate this lesson into a.</a:t>
+            </a:r>
+            <a:endParaRPr lang="en-US" sz="1850" dirty="0"/>
+          </a:p>
+          <a:p>
+            <a:r>
+              <a:rPr lang="en-US" sz="1850" dirty="0">
                 <a:solidFill>
                   <a:srgbClr val="17364A"/>
                 </a:solidFill>
@@ -12438,13 +13378,13 @@
                 <a:ea typeface="Aptos" pitchFamily="34" charset="-122"/>
                 <a:cs typeface="Aptos" pitchFamily="34" charset="-120"/>
               </a:rPr>
-              <a:t>Tool 5: AI Environmental and Resource Impact Review (Checklist) - Use AI Environmental and Resource Impact Review to translate this.</a:t>
-            </a:r>
-            <a:endParaRPr lang="en-US" sz="1460" dirty="0"/>
-          </a:p>
-          <a:p>
-            <a:r>
-              <a:rPr lang="en-US" sz="1460" dirty="0">
+              <a:t>Tool 5: AI Environmental and Resource Impact Review (Checklist) - Use AI Environmental and Resource Impact.</a:t>
+            </a:r>
+            <a:endParaRPr lang="en-US" sz="1850" dirty="0"/>
+          </a:p>
+          <a:p>
+            <a:r>
+              <a:rPr lang="en-US" sz="1850" dirty="0">
                 <a:solidFill>
                   <a:srgbClr val="17364A"/>
                 </a:solidFill>
@@ -12452,13 +13392,13 @@
                 <a:ea typeface="Aptos" pitchFamily="34" charset="-122"/>
                 <a:cs typeface="Aptos" pitchFamily="34" charset="-120"/>
               </a:rPr>
-              <a:t>Tool 6: Human-Centered AI Decision Rule Checklist (Checklist) - Use Human-Centered AI Decision Rule Checklist to translate this.</a:t>
-            </a:r>
-            <a:endParaRPr lang="en-US" sz="1460" dirty="0"/>
-          </a:p>
-          <a:p>
-            <a:r>
-              <a:rPr lang="en-US" sz="1460" dirty="0">
+              <a:t>Tool 6: Human-Centered AI Decision Rule Checklist (Checklist) - Use Human-Centered AI Decision Rule.</a:t>
+            </a:r>
+            <a:endParaRPr lang="en-US" sz="1850" dirty="0"/>
+          </a:p>
+          <a:p>
+            <a:r>
+              <a:rPr lang="en-US" sz="1850" dirty="0">
                 <a:solidFill>
                   <a:srgbClr val="17364A"/>
                 </a:solidFill>
@@ -12466,29 +13406,15 @@
                 <a:ea typeface="Aptos" pitchFamily="34" charset="-122"/>
                 <a:cs typeface="Aptos" pitchFamily="34" charset="-120"/>
               </a:rPr>
-              <a:t>Tool 8: AI Project Charter (Planning) - Use AI Project Charter to translate this lesson into a documented public health AI planning,.</a:t>
-            </a:r>
-            <a:endParaRPr lang="en-US" sz="1460" dirty="0"/>
-          </a:p>
-          <a:p>
-            <a:r>
-              <a:rPr lang="en-US" sz="1460" dirty="0">
-                <a:solidFill>
-                  <a:srgbClr val="17364A"/>
-                </a:solidFill>
-                <a:latin typeface="Aptos" pitchFamily="34" charset="0"/>
-                <a:ea typeface="Aptos" pitchFamily="34" charset="-122"/>
-                <a:cs typeface="Aptos" pitchFamily="34" charset="-120"/>
-              </a:rPr>
-              <a:t>Tool 9: Data Quality Assessment Checklist (Checklist) - Use this tool to complete or strengthen the practical exercise for the module.</a:t>
-            </a:r>
-            <a:endParaRPr lang="en-US" sz="1460" dirty="0"/>
-          </a:p>
-        </p:txBody>
-      </p:sp>
-      <p:sp>
-        <p:nvSpPr>
-          <p:cNvPr id="9" name="Shape 7"/>
+              <a:t>Tool 8: AI Project Charter (Planning) - Use AI Project Charter to translate this lesson into a documented.</a:t>
+            </a:r>
+            <a:endParaRPr lang="en-US" sz="1850" dirty="0"/>
+          </a:p>
+        </p:txBody>
+      </p:sp>
+      <p:sp>
+        <p:nvSpPr>
+          <p:cNvPr id="10" name="Shape 8"/>
           <p:cNvSpPr/>
           <p:nvPr/>
         </p:nvSpPr>
@@ -12515,14 +13441,14 @@
       </p:sp>
       <p:sp>
         <p:nvSpPr>
-          <p:cNvPr id="10" name="Text 8"/>
+          <p:cNvPr id="11" name="Text 9"/>
           <p:cNvSpPr/>
           <p:nvPr/>
         </p:nvSpPr>
         <p:spPr>
           <a:xfrm>
             <a:off x="8211312" y="1563624"/>
-            <a:ext cx="2734056" cy="201168"/>
+            <a:ext cx="2734056" cy="256032"/>
           </a:xfrm>
           <a:prstGeom prst="rect">
             <a:avLst/>
@@ -12538,7 +13464,7 @@
               <a:buNone/>
             </a:pPr>
             <a:r>
-              <a:rPr lang="en-US" sz="950" b="1" dirty="0">
+              <a:rPr lang="en-US" sz="1300" b="1" dirty="0">
                 <a:solidFill>
                   <a:srgbClr val="0068B7"/>
                 </a:solidFill>
@@ -12548,20 +13474,20 @@
               </a:rPr>
               <a:t>Use the tools</a:t>
             </a:r>
-            <a:endParaRPr lang="en-US" sz="950" dirty="0"/>
-          </a:p>
-        </p:txBody>
-      </p:sp>
-      <p:sp>
-        <p:nvSpPr>
-          <p:cNvPr id="11" name="Text 9"/>
-          <p:cNvSpPr/>
-          <p:nvPr/>
-        </p:nvSpPr>
-        <p:spPr>
-          <a:xfrm>
-            <a:off x="8211312" y="1856232"/>
-            <a:ext cx="2734056" cy="1536192"/>
+            <a:endParaRPr lang="en-US" sz="1300" dirty="0"/>
+          </a:p>
+        </p:txBody>
+      </p:sp>
+      <p:sp>
+        <p:nvSpPr>
+          <p:cNvPr id="12" name="Text 10"/>
+          <p:cNvSpPr/>
+          <p:nvPr/>
+        </p:nvSpPr>
+        <p:spPr>
+          <a:xfrm>
+            <a:off x="8211312" y="1920240"/>
+            <a:ext cx="2734056" cy="1463040"/>
           </a:xfrm>
           <a:prstGeom prst="rect">
             <a:avLst/>
@@ -12579,7 +13505,7 @@
               <a:buNone/>
             </a:pPr>
             <a:r>
-              <a:rPr lang="en-US" sz="1250" dirty="0">
+              <a:rPr lang="en-US" sz="1550" dirty="0">
                 <a:solidFill>
                   <a:srgbClr val="17364A"/>
                 </a:solidFill>
@@ -12589,32 +13515,32 @@
               </a:rPr>
               <a:t>Use linked tools when your department needs a structured worksheet, template, checklist, review process, or documentation artifact.</a:t>
             </a:r>
-            <a:endParaRPr lang="en-US" sz="1250" dirty="0"/>
-          </a:p>
-        </p:txBody>
-      </p:sp>
-      <p:sp>
-        <p:nvSpPr>
-          <p:cNvPr id="12" name="Shape 10"/>
-          <p:cNvSpPr/>
-          <p:nvPr/>
-        </p:nvSpPr>
-        <p:spPr>
-          <a:xfrm>
-            <a:off x="8046720" y="3794760"/>
-            <a:ext cx="3063240" cy="1508760"/>
+            <a:endParaRPr lang="en-US" sz="1550" dirty="0"/>
+          </a:p>
+        </p:txBody>
+      </p:sp>
+      <p:sp>
+        <p:nvSpPr>
+          <p:cNvPr id="13" name="Shape 11"/>
+          <p:cNvSpPr/>
+          <p:nvPr/>
+        </p:nvSpPr>
+        <p:spPr>
+          <a:xfrm>
+            <a:off x="7818120" y="3977640"/>
+            <a:ext cx="972312" cy="749808"/>
           </a:xfrm>
           <a:prstGeom prst="roundRect">
             <a:avLst>
-              <a:gd name="adj" fmla="val 7273"/>
+              <a:gd name="adj" fmla="val 14634"/>
             </a:avLst>
           </a:prstGeom>
           <a:solidFill>
-            <a:srgbClr val="EEF8ED"/>
+            <a:srgbClr val="0068B7"/>
           </a:solidFill>
           <a:ln w="12700">
             <a:solidFill>
-              <a:srgbClr val="B9D7E6"/>
+              <a:srgbClr val="0068B7"/>
             </a:solidFill>
             <a:prstDash val="solid"/>
           </a:ln>
@@ -12622,81 +13548,256 @@
       </p:sp>
       <p:sp>
         <p:nvSpPr>
-          <p:cNvPr id="13" name="Text 11"/>
-          <p:cNvSpPr/>
-          <p:nvPr/>
-        </p:nvSpPr>
-        <p:spPr>
-          <a:xfrm>
-            <a:off x="8211312" y="3941064"/>
-            <a:ext cx="2734056" cy="201168"/>
-          </a:xfrm>
-          <a:prstGeom prst="rect">
-            <a:avLst/>
-          </a:prstGeom>
-          <a:noFill/>
-          <a:ln/>
-        </p:spPr>
-        <p:txBody>
-          <a:bodyPr wrap="square" lIns="0" tIns="0" rIns="0" bIns="0" rtlCol="0" anchor="ctr"/>
-          <a:lstStyle/>
-          <a:p>
-            <a:pPr indent="0" marL="0">
-              <a:buNone/>
-            </a:pPr>
-            <a:r>
-              <a:rPr lang="en-US" sz="950" b="1" dirty="0">
-                <a:solidFill>
-                  <a:srgbClr val="0068B7"/>
-                </a:solidFill>
-                <a:latin typeface="Aptos" pitchFamily="34" charset="0"/>
-                <a:ea typeface="Aptos" pitchFamily="34" charset="-122"/>
-                <a:cs typeface="Aptos" pitchFamily="34" charset="-120"/>
-              </a:rPr>
-              <a:t>Avoid duplication</a:t>
-            </a:r>
-            <a:endParaRPr lang="en-US" sz="950" dirty="0"/>
-          </a:p>
-        </p:txBody>
-      </p:sp>
-      <p:sp>
-        <p:nvSpPr>
           <p:cNvPr id="14" name="Text 12"/>
           <p:cNvSpPr/>
           <p:nvPr/>
         </p:nvSpPr>
         <p:spPr>
           <a:xfrm>
-            <a:off x="8211312" y="4233672"/>
-            <a:ext cx="2734056" cy="941832"/>
-          </a:xfrm>
-          <a:prstGeom prst="rect">
-            <a:avLst/>
-          </a:prstGeom>
-          <a:noFill/>
-          <a:ln/>
-        </p:spPr>
-        <p:txBody>
-          <a:bodyPr wrap="square" lIns="0" tIns="0" rIns="0" bIns="0" rtlCol="0" anchor="t">
+            <a:off x="7891272" y="4169664"/>
+            <a:ext cx="826008" cy="310896"/>
+          </a:xfrm>
+          <a:prstGeom prst="rect">
+            <a:avLst/>
+          </a:prstGeom>
+          <a:noFill/>
+          <a:ln/>
+        </p:spPr>
+        <p:txBody>
+          <a:bodyPr wrap="square" lIns="0" tIns="0" rIns="0" bIns="0" rtlCol="0" anchor="ctr">
             <a:normAutofit/>
           </a:bodyPr>
           <a:lstStyle/>
           <a:p>
-            <a:pPr indent="0" marL="0">
-              <a:buNone/>
-            </a:pPr>
-            <a:r>
-              <a:rPr lang="en-US" sz="1250" dirty="0">
-                <a:solidFill>
-                  <a:srgbClr val="17364A"/>
-                </a:solidFill>
-                <a:latin typeface="Aptos" pitchFamily="34" charset="0"/>
-                <a:ea typeface="Aptos" pitchFamily="34" charset="-122"/>
-                <a:cs typeface="Aptos" pitchFamily="34" charset="-120"/>
-              </a:rPr>
-              <a:t>If your department already has a strong equivalent tool, adapt or use the existing process instead of recreating it.</a:t>
-            </a:r>
-            <a:endParaRPr lang="en-US" sz="1250" dirty="0"/>
+            <a:pPr algn="ctr" indent="0" marL="0">
+              <a:buNone/>
+            </a:pPr>
+            <a:r>
+              <a:rPr lang="en-US" sz="1500" b="1" dirty="0">
+                <a:solidFill>
+                  <a:srgbClr val="FFFFFF"/>
+                </a:solidFill>
+                <a:latin typeface="Aptos" pitchFamily="34" charset="0"/>
+                <a:ea typeface="Aptos" pitchFamily="34" charset="-122"/>
+                <a:cs typeface="Aptos" pitchFamily="34" charset="-120"/>
+              </a:rPr>
+              <a:t>Concept</a:t>
+            </a:r>
+            <a:endParaRPr lang="en-US" sz="1500" dirty="0"/>
+          </a:p>
+        </p:txBody>
+      </p:sp>
+      <p:sp>
+        <p:nvSpPr>
+          <p:cNvPr id="15" name="Text 13"/>
+          <p:cNvSpPr/>
+          <p:nvPr/>
+        </p:nvSpPr>
+        <p:spPr>
+          <a:xfrm>
+            <a:off x="8817864" y="4187952"/>
+            <a:ext cx="201168" cy="256032"/>
+          </a:xfrm>
+          <a:prstGeom prst="rect">
+            <a:avLst/>
+          </a:prstGeom>
+          <a:noFill/>
+          <a:ln/>
+        </p:spPr>
+        <p:txBody>
+          <a:bodyPr wrap="square" lIns="0" tIns="0" rIns="0" bIns="0" rtlCol="0" anchor="ctr"/>
+          <a:lstStyle/>
+          <a:p>
+            <a:pPr algn="ctr" indent="0" marL="0">
+              <a:buNone/>
+            </a:pPr>
+            <a:r>
+              <a:rPr lang="en-US" sz="1800" b="1" dirty="0">
+                <a:solidFill>
+                  <a:srgbClr val="0068B7"/>
+                </a:solidFill>
+                <a:latin typeface="Aptos" pitchFamily="34" charset="0"/>
+                <a:ea typeface="Aptos" pitchFamily="34" charset="-122"/>
+                <a:cs typeface="Aptos" pitchFamily="34" charset="-120"/>
+              </a:rPr>
+              <a:t>â†’</a:t>
+            </a:r>
+            <a:endParaRPr lang="en-US" sz="1800" dirty="0"/>
+          </a:p>
+        </p:txBody>
+      </p:sp>
+      <p:sp>
+        <p:nvSpPr>
+          <p:cNvPr id="16" name="Shape 14"/>
+          <p:cNvSpPr/>
+          <p:nvPr/>
+        </p:nvSpPr>
+        <p:spPr>
+          <a:xfrm>
+            <a:off x="9046464" y="3977640"/>
+            <a:ext cx="972312" cy="749808"/>
+          </a:xfrm>
+          <a:prstGeom prst="roundRect">
+            <a:avLst>
+              <a:gd name="adj" fmla="val 14634"/>
+            </a:avLst>
+          </a:prstGeom>
+          <a:solidFill>
+            <a:srgbClr val="2F8A28"/>
+          </a:solidFill>
+          <a:ln w="12700">
+            <a:solidFill>
+              <a:srgbClr val="2F8A28"/>
+            </a:solidFill>
+            <a:prstDash val="solid"/>
+          </a:ln>
+        </p:spPr>
+      </p:sp>
+      <p:sp>
+        <p:nvSpPr>
+          <p:cNvPr id="17" name="Text 15"/>
+          <p:cNvSpPr/>
+          <p:nvPr/>
+        </p:nvSpPr>
+        <p:spPr>
+          <a:xfrm>
+            <a:off x="9119616" y="4169664"/>
+            <a:ext cx="826008" cy="310896"/>
+          </a:xfrm>
+          <a:prstGeom prst="rect">
+            <a:avLst/>
+          </a:prstGeom>
+          <a:noFill/>
+          <a:ln/>
+        </p:spPr>
+        <p:txBody>
+          <a:bodyPr wrap="square" lIns="0" tIns="0" rIns="0" bIns="0" rtlCol="0" anchor="ctr">
+            <a:normAutofit/>
+          </a:bodyPr>
+          <a:lstStyle/>
+          <a:p>
+            <a:pPr algn="ctr" indent="0" marL="0">
+              <a:buNone/>
+            </a:pPr>
+            <a:r>
+              <a:rPr lang="en-US" sz="1500" b="1" dirty="0">
+                <a:solidFill>
+                  <a:srgbClr val="FFFFFF"/>
+                </a:solidFill>
+                <a:latin typeface="Aptos" pitchFamily="34" charset="0"/>
+                <a:ea typeface="Aptos" pitchFamily="34" charset="-122"/>
+                <a:cs typeface="Aptos" pitchFamily="34" charset="-120"/>
+              </a:rPr>
+              <a:t>Tool</a:t>
+            </a:r>
+            <a:endParaRPr lang="en-US" sz="1500" dirty="0"/>
+          </a:p>
+        </p:txBody>
+      </p:sp>
+      <p:sp>
+        <p:nvSpPr>
+          <p:cNvPr id="18" name="Text 16"/>
+          <p:cNvSpPr/>
+          <p:nvPr/>
+        </p:nvSpPr>
+        <p:spPr>
+          <a:xfrm>
+            <a:off x="10046208" y="4187952"/>
+            <a:ext cx="201168" cy="256032"/>
+          </a:xfrm>
+          <a:prstGeom prst="rect">
+            <a:avLst/>
+          </a:prstGeom>
+          <a:noFill/>
+          <a:ln/>
+        </p:spPr>
+        <p:txBody>
+          <a:bodyPr wrap="square" lIns="0" tIns="0" rIns="0" bIns="0" rtlCol="0" anchor="ctr"/>
+          <a:lstStyle/>
+          <a:p>
+            <a:pPr algn="ctr" indent="0" marL="0">
+              <a:buNone/>
+            </a:pPr>
+            <a:r>
+              <a:rPr lang="en-US" sz="1800" b="1" dirty="0">
+                <a:solidFill>
+                  <a:srgbClr val="0068B7"/>
+                </a:solidFill>
+                <a:latin typeface="Aptos" pitchFamily="34" charset="0"/>
+                <a:ea typeface="Aptos" pitchFamily="34" charset="-122"/>
+                <a:cs typeface="Aptos" pitchFamily="34" charset="-120"/>
+              </a:rPr>
+              <a:t>â†’</a:t>
+            </a:r>
+            <a:endParaRPr lang="en-US" sz="1800" dirty="0"/>
+          </a:p>
+        </p:txBody>
+      </p:sp>
+      <p:sp>
+        <p:nvSpPr>
+          <p:cNvPr id="19" name="Shape 17"/>
+          <p:cNvSpPr/>
+          <p:nvPr/>
+        </p:nvSpPr>
+        <p:spPr>
+          <a:xfrm>
+            <a:off x="10274808" y="3977640"/>
+            <a:ext cx="972312" cy="749808"/>
+          </a:xfrm>
+          <a:prstGeom prst="roundRect">
+            <a:avLst>
+              <a:gd name="adj" fmla="val 14634"/>
+            </a:avLst>
+          </a:prstGeom>
+          <a:solidFill>
+            <a:srgbClr val="D69A2D"/>
+          </a:solidFill>
+          <a:ln w="12700">
+            <a:solidFill>
+              <a:srgbClr val="D69A2D"/>
+            </a:solidFill>
+            <a:prstDash val="solid"/>
+          </a:ln>
+        </p:spPr>
+      </p:sp>
+      <p:sp>
+        <p:nvSpPr>
+          <p:cNvPr id="20" name="Text 18"/>
+          <p:cNvSpPr/>
+          <p:nvPr/>
+        </p:nvSpPr>
+        <p:spPr>
+          <a:xfrm>
+            <a:off x="10347960" y="4169664"/>
+            <a:ext cx="826008" cy="310896"/>
+          </a:xfrm>
+          <a:prstGeom prst="rect">
+            <a:avLst/>
+          </a:prstGeom>
+          <a:noFill/>
+          <a:ln/>
+        </p:spPr>
+        <p:txBody>
+          <a:bodyPr wrap="square" lIns="0" tIns="0" rIns="0" bIns="0" rtlCol="0" anchor="ctr">
+            <a:normAutofit/>
+          </a:bodyPr>
+          <a:lstStyle/>
+          <a:p>
+            <a:pPr algn="ctr" indent="0" marL="0">
+              <a:buNone/>
+            </a:pPr>
+            <a:r>
+              <a:rPr lang="en-US" sz="1500" b="1" dirty="0">
+                <a:solidFill>
+                  <a:srgbClr val="FFFFFF"/>
+                </a:solidFill>
+                <a:latin typeface="Aptos" pitchFamily="34" charset="0"/>
+                <a:ea typeface="Aptos" pitchFamily="34" charset="-122"/>
+                <a:cs typeface="Aptos" pitchFamily="34" charset="-120"/>
+              </a:rPr>
+              <a:t>Artifact</a:t>
+            </a:r>
+            <a:endParaRPr lang="en-US" sz="1500" dirty="0"/>
           </a:p>
         </p:txBody>
       </p:sp>
@@ -12893,7 +13994,7 @@
                 <a:ea typeface="Aptos" pitchFamily="34" charset="-122"/>
                 <a:cs typeface="Aptos" pitchFamily="34" charset="-120"/>
               </a:rPr>
-              <a:t>© Paula Soper</a:t>
+              <a:t>Â© Paula Soper</a:t>
             </a:r>
             <a:endParaRPr lang="en-US" sz="800" dirty="0"/>
           </a:p>
@@ -12901,7 +14002,46 @@
       </p:sp>
       <p:sp>
         <p:nvSpPr>
-          <p:cNvPr id="7" name="Shape 5"/>
+          <p:cNvPr id="7" name="Text 5"/>
+          <p:cNvSpPr/>
+          <p:nvPr/>
+        </p:nvSpPr>
+        <p:spPr>
+          <a:xfrm>
+            <a:off x="11137392" y="6510528"/>
+            <a:ext cx="411480" cy="201168"/>
+          </a:xfrm>
+          <a:prstGeom prst="rect">
+            <a:avLst/>
+          </a:prstGeom>
+          <a:noFill/>
+          <a:ln/>
+        </p:spPr>
+        <p:txBody>
+          <a:bodyPr wrap="square" lIns="0" tIns="0" rIns="0" bIns="0" rtlCol="0" anchor="ctr"/>
+          <a:lstStyle/>
+          <a:p>
+            <a:pPr algn="r" indent="0" marL="0">
+              <a:buNone/>
+            </a:pPr>
+            <a:r>
+              <a:rPr lang="en-US" sz="900" dirty="0">
+                <a:solidFill>
+                  <a:srgbClr val="5F7181"/>
+                </a:solidFill>
+                <a:latin typeface="Aptos" pitchFamily="34" charset="0"/>
+                <a:ea typeface="Aptos" pitchFamily="34" charset="-122"/>
+                <a:cs typeface="Aptos" pitchFamily="34" charset="-120"/>
+              </a:rPr>
+              <a:t>5</a:t>
+            </a:r>
+            <a:endParaRPr lang="en-US" sz="900" dirty="0"/>
+          </a:p>
+        </p:txBody>
+      </p:sp>
+      <p:sp>
+        <p:nvSpPr>
+          <p:cNvPr id="8" name="Shape 6"/>
           <p:cNvSpPr/>
           <p:nvPr/>
         </p:nvSpPr>
@@ -12926,7 +14066,7 @@
       </p:sp>
       <p:sp>
         <p:nvSpPr>
-          <p:cNvPr id="8" name="Text 6"/>
+          <p:cNvPr id="9" name="Text 7"/>
           <p:cNvSpPr/>
           <p:nvPr/>
         </p:nvSpPr>
@@ -12965,14 +14105,14 @@
       </p:sp>
       <p:sp>
         <p:nvSpPr>
-          <p:cNvPr id="9" name="Text 7"/>
+          <p:cNvPr id="10" name="Text 8"/>
           <p:cNvSpPr/>
           <p:nvPr/>
         </p:nvSpPr>
         <p:spPr>
           <a:xfrm>
             <a:off x="640080" y="621792"/>
-            <a:ext cx="10881360" cy="566928"/>
+            <a:ext cx="10881360" cy="713232"/>
           </a:xfrm>
           <a:prstGeom prst="rect">
             <a:avLst/>
@@ -12990,7 +14130,7 @@
               <a:buNone/>
             </a:pPr>
             <a:r>
-              <a:rPr lang="en-US" sz="2700" b="1" dirty="0">
+              <a:rPr lang="en-US" sz="3400" b="1" dirty="0">
                 <a:solidFill>
                   <a:srgbClr val="003A63"/>
                 </a:solidFill>
@@ -13000,20 +14140,20 @@
               </a:rPr>
               <a:t>Learning Objectives</a:t>
             </a:r>
-            <a:endParaRPr lang="en-US" sz="2700" dirty="0"/>
-          </a:p>
-        </p:txBody>
-      </p:sp>
-      <p:sp>
-        <p:nvSpPr>
-          <p:cNvPr id="10" name="Text 8"/>
-          <p:cNvSpPr/>
-          <p:nvPr/>
-        </p:nvSpPr>
-        <p:spPr>
-          <a:xfrm>
-            <a:off x="868680" y="1417320"/>
-            <a:ext cx="6675120" cy="4434840"/>
+            <a:endParaRPr lang="en-US" sz="3400" dirty="0"/>
+          </a:p>
+        </p:txBody>
+      </p:sp>
+      <p:sp>
+        <p:nvSpPr>
+          <p:cNvPr id="11" name="Text 9"/>
+          <p:cNvSpPr/>
+          <p:nvPr/>
+        </p:nvSpPr>
+        <p:spPr>
+          <a:xfrm>
+            <a:off x="868680" y="1508760"/>
+            <a:ext cx="6537960" cy="4160520"/>
           </a:xfrm>
           <a:prstGeom prst="rect">
             <a:avLst/>
@@ -13028,7 +14168,7 @@
           <a:lstStyle/>
           <a:p>
             <a:r>
-              <a:rPr lang="en-US" sz="1700" dirty="0">
+              <a:rPr lang="en-US" sz="2100" dirty="0">
                 <a:solidFill>
                   <a:srgbClr val="17364A"/>
                 </a:solidFill>
@@ -13038,11 +14178,11 @@
               </a:rPr>
               <a:t>Define FHIR in practical public health terms.</a:t>
             </a:r>
-            <a:endParaRPr lang="en-US" sz="1700" dirty="0"/>
-          </a:p>
-          <a:p>
-            <a:r>
-              <a:rPr lang="en-US" sz="1700" dirty="0">
+            <a:endParaRPr lang="en-US" sz="2100" dirty="0"/>
+          </a:p>
+          <a:p>
+            <a:r>
+              <a:rPr lang="en-US" sz="2100" dirty="0">
                 <a:solidFill>
                   <a:srgbClr val="17364A"/>
                 </a:solidFill>
@@ -13052,11 +14192,11 @@
               </a:rPr>
               <a:t>Identify FHIR resources commonly relevant to public health AI use cases.</a:t>
             </a:r>
-            <a:endParaRPr lang="en-US" sz="1700" dirty="0"/>
-          </a:p>
-          <a:p>
-            <a:r>
-              <a:rPr lang="en-US" sz="1700" dirty="0">
+            <a:endParaRPr lang="en-US" sz="2100" dirty="0"/>
+          </a:p>
+          <a:p>
+            <a:r>
+              <a:rPr lang="en-US" sz="2100" dirty="0">
                 <a:solidFill>
                   <a:srgbClr val="17364A"/>
                 </a:solidFill>
@@ -13066,27 +14206,13 @@
               </a:rPr>
               <a:t>Explain the role of profiles, implementation guides, and APIs.</a:t>
             </a:r>
-            <a:endParaRPr lang="en-US" sz="1700" dirty="0"/>
-          </a:p>
-          <a:p>
-            <a:r>
-              <a:rPr lang="en-US" sz="1700" dirty="0">
-                <a:solidFill>
-                  <a:srgbClr val="17364A"/>
-                </a:solidFill>
-                <a:latin typeface="Aptos" pitchFamily="34" charset="0"/>
-                <a:ea typeface="Aptos" pitchFamily="34" charset="-122"/>
-                <a:cs typeface="Aptos" pitchFamily="34" charset="-120"/>
-              </a:rPr>
-              <a:t>Assess whether FHIR-accessible data are complete and fit for a specific use case.</a:t>
-            </a:r>
-            <a:endParaRPr lang="en-US" sz="1700" dirty="0"/>
-          </a:p>
-        </p:txBody>
-      </p:sp>
-      <p:sp>
-        <p:nvSpPr>
-          <p:cNvPr id="11" name="Shape 9"/>
+            <a:endParaRPr lang="en-US" sz="2100" dirty="0"/>
+          </a:p>
+        </p:txBody>
+      </p:sp>
+      <p:sp>
+        <p:nvSpPr>
+          <p:cNvPr id="12" name="Shape 10"/>
           <p:cNvSpPr/>
           <p:nvPr/>
         </p:nvSpPr>
@@ -13113,14 +14239,14 @@
       </p:sp>
       <p:sp>
         <p:nvSpPr>
-          <p:cNvPr id="12" name="Text 10"/>
+          <p:cNvPr id="13" name="Text 11"/>
           <p:cNvSpPr/>
           <p:nvPr/>
         </p:nvSpPr>
         <p:spPr>
           <a:xfrm>
             <a:off x="8074152" y="1563624"/>
-            <a:ext cx="2825496" cy="201168"/>
+            <a:ext cx="2825496" cy="256032"/>
           </a:xfrm>
           <a:prstGeom prst="rect">
             <a:avLst/>
@@ -13136,7 +14262,7 @@
               <a:buNone/>
             </a:pPr>
             <a:r>
-              <a:rPr lang="en-US" sz="950" b="1" dirty="0">
+              <a:rPr lang="en-US" sz="1300" b="1" dirty="0">
                 <a:solidFill>
                   <a:srgbClr val="0068B7"/>
                 </a:solidFill>
@@ -13146,20 +14272,20 @@
               </a:rPr>
               <a:t>Key idea</a:t>
             </a:r>
-            <a:endParaRPr lang="en-US" sz="950" dirty="0"/>
-          </a:p>
-        </p:txBody>
-      </p:sp>
-      <p:sp>
-        <p:nvSpPr>
-          <p:cNvPr id="13" name="Text 11"/>
-          <p:cNvSpPr/>
-          <p:nvPr/>
-        </p:nvSpPr>
-        <p:spPr>
-          <a:xfrm>
-            <a:off x="8074152" y="1856232"/>
-            <a:ext cx="2825496" cy="1261872"/>
+            <a:endParaRPr lang="en-US" sz="1300" dirty="0"/>
+          </a:p>
+        </p:txBody>
+      </p:sp>
+      <p:sp>
+        <p:nvSpPr>
+          <p:cNvPr id="14" name="Text 12"/>
+          <p:cNvSpPr/>
+          <p:nvPr/>
+        </p:nvSpPr>
+        <p:spPr>
+          <a:xfrm>
+            <a:off x="8074152" y="1920240"/>
+            <a:ext cx="2825496" cy="1188720"/>
           </a:xfrm>
           <a:prstGeom prst="rect">
             <a:avLst/>
@@ -13177,7 +14303,7 @@
               <a:buNone/>
             </a:pPr>
             <a:r>
-              <a:rPr lang="en-US" sz="1250" dirty="0">
+              <a:rPr lang="en-US" sz="1550" dirty="0">
                 <a:solidFill>
                   <a:srgbClr val="17364A"/>
                 </a:solidFill>
@@ -13187,13 +14313,13 @@
               </a:rPr>
               <a:t>Define FHIR in practical public health terms.</a:t>
             </a:r>
-            <a:endParaRPr lang="en-US" sz="1250" dirty="0"/>
-          </a:p>
-        </p:txBody>
-      </p:sp>
-      <p:sp>
-        <p:nvSpPr>
-          <p:cNvPr id="14" name="Shape 12"/>
+            <a:endParaRPr lang="en-US" sz="1550" dirty="0"/>
+          </a:p>
+        </p:txBody>
+      </p:sp>
+      <p:sp>
+        <p:nvSpPr>
+          <p:cNvPr id="15" name="Shape 13"/>
           <p:cNvSpPr/>
           <p:nvPr/>
         </p:nvSpPr>
@@ -13220,14 +14346,14 @@
       </p:sp>
       <p:sp>
         <p:nvSpPr>
-          <p:cNvPr id="15" name="Text 13"/>
+          <p:cNvPr id="16" name="Text 14"/>
           <p:cNvSpPr/>
           <p:nvPr/>
         </p:nvSpPr>
         <p:spPr>
           <a:xfrm>
             <a:off x="8074152" y="3666744"/>
-            <a:ext cx="2825496" cy="201168"/>
+            <a:ext cx="2825496" cy="256032"/>
           </a:xfrm>
           <a:prstGeom prst="rect">
             <a:avLst/>
@@ -13243,7 +14369,7 @@
               <a:buNone/>
             </a:pPr>
             <a:r>
-              <a:rPr lang="en-US" sz="950" b="1" dirty="0">
+              <a:rPr lang="en-US" sz="1300" b="1" dirty="0">
                 <a:solidFill>
                   <a:srgbClr val="0068B7"/>
                 </a:solidFill>
@@ -13253,20 +14379,20 @@
               </a:rPr>
               <a:t>Use this for</a:t>
             </a:r>
-            <a:endParaRPr lang="en-US" sz="950" dirty="0"/>
-          </a:p>
-        </p:txBody>
-      </p:sp>
-      <p:sp>
-        <p:nvSpPr>
-          <p:cNvPr id="16" name="Text 14"/>
-          <p:cNvSpPr/>
-          <p:nvPr/>
-        </p:nvSpPr>
-        <p:spPr>
-          <a:xfrm>
-            <a:off x="8074152" y="3959352"/>
-            <a:ext cx="2825496" cy="1170432"/>
+            <a:endParaRPr lang="en-US" sz="1300" dirty="0"/>
+          </a:p>
+        </p:txBody>
+      </p:sp>
+      <p:sp>
+        <p:nvSpPr>
+          <p:cNvPr id="17" name="Text 15"/>
+          <p:cNvSpPr/>
+          <p:nvPr/>
+        </p:nvSpPr>
+        <p:spPr>
+          <a:xfrm>
+            <a:off x="8074152" y="4023360"/>
+            <a:ext cx="2825496" cy="1097280"/>
           </a:xfrm>
           <a:prstGeom prst="rect">
             <a:avLst/>
@@ -13284,7 +14410,7 @@
               <a:buNone/>
             </a:pPr>
             <a:r>
-              <a:rPr lang="en-US" sz="1250" dirty="0">
+              <a:rPr lang="en-US" sz="1550" dirty="0">
                 <a:solidFill>
                   <a:srgbClr val="17364A"/>
                 </a:solidFill>
@@ -13294,7 +14420,7 @@
               </a:rPr>
               <a:t>Connect the concept to public health decisions, safeguards, documentation, or implementation work.</a:t>
             </a:r>
-            <a:endParaRPr lang="en-US" sz="1250" dirty="0"/>
+            <a:endParaRPr lang="en-US" sz="1550" dirty="0"/>
           </a:p>
         </p:txBody>
       </p:sp>
@@ -13491,7 +14617,7 @@
                 <a:ea typeface="Aptos" pitchFamily="34" charset="-122"/>
                 <a:cs typeface="Aptos" pitchFamily="34" charset="-120"/>
               </a:rPr>
-              <a:t>© Paula Soper</a:t>
+              <a:t>Â© Paula Soper</a:t>
             </a:r>
             <a:endParaRPr lang="en-US" sz="800" dirty="0"/>
           </a:p>
@@ -13499,7 +14625,46 @@
       </p:sp>
       <p:sp>
         <p:nvSpPr>
-          <p:cNvPr id="7" name="Shape 5"/>
+          <p:cNvPr id="7" name="Text 5"/>
+          <p:cNvSpPr/>
+          <p:nvPr/>
+        </p:nvSpPr>
+        <p:spPr>
+          <a:xfrm>
+            <a:off x="11137392" y="6510528"/>
+            <a:ext cx="411480" cy="201168"/>
+          </a:xfrm>
+          <a:prstGeom prst="rect">
+            <a:avLst/>
+          </a:prstGeom>
+          <a:noFill/>
+          <a:ln/>
+        </p:spPr>
+        <p:txBody>
+          <a:bodyPr wrap="square" lIns="0" tIns="0" rIns="0" bIns="0" rtlCol="0" anchor="ctr"/>
+          <a:lstStyle/>
+          <a:p>
+            <a:pPr algn="r" indent="0" marL="0">
+              <a:buNone/>
+            </a:pPr>
+            <a:r>
+              <a:rPr lang="en-US" sz="900" dirty="0">
+                <a:solidFill>
+                  <a:srgbClr val="5F7181"/>
+                </a:solidFill>
+                <a:latin typeface="Aptos" pitchFamily="34" charset="0"/>
+                <a:ea typeface="Aptos" pitchFamily="34" charset="-122"/>
+                <a:cs typeface="Aptos" pitchFamily="34" charset="-120"/>
+              </a:rPr>
+              <a:t>6</a:t>
+            </a:r>
+            <a:endParaRPr lang="en-US" sz="900" dirty="0"/>
+          </a:p>
+        </p:txBody>
+      </p:sp>
+      <p:sp>
+        <p:nvSpPr>
+          <p:cNvPr id="8" name="Shape 6"/>
           <p:cNvSpPr/>
           <p:nvPr/>
         </p:nvSpPr>
@@ -13524,7 +14689,7 @@
       </p:sp>
       <p:sp>
         <p:nvSpPr>
-          <p:cNvPr id="8" name="Text 6"/>
+          <p:cNvPr id="9" name="Text 7"/>
           <p:cNvSpPr/>
           <p:nvPr/>
         </p:nvSpPr>
@@ -13563,14 +14728,14 @@
       </p:sp>
       <p:sp>
         <p:nvSpPr>
-          <p:cNvPr id="9" name="Text 7"/>
+          <p:cNvPr id="10" name="Text 8"/>
           <p:cNvSpPr/>
           <p:nvPr/>
         </p:nvSpPr>
         <p:spPr>
           <a:xfrm>
             <a:off x="640080" y="621792"/>
-            <a:ext cx="10881360" cy="566928"/>
+            <a:ext cx="10881360" cy="713232"/>
           </a:xfrm>
           <a:prstGeom prst="rect">
             <a:avLst/>
@@ -13588,7 +14753,7 @@
               <a:buNone/>
             </a:pPr>
             <a:r>
-              <a:rPr lang="en-US" sz="2700" b="1" dirty="0">
+              <a:rPr lang="en-US" sz="3400" b="1" dirty="0">
                 <a:solidFill>
                   <a:srgbClr val="003A63"/>
                 </a:solidFill>
@@ -13598,20 +14763,20 @@
               </a:rPr>
               <a:t>Module Overview</a:t>
             </a:r>
-            <a:endParaRPr lang="en-US" sz="2700" dirty="0"/>
-          </a:p>
-        </p:txBody>
-      </p:sp>
-      <p:sp>
-        <p:nvSpPr>
-          <p:cNvPr id="10" name="Text 8"/>
-          <p:cNvSpPr/>
-          <p:nvPr/>
-        </p:nvSpPr>
-        <p:spPr>
-          <a:xfrm>
-            <a:off x="868680" y="1417320"/>
-            <a:ext cx="6675120" cy="4434840"/>
+            <a:endParaRPr lang="en-US" sz="3400" dirty="0"/>
+          </a:p>
+        </p:txBody>
+      </p:sp>
+      <p:sp>
+        <p:nvSpPr>
+          <p:cNvPr id="11" name="Text 9"/>
+          <p:cNvSpPr/>
+          <p:nvPr/>
+        </p:nvSpPr>
+        <p:spPr>
+          <a:xfrm>
+            <a:off x="868680" y="1508760"/>
+            <a:ext cx="6537960" cy="4160520"/>
           </a:xfrm>
           <a:prstGeom prst="rect">
             <a:avLst/>
@@ -13626,7 +14791,7 @@
           <a:lstStyle/>
           <a:p>
             <a:r>
-              <a:rPr lang="en-US" sz="1700" dirty="0">
+              <a:rPr lang="en-US" sz="2100" dirty="0">
                 <a:solidFill>
                   <a:srgbClr val="17364A"/>
                 </a:solidFill>
@@ -13634,13 +14799,13 @@
                 <a:ea typeface="Aptos" pitchFamily="34" charset="-122"/>
                 <a:cs typeface="Aptos" pitchFamily="34" charset="-120"/>
               </a:rPr>
-              <a:t>FHIR is increasingly important for public health because it supports structured, API-based access to health data.</a:t>
-            </a:r>
-            <a:endParaRPr lang="en-US" sz="1700" dirty="0"/>
-          </a:p>
-          <a:p>
-            <a:r>
-              <a:rPr lang="en-US" sz="1700" dirty="0">
+              <a:t>FHIR is increasingly important for public health because it supports structured, API-based access to.</a:t>
+            </a:r>
+            <a:endParaRPr lang="en-US" sz="2100" dirty="0"/>
+          </a:p>
+          <a:p>
+            <a:r>
+              <a:rPr lang="en-US" sz="2100" dirty="0">
                 <a:solidFill>
                   <a:srgbClr val="17364A"/>
                 </a:solidFill>
@@ -13648,13 +14813,13 @@
                 <a:ea typeface="Aptos" pitchFamily="34" charset="-122"/>
                 <a:cs typeface="Aptos" pitchFamily="34" charset="-120"/>
               </a:rPr>
-              <a:t>Public health staff do not need to become FHIR developers to participate in AI planning, but they do need to understand.</a:t>
-            </a:r>
-            <a:endParaRPr lang="en-US" sz="1700" dirty="0"/>
-          </a:p>
-          <a:p>
-            <a:r>
-              <a:rPr lang="en-US" sz="1700" dirty="0">
+              <a:t>Public health staff do not need to become FHIR developers to participate in AI planning, but they do.</a:t>
+            </a:r>
+            <a:endParaRPr lang="en-US" sz="2100" dirty="0"/>
+          </a:p>
+          <a:p>
+            <a:r>
+              <a:rPr lang="en-US" sz="2100" dirty="0">
                 <a:solidFill>
                   <a:srgbClr val="17364A"/>
                 </a:solidFill>
@@ -13662,15 +14827,15 @@
                 <a:ea typeface="Aptos" pitchFamily="34" charset="-122"/>
                 <a:cs typeface="Aptos" pitchFamily="34" charset="-120"/>
               </a:rPr>
-              <a:t>This module explains how FHIR resources, profiles, implementation guides, and APIs may support AI-enabled public health.</a:t>
-            </a:r>
-            <a:endParaRPr lang="en-US" sz="1700" dirty="0"/>
-          </a:p>
-        </p:txBody>
-      </p:sp>
-      <p:sp>
-        <p:nvSpPr>
-          <p:cNvPr id="11" name="Shape 9"/>
+              <a:t>This module explains how FHIR resources, profiles, implementation guides, and APIs may support.</a:t>
+            </a:r>
+            <a:endParaRPr lang="en-US" sz="2100" dirty="0"/>
+          </a:p>
+        </p:txBody>
+      </p:sp>
+      <p:sp>
+        <p:nvSpPr>
+          <p:cNvPr id="12" name="Shape 10"/>
           <p:cNvSpPr/>
           <p:nvPr/>
         </p:nvSpPr>
@@ -13697,14 +14862,14 @@
       </p:sp>
       <p:sp>
         <p:nvSpPr>
-          <p:cNvPr id="12" name="Text 10"/>
+          <p:cNvPr id="13" name="Text 11"/>
           <p:cNvSpPr/>
           <p:nvPr/>
         </p:nvSpPr>
         <p:spPr>
           <a:xfrm>
             <a:off x="8074152" y="1563624"/>
-            <a:ext cx="2825496" cy="201168"/>
+            <a:ext cx="2825496" cy="256032"/>
           </a:xfrm>
           <a:prstGeom prst="rect">
             <a:avLst/>
@@ -13720,7 +14885,7 @@
               <a:buNone/>
             </a:pPr>
             <a:r>
-              <a:rPr lang="en-US" sz="950" b="1" dirty="0">
+              <a:rPr lang="en-US" sz="1300" b="1" dirty="0">
                 <a:solidFill>
                   <a:srgbClr val="0068B7"/>
                 </a:solidFill>
@@ -13730,20 +14895,20 @@
               </a:rPr>
               <a:t>Key idea</a:t>
             </a:r>
-            <a:endParaRPr lang="en-US" sz="950" dirty="0"/>
-          </a:p>
-        </p:txBody>
-      </p:sp>
-      <p:sp>
-        <p:nvSpPr>
-          <p:cNvPr id="13" name="Text 11"/>
-          <p:cNvSpPr/>
-          <p:nvPr/>
-        </p:nvSpPr>
-        <p:spPr>
-          <a:xfrm>
-            <a:off x="8074152" y="1856232"/>
-            <a:ext cx="2825496" cy="1261872"/>
+            <a:endParaRPr lang="en-US" sz="1300" dirty="0"/>
+          </a:p>
+        </p:txBody>
+      </p:sp>
+      <p:sp>
+        <p:nvSpPr>
+          <p:cNvPr id="14" name="Text 12"/>
+          <p:cNvSpPr/>
+          <p:nvPr/>
+        </p:nvSpPr>
+        <p:spPr>
+          <a:xfrm>
+            <a:off x="8074152" y="1920240"/>
+            <a:ext cx="2825496" cy="1188720"/>
           </a:xfrm>
           <a:prstGeom prst="rect">
             <a:avLst/>
@@ -13761,7 +14926,7 @@
               <a:buNone/>
             </a:pPr>
             <a:r>
-              <a:rPr lang="en-US" sz="1250" dirty="0">
+              <a:rPr lang="en-US" sz="1550" dirty="0">
                 <a:solidFill>
                   <a:srgbClr val="17364A"/>
                 </a:solidFill>
@@ -13769,15 +14934,15 @@
                 <a:ea typeface="Aptos" pitchFamily="34" charset="-122"/>
                 <a:cs typeface="Aptos" pitchFamily="34" charset="-120"/>
               </a:rPr>
-              <a:t>FHIR is increasingly important for public health because it supports structured, API-based access to health data.</a:t>
-            </a:r>
-            <a:endParaRPr lang="en-US" sz="1250" dirty="0"/>
-          </a:p>
-        </p:txBody>
-      </p:sp>
-      <p:sp>
-        <p:nvSpPr>
-          <p:cNvPr id="14" name="Shape 12"/>
+              <a:t>FHIR is increasingly important for public health because it supports structured, API-based access to.</a:t>
+            </a:r>
+            <a:endParaRPr lang="en-US" sz="1550" dirty="0"/>
+          </a:p>
+        </p:txBody>
+      </p:sp>
+      <p:sp>
+        <p:nvSpPr>
+          <p:cNvPr id="15" name="Shape 13"/>
           <p:cNvSpPr/>
           <p:nvPr/>
         </p:nvSpPr>
@@ -13804,14 +14969,14 @@
       </p:sp>
       <p:sp>
         <p:nvSpPr>
-          <p:cNvPr id="15" name="Text 13"/>
+          <p:cNvPr id="16" name="Text 14"/>
           <p:cNvSpPr/>
           <p:nvPr/>
         </p:nvSpPr>
         <p:spPr>
           <a:xfrm>
             <a:off x="8074152" y="3666744"/>
-            <a:ext cx="2825496" cy="201168"/>
+            <a:ext cx="2825496" cy="256032"/>
           </a:xfrm>
           <a:prstGeom prst="rect">
             <a:avLst/>
@@ -13827,7 +14992,7 @@
               <a:buNone/>
             </a:pPr>
             <a:r>
-              <a:rPr lang="en-US" sz="950" b="1" dirty="0">
+              <a:rPr lang="en-US" sz="1300" b="1" dirty="0">
                 <a:solidFill>
                   <a:srgbClr val="0068B7"/>
                 </a:solidFill>
@@ -13837,20 +15002,20 @@
               </a:rPr>
               <a:t>Use this for</a:t>
             </a:r>
-            <a:endParaRPr lang="en-US" sz="950" dirty="0"/>
-          </a:p>
-        </p:txBody>
-      </p:sp>
-      <p:sp>
-        <p:nvSpPr>
-          <p:cNvPr id="16" name="Text 14"/>
-          <p:cNvSpPr/>
-          <p:nvPr/>
-        </p:nvSpPr>
-        <p:spPr>
-          <a:xfrm>
-            <a:off x="8074152" y="3959352"/>
-            <a:ext cx="2825496" cy="1170432"/>
+            <a:endParaRPr lang="en-US" sz="1300" dirty="0"/>
+          </a:p>
+        </p:txBody>
+      </p:sp>
+      <p:sp>
+        <p:nvSpPr>
+          <p:cNvPr id="17" name="Text 15"/>
+          <p:cNvSpPr/>
+          <p:nvPr/>
+        </p:nvSpPr>
+        <p:spPr>
+          <a:xfrm>
+            <a:off x="8074152" y="4023360"/>
+            <a:ext cx="2825496" cy="1097280"/>
           </a:xfrm>
           <a:prstGeom prst="rect">
             <a:avLst/>
@@ -13868,7 +15033,7 @@
               <a:buNone/>
             </a:pPr>
             <a:r>
-              <a:rPr lang="en-US" sz="1250" dirty="0">
+              <a:rPr lang="en-US" sz="1550" dirty="0">
                 <a:solidFill>
                   <a:srgbClr val="17364A"/>
                 </a:solidFill>
@@ -13878,7 +15043,7 @@
               </a:rPr>
               <a:t>Connect the concept to public health decisions, safeguards, documentation, or implementation work.</a:t>
             </a:r>
-            <a:endParaRPr lang="en-US" sz="1250" dirty="0"/>
+            <a:endParaRPr lang="en-US" sz="1550" dirty="0"/>
           </a:p>
         </p:txBody>
       </p:sp>
@@ -14075,7 +15240,7 @@
                 <a:ea typeface="Aptos" pitchFamily="34" charset="-122"/>
                 <a:cs typeface="Aptos" pitchFamily="34" charset="-120"/>
               </a:rPr>
-              <a:t>© Paula Soper</a:t>
+              <a:t>Â© Paula Soper</a:t>
             </a:r>
             <a:endParaRPr lang="en-US" sz="800" dirty="0"/>
           </a:p>
@@ -14083,7 +15248,46 @@
       </p:sp>
       <p:sp>
         <p:nvSpPr>
-          <p:cNvPr id="7" name="Shape 5"/>
+          <p:cNvPr id="7" name="Text 5"/>
+          <p:cNvSpPr/>
+          <p:nvPr/>
+        </p:nvSpPr>
+        <p:spPr>
+          <a:xfrm>
+            <a:off x="11137392" y="6510528"/>
+            <a:ext cx="411480" cy="201168"/>
+          </a:xfrm>
+          <a:prstGeom prst="rect">
+            <a:avLst/>
+          </a:prstGeom>
+          <a:noFill/>
+          <a:ln/>
+        </p:spPr>
+        <p:txBody>
+          <a:bodyPr wrap="square" lIns="0" tIns="0" rIns="0" bIns="0" rtlCol="0" anchor="ctr"/>
+          <a:lstStyle/>
+          <a:p>
+            <a:pPr algn="r" indent="0" marL="0">
+              <a:buNone/>
+            </a:pPr>
+            <a:r>
+              <a:rPr lang="en-US" sz="900" dirty="0">
+                <a:solidFill>
+                  <a:srgbClr val="5F7181"/>
+                </a:solidFill>
+                <a:latin typeface="Aptos" pitchFamily="34" charset="0"/>
+                <a:ea typeface="Aptos" pitchFamily="34" charset="-122"/>
+                <a:cs typeface="Aptos" pitchFamily="34" charset="-120"/>
+              </a:rPr>
+              <a:t>7</a:t>
+            </a:r>
+            <a:endParaRPr lang="en-US" sz="900" dirty="0"/>
+          </a:p>
+        </p:txBody>
+      </p:sp>
+      <p:sp>
+        <p:nvSpPr>
+          <p:cNvPr id="8" name="Shape 6"/>
           <p:cNvSpPr/>
           <p:nvPr/>
         </p:nvSpPr>
@@ -14108,7 +15312,7 @@
       </p:sp>
       <p:sp>
         <p:nvSpPr>
-          <p:cNvPr id="8" name="Text 6"/>
+          <p:cNvPr id="9" name="Text 7"/>
           <p:cNvSpPr/>
           <p:nvPr/>
         </p:nvSpPr>
@@ -14147,14 +15351,14 @@
       </p:sp>
       <p:sp>
         <p:nvSpPr>
-          <p:cNvPr id="9" name="Text 7"/>
+          <p:cNvPr id="10" name="Text 8"/>
           <p:cNvSpPr/>
           <p:nvPr/>
         </p:nvSpPr>
         <p:spPr>
           <a:xfrm>
             <a:off x="640080" y="621792"/>
-            <a:ext cx="10881360" cy="566928"/>
+            <a:ext cx="10881360" cy="713232"/>
           </a:xfrm>
           <a:prstGeom prst="rect">
             <a:avLst/>
@@ -14172,7 +15376,7 @@
               <a:buNone/>
             </a:pPr>
             <a:r>
-              <a:rPr lang="en-US" sz="2700" b="1" dirty="0">
+              <a:rPr lang="en-US" sz="3400" b="1" dirty="0">
                 <a:solidFill>
                   <a:srgbClr val="003A63"/>
                 </a:solidFill>
@@ -14182,20 +15386,20 @@
               </a:rPr>
               <a:t>Jurisdiction and Agency Policy Note</a:t>
             </a:r>
-            <a:endParaRPr lang="en-US" sz="2700" dirty="0"/>
-          </a:p>
-        </p:txBody>
-      </p:sp>
-      <p:sp>
-        <p:nvSpPr>
-          <p:cNvPr id="10" name="Text 8"/>
-          <p:cNvSpPr/>
-          <p:nvPr/>
-        </p:nvSpPr>
-        <p:spPr>
-          <a:xfrm>
-            <a:off x="868680" y="1417320"/>
-            <a:ext cx="6675120" cy="4434840"/>
+            <a:endParaRPr lang="en-US" sz="3400" dirty="0"/>
+          </a:p>
+        </p:txBody>
+      </p:sp>
+      <p:sp>
+        <p:nvSpPr>
+          <p:cNvPr id="11" name="Text 9"/>
+          <p:cNvSpPr/>
+          <p:nvPr/>
+        </p:nvSpPr>
+        <p:spPr>
+          <a:xfrm>
+            <a:off x="868680" y="1508760"/>
+            <a:ext cx="6537960" cy="4160520"/>
           </a:xfrm>
           <a:prstGeom prst="rect">
             <a:avLst/>
@@ -14210,7 +15414,7 @@
           <a:lstStyle/>
           <a:p>
             <a:r>
-              <a:rPr lang="en-US" sz="1700" dirty="0">
+              <a:rPr lang="en-US" sz="2100" dirty="0">
                 <a:solidFill>
                   <a:srgbClr val="17364A"/>
                 </a:solidFill>
@@ -14220,11 +15424,11 @@
               </a:rPr>
               <a:t>This national-level module is intended for training and planning purposes.</a:t>
             </a:r>
-            <a:endParaRPr lang="en-US" sz="1700" dirty="0"/>
-          </a:p>
-          <a:p>
-            <a:r>
-              <a:rPr lang="en-US" sz="1700" dirty="0">
+            <a:endParaRPr lang="en-US" sz="2100" dirty="0"/>
+          </a:p>
+          <a:p>
+            <a:r>
+              <a:rPr lang="en-US" sz="2100" dirty="0">
                 <a:solidFill>
                   <a:srgbClr val="17364A"/>
                 </a:solidFill>
@@ -14234,11 +15438,11 @@
               </a:rPr>
               <a:t>It does not replace legal, privacy, procurement, civil rights, records, or agency policy review.</a:t>
             </a:r>
-            <a:endParaRPr lang="en-US" sz="1700" dirty="0"/>
-          </a:p>
-          <a:p>
-            <a:r>
-              <a:rPr lang="en-US" sz="1700" dirty="0">
+            <a:endParaRPr lang="en-US" sz="2100" dirty="0"/>
+          </a:p>
+          <a:p>
+            <a:r>
+              <a:rPr lang="en-US" sz="2100" dirty="0">
                 <a:solidFill>
                   <a:srgbClr val="17364A"/>
                 </a:solidFill>
@@ -14246,15 +15450,15 @@
                 <a:ea typeface="Aptos" pitchFamily="34" charset="-122"/>
                 <a:cs typeface="Aptos" pitchFamily="34" charset="-120"/>
               </a:rPr>
-              <a:t>Learners should confirm applicable requirements in their own jurisdiction and organization before implementing AI-supported.</a:t>
-            </a:r>
-            <a:endParaRPr lang="en-US" sz="1700" dirty="0"/>
-          </a:p>
-        </p:txBody>
-      </p:sp>
-      <p:sp>
-        <p:nvSpPr>
-          <p:cNvPr id="11" name="Shape 9"/>
+              <a:t>Learners should confirm applicable requirements in their own jurisdiction and organization before.</a:t>
+            </a:r>
+            <a:endParaRPr lang="en-US" sz="2100" dirty="0"/>
+          </a:p>
+        </p:txBody>
+      </p:sp>
+      <p:sp>
+        <p:nvSpPr>
+          <p:cNvPr id="12" name="Shape 10"/>
           <p:cNvSpPr/>
           <p:nvPr/>
         </p:nvSpPr>
@@ -14281,14 +15485,14 @@
       </p:sp>
       <p:sp>
         <p:nvSpPr>
-          <p:cNvPr id="12" name="Text 10"/>
+          <p:cNvPr id="13" name="Text 11"/>
           <p:cNvSpPr/>
           <p:nvPr/>
         </p:nvSpPr>
         <p:spPr>
           <a:xfrm>
             <a:off x="8074152" y="1563624"/>
-            <a:ext cx="2825496" cy="201168"/>
+            <a:ext cx="2825496" cy="256032"/>
           </a:xfrm>
           <a:prstGeom prst="rect">
             <a:avLst/>
@@ -14304,7 +15508,7 @@
               <a:buNone/>
             </a:pPr>
             <a:r>
-              <a:rPr lang="en-US" sz="950" b="1" dirty="0">
+              <a:rPr lang="en-US" sz="1300" b="1" dirty="0">
                 <a:solidFill>
                   <a:srgbClr val="0068B7"/>
                 </a:solidFill>
@@ -14314,20 +15518,20 @@
               </a:rPr>
               <a:t>Key idea</a:t>
             </a:r>
-            <a:endParaRPr lang="en-US" sz="950" dirty="0"/>
-          </a:p>
-        </p:txBody>
-      </p:sp>
-      <p:sp>
-        <p:nvSpPr>
-          <p:cNvPr id="13" name="Text 11"/>
-          <p:cNvSpPr/>
-          <p:nvPr/>
-        </p:nvSpPr>
-        <p:spPr>
-          <a:xfrm>
-            <a:off x="8074152" y="1856232"/>
-            <a:ext cx="2825496" cy="1261872"/>
+            <a:endParaRPr lang="en-US" sz="1300" dirty="0"/>
+          </a:p>
+        </p:txBody>
+      </p:sp>
+      <p:sp>
+        <p:nvSpPr>
+          <p:cNvPr id="14" name="Text 12"/>
+          <p:cNvSpPr/>
+          <p:nvPr/>
+        </p:nvSpPr>
+        <p:spPr>
+          <a:xfrm>
+            <a:off x="8074152" y="1920240"/>
+            <a:ext cx="2825496" cy="1188720"/>
           </a:xfrm>
           <a:prstGeom prst="rect">
             <a:avLst/>
@@ -14345,7 +15549,7 @@
               <a:buNone/>
             </a:pPr>
             <a:r>
-              <a:rPr lang="en-US" sz="1250" dirty="0">
+              <a:rPr lang="en-US" sz="1550" dirty="0">
                 <a:solidFill>
                   <a:srgbClr val="17364A"/>
                 </a:solidFill>
@@ -14355,13 +15559,13 @@
               </a:rPr>
               <a:t>This national-level module is intended for training and planning purposes.</a:t>
             </a:r>
-            <a:endParaRPr lang="en-US" sz="1250" dirty="0"/>
-          </a:p>
-        </p:txBody>
-      </p:sp>
-      <p:sp>
-        <p:nvSpPr>
-          <p:cNvPr id="14" name="Shape 12"/>
+            <a:endParaRPr lang="en-US" sz="1550" dirty="0"/>
+          </a:p>
+        </p:txBody>
+      </p:sp>
+      <p:sp>
+        <p:nvSpPr>
+          <p:cNvPr id="15" name="Shape 13"/>
           <p:cNvSpPr/>
           <p:nvPr/>
         </p:nvSpPr>
@@ -14388,14 +15592,14 @@
       </p:sp>
       <p:sp>
         <p:nvSpPr>
-          <p:cNvPr id="15" name="Text 13"/>
+          <p:cNvPr id="16" name="Text 14"/>
           <p:cNvSpPr/>
           <p:nvPr/>
         </p:nvSpPr>
         <p:spPr>
           <a:xfrm>
             <a:off x="8074152" y="3666744"/>
-            <a:ext cx="2825496" cy="201168"/>
+            <a:ext cx="2825496" cy="256032"/>
           </a:xfrm>
           <a:prstGeom prst="rect">
             <a:avLst/>
@@ -14411,7 +15615,7 @@
               <a:buNone/>
             </a:pPr>
             <a:r>
-              <a:rPr lang="en-US" sz="950" b="1" dirty="0">
+              <a:rPr lang="en-US" sz="1300" b="1" dirty="0">
                 <a:solidFill>
                   <a:srgbClr val="0068B7"/>
                 </a:solidFill>
@@ -14421,20 +15625,20 @@
               </a:rPr>
               <a:t>Use this for</a:t>
             </a:r>
-            <a:endParaRPr lang="en-US" sz="950" dirty="0"/>
-          </a:p>
-        </p:txBody>
-      </p:sp>
-      <p:sp>
-        <p:nvSpPr>
-          <p:cNvPr id="16" name="Text 14"/>
-          <p:cNvSpPr/>
-          <p:nvPr/>
-        </p:nvSpPr>
-        <p:spPr>
-          <a:xfrm>
-            <a:off x="8074152" y="3959352"/>
-            <a:ext cx="2825496" cy="1170432"/>
+            <a:endParaRPr lang="en-US" sz="1300" dirty="0"/>
+          </a:p>
+        </p:txBody>
+      </p:sp>
+      <p:sp>
+        <p:nvSpPr>
+          <p:cNvPr id="17" name="Text 15"/>
+          <p:cNvSpPr/>
+          <p:nvPr/>
+        </p:nvSpPr>
+        <p:spPr>
+          <a:xfrm>
+            <a:off x="8074152" y="4023360"/>
+            <a:ext cx="2825496" cy="1097280"/>
           </a:xfrm>
           <a:prstGeom prst="rect">
             <a:avLst/>
@@ -14452,7 +15656,7 @@
               <a:buNone/>
             </a:pPr>
             <a:r>
-              <a:rPr lang="en-US" sz="1250" dirty="0">
+              <a:rPr lang="en-US" sz="1550" dirty="0">
                 <a:solidFill>
                   <a:srgbClr val="17364A"/>
                 </a:solidFill>
@@ -14462,7 +15666,7 @@
               </a:rPr>
               <a:t>Connect the concept to public health decisions, safeguards, documentation, or implementation work.</a:t>
             </a:r>
-            <a:endParaRPr lang="en-US" sz="1250" dirty="0"/>
+            <a:endParaRPr lang="en-US" sz="1550" dirty="0"/>
           </a:p>
         </p:txBody>
       </p:sp>
@@ -14659,7 +15863,7 @@
                 <a:ea typeface="Aptos" pitchFamily="34" charset="-122"/>
                 <a:cs typeface="Aptos" pitchFamily="34" charset="-120"/>
               </a:rPr>
-              <a:t>© Paula Soper</a:t>
+              <a:t>Â© Paula Soper</a:t>
             </a:r>
             <a:endParaRPr lang="en-US" sz="800" dirty="0"/>
           </a:p>
@@ -14667,7 +15871,46 @@
       </p:sp>
       <p:sp>
         <p:nvSpPr>
-          <p:cNvPr id="7" name="Shape 5"/>
+          <p:cNvPr id="7" name="Text 5"/>
+          <p:cNvSpPr/>
+          <p:nvPr/>
+        </p:nvSpPr>
+        <p:spPr>
+          <a:xfrm>
+            <a:off x="11137392" y="6510528"/>
+            <a:ext cx="411480" cy="201168"/>
+          </a:xfrm>
+          <a:prstGeom prst="rect">
+            <a:avLst/>
+          </a:prstGeom>
+          <a:noFill/>
+          <a:ln/>
+        </p:spPr>
+        <p:txBody>
+          <a:bodyPr wrap="square" lIns="0" tIns="0" rIns="0" bIns="0" rtlCol="0" anchor="ctr"/>
+          <a:lstStyle/>
+          <a:p>
+            <a:pPr algn="r" indent="0" marL="0">
+              <a:buNone/>
+            </a:pPr>
+            <a:r>
+              <a:rPr lang="en-US" sz="900" dirty="0">
+                <a:solidFill>
+                  <a:srgbClr val="5F7181"/>
+                </a:solidFill>
+                <a:latin typeface="Aptos" pitchFamily="34" charset="0"/>
+                <a:ea typeface="Aptos" pitchFamily="34" charset="-122"/>
+                <a:cs typeface="Aptos" pitchFamily="34" charset="-120"/>
+              </a:rPr>
+              <a:t>8</a:t>
+            </a:r>
+            <a:endParaRPr lang="en-US" sz="900" dirty="0"/>
+          </a:p>
+        </p:txBody>
+      </p:sp>
+      <p:sp>
+        <p:nvSpPr>
+          <p:cNvPr id="8" name="Shape 6"/>
           <p:cNvSpPr/>
           <p:nvPr/>
         </p:nvSpPr>
@@ -14692,7 +15935,7 @@
       </p:sp>
       <p:sp>
         <p:nvSpPr>
-          <p:cNvPr id="8" name="Text 6"/>
+          <p:cNvPr id="9" name="Text 7"/>
           <p:cNvSpPr/>
           <p:nvPr/>
         </p:nvSpPr>
@@ -14731,14 +15974,14 @@
       </p:sp>
       <p:sp>
         <p:nvSpPr>
-          <p:cNvPr id="9" name="Text 7"/>
+          <p:cNvPr id="10" name="Text 8"/>
           <p:cNvSpPr/>
           <p:nvPr/>
         </p:nvSpPr>
         <p:spPr>
           <a:xfrm>
             <a:off x="640080" y="621792"/>
-            <a:ext cx="10881360" cy="566928"/>
+            <a:ext cx="10881360" cy="713232"/>
           </a:xfrm>
           <a:prstGeom prst="rect">
             <a:avLst/>
@@ -14756,7 +15999,7 @@
               <a:buNone/>
             </a:pPr>
             <a:r>
-              <a:rPr lang="en-US" sz="2700" b="1" dirty="0">
+              <a:rPr lang="en-US" sz="3400" b="1" dirty="0">
                 <a:solidFill>
                   <a:srgbClr val="003A63"/>
                 </a:solidFill>
@@ -14766,20 +16009,20 @@
               </a:rPr>
               <a:t>Why This Topic Matters for Public Health AI</a:t>
             </a:r>
-            <a:endParaRPr lang="en-US" sz="2700" dirty="0"/>
-          </a:p>
-        </p:txBody>
-      </p:sp>
-      <p:sp>
-        <p:nvSpPr>
-          <p:cNvPr id="10" name="Text 8"/>
-          <p:cNvSpPr/>
-          <p:nvPr/>
-        </p:nvSpPr>
-        <p:spPr>
-          <a:xfrm>
-            <a:off x="868680" y="1417320"/>
-            <a:ext cx="6675120" cy="4434840"/>
+            <a:endParaRPr lang="en-US" sz="3400" dirty="0"/>
+          </a:p>
+        </p:txBody>
+      </p:sp>
+      <p:sp>
+        <p:nvSpPr>
+          <p:cNvPr id="11" name="Text 9"/>
+          <p:cNvSpPr/>
+          <p:nvPr/>
+        </p:nvSpPr>
+        <p:spPr>
+          <a:xfrm>
+            <a:off x="868680" y="1508760"/>
+            <a:ext cx="6537960" cy="4160520"/>
           </a:xfrm>
           <a:prstGeom prst="rect">
             <a:avLst/>
@@ -14794,7 +16037,7 @@
           <a:lstStyle/>
           <a:p>
             <a:r>
-              <a:rPr lang="en-US" sz="1700" dirty="0">
+              <a:rPr lang="en-US" sz="2100" dirty="0">
                 <a:solidFill>
                   <a:srgbClr val="17364A"/>
                 </a:solidFill>
@@ -14802,13 +16045,13 @@
                 <a:ea typeface="Aptos" pitchFamily="34" charset="-122"/>
                 <a:cs typeface="Aptos" pitchFamily="34" charset="-120"/>
               </a:rPr>
-              <a:t>FHIR matters for AI because it may make clinical and public health data more accessible, modular, and reusable.</a:t>
-            </a:r>
-            <a:endParaRPr lang="en-US" sz="1700" dirty="0"/>
-          </a:p>
-          <a:p>
-            <a:r>
-              <a:rPr lang="en-US" sz="1700" dirty="0">
+              <a:t>FHIR matters for AI because it may make clinical and public health data more accessible, modular, and.</a:t>
+            </a:r>
+            <a:endParaRPr lang="en-US" sz="2100" dirty="0"/>
+          </a:p>
+          <a:p>
+            <a:r>
+              <a:rPr lang="en-US" sz="2100" dirty="0">
                 <a:solidFill>
                   <a:srgbClr val="17364A"/>
                 </a:solidFill>
@@ -14816,13 +16059,13 @@
                 <a:ea typeface="Aptos" pitchFamily="34" charset="-122"/>
                 <a:cs typeface="Aptos" pitchFamily="34" charset="-120"/>
               </a:rPr>
-              <a:t>A FHIR API can allow an approved application to request specific resources, such as Patient, Observation, Condition,.</a:t>
-            </a:r>
-            <a:endParaRPr lang="en-US" sz="1700" dirty="0"/>
-          </a:p>
-          <a:p>
-            <a:r>
-              <a:rPr lang="en-US" sz="1700" dirty="0">
+              <a:t>A FHIR API can allow an approved application to request specific resources, such as Patient,.</a:t>
+            </a:r>
+            <a:endParaRPr lang="en-US" sz="2100" dirty="0"/>
+          </a:p>
+          <a:p>
+            <a:r>
+              <a:rPr lang="en-US" sz="2100" dirty="0">
                 <a:solidFill>
                   <a:srgbClr val="17364A"/>
                 </a:solidFill>
@@ -14830,29 +16073,15 @@
                 <a:ea typeface="Aptos" pitchFamily="34" charset="-122"/>
                 <a:cs typeface="Aptos" pitchFamily="34" charset="-120"/>
               </a:rPr>
-              <a:t>This can support case summaries, decision support, cohort identification, immunization review, referral workflows, or.</a:t>
-            </a:r>
-            <a:endParaRPr lang="en-US" sz="1700" dirty="0"/>
-          </a:p>
-          <a:p>
-            <a:r>
-              <a:rPr lang="en-US" sz="1700" dirty="0">
-                <a:solidFill>
-                  <a:srgbClr val="17364A"/>
-                </a:solidFill>
-                <a:latin typeface="Aptos" pitchFamily="34" charset="0"/>
-                <a:ea typeface="Aptos" pitchFamily="34" charset="-122"/>
-                <a:cs typeface="Aptos" pitchFamily="34" charset="-120"/>
-              </a:rPr>
-              <a:t>However, FHIR is not magic.</a:t>
-            </a:r>
-            <a:endParaRPr lang="en-US" sz="1700" dirty="0"/>
-          </a:p>
-        </p:txBody>
-      </p:sp>
-      <p:sp>
-        <p:nvSpPr>
-          <p:cNvPr id="11" name="Shape 9"/>
+              <a:t>This can support case summaries, decision support, cohort identification, immunization review, referral.</a:t>
+            </a:r>
+            <a:endParaRPr lang="en-US" sz="2100" dirty="0"/>
+          </a:p>
+        </p:txBody>
+      </p:sp>
+      <p:sp>
+        <p:nvSpPr>
+          <p:cNvPr id="12" name="Shape 10"/>
           <p:cNvSpPr/>
           <p:nvPr/>
         </p:nvSpPr>
@@ -14879,14 +16108,14 @@
       </p:sp>
       <p:sp>
         <p:nvSpPr>
-          <p:cNvPr id="12" name="Text 10"/>
+          <p:cNvPr id="13" name="Text 11"/>
           <p:cNvSpPr/>
           <p:nvPr/>
         </p:nvSpPr>
         <p:spPr>
           <a:xfrm>
             <a:off x="8074152" y="1563624"/>
-            <a:ext cx="2825496" cy="201168"/>
+            <a:ext cx="2825496" cy="256032"/>
           </a:xfrm>
           <a:prstGeom prst="rect">
             <a:avLst/>
@@ -14902,7 +16131,7 @@
               <a:buNone/>
             </a:pPr>
             <a:r>
-              <a:rPr lang="en-US" sz="950" b="1" dirty="0">
+              <a:rPr lang="en-US" sz="1300" b="1" dirty="0">
                 <a:solidFill>
                   <a:srgbClr val="0068B7"/>
                 </a:solidFill>
@@ -14912,20 +16141,20 @@
               </a:rPr>
               <a:t>Key idea</a:t>
             </a:r>
-            <a:endParaRPr lang="en-US" sz="950" dirty="0"/>
-          </a:p>
-        </p:txBody>
-      </p:sp>
-      <p:sp>
-        <p:nvSpPr>
-          <p:cNvPr id="13" name="Text 11"/>
-          <p:cNvSpPr/>
-          <p:nvPr/>
-        </p:nvSpPr>
-        <p:spPr>
-          <a:xfrm>
-            <a:off x="8074152" y="1856232"/>
-            <a:ext cx="2825496" cy="1261872"/>
+            <a:endParaRPr lang="en-US" sz="1300" dirty="0"/>
+          </a:p>
+        </p:txBody>
+      </p:sp>
+      <p:sp>
+        <p:nvSpPr>
+          <p:cNvPr id="14" name="Text 12"/>
+          <p:cNvSpPr/>
+          <p:nvPr/>
+        </p:nvSpPr>
+        <p:spPr>
+          <a:xfrm>
+            <a:off x="8074152" y="1920240"/>
+            <a:ext cx="2825496" cy="1188720"/>
           </a:xfrm>
           <a:prstGeom prst="rect">
             <a:avLst/>
@@ -14943,7 +16172,7 @@
               <a:buNone/>
             </a:pPr>
             <a:r>
-              <a:rPr lang="en-US" sz="1250" dirty="0">
+              <a:rPr lang="en-US" sz="1550" dirty="0">
                 <a:solidFill>
                   <a:srgbClr val="17364A"/>
                 </a:solidFill>
@@ -14951,15 +16180,15 @@
                 <a:ea typeface="Aptos" pitchFamily="34" charset="-122"/>
                 <a:cs typeface="Aptos" pitchFamily="34" charset="-120"/>
               </a:rPr>
-              <a:t>FHIR matters for AI because it may make clinical and public health data more accessible, modular, and reusable.</a:t>
-            </a:r>
-            <a:endParaRPr lang="en-US" sz="1250" dirty="0"/>
-          </a:p>
-        </p:txBody>
-      </p:sp>
-      <p:sp>
-        <p:nvSpPr>
-          <p:cNvPr id="14" name="Shape 12"/>
+              <a:t>FHIR matters for AI because it may make clinical and public health data more accessible, modular, and.</a:t>
+            </a:r>
+            <a:endParaRPr lang="en-US" sz="1550" dirty="0"/>
+          </a:p>
+        </p:txBody>
+      </p:sp>
+      <p:sp>
+        <p:nvSpPr>
+          <p:cNvPr id="15" name="Shape 13"/>
           <p:cNvSpPr/>
           <p:nvPr/>
         </p:nvSpPr>
@@ -14986,14 +16215,14 @@
       </p:sp>
       <p:sp>
         <p:nvSpPr>
-          <p:cNvPr id="15" name="Text 13"/>
+          <p:cNvPr id="16" name="Text 14"/>
           <p:cNvSpPr/>
           <p:nvPr/>
         </p:nvSpPr>
         <p:spPr>
           <a:xfrm>
             <a:off x="8074152" y="3666744"/>
-            <a:ext cx="2825496" cy="201168"/>
+            <a:ext cx="2825496" cy="256032"/>
           </a:xfrm>
           <a:prstGeom prst="rect">
             <a:avLst/>
@@ -15009,7 +16238,7 @@
               <a:buNone/>
             </a:pPr>
             <a:r>
-              <a:rPr lang="en-US" sz="950" b="1" dirty="0">
+              <a:rPr lang="en-US" sz="1300" b="1" dirty="0">
                 <a:solidFill>
                   <a:srgbClr val="0068B7"/>
                 </a:solidFill>
@@ -15019,20 +16248,20 @@
               </a:rPr>
               <a:t>Use this for</a:t>
             </a:r>
-            <a:endParaRPr lang="en-US" sz="950" dirty="0"/>
-          </a:p>
-        </p:txBody>
-      </p:sp>
-      <p:sp>
-        <p:nvSpPr>
-          <p:cNvPr id="16" name="Text 14"/>
-          <p:cNvSpPr/>
-          <p:nvPr/>
-        </p:nvSpPr>
-        <p:spPr>
-          <a:xfrm>
-            <a:off x="8074152" y="3959352"/>
-            <a:ext cx="2825496" cy="1170432"/>
+            <a:endParaRPr lang="en-US" sz="1300" dirty="0"/>
+          </a:p>
+        </p:txBody>
+      </p:sp>
+      <p:sp>
+        <p:nvSpPr>
+          <p:cNvPr id="17" name="Text 15"/>
+          <p:cNvSpPr/>
+          <p:nvPr/>
+        </p:nvSpPr>
+        <p:spPr>
+          <a:xfrm>
+            <a:off x="8074152" y="4023360"/>
+            <a:ext cx="2825496" cy="1097280"/>
           </a:xfrm>
           <a:prstGeom prst="rect">
             <a:avLst/>
@@ -15050,7 +16279,7 @@
               <a:buNone/>
             </a:pPr>
             <a:r>
-              <a:rPr lang="en-US" sz="1250" dirty="0">
+              <a:rPr lang="en-US" sz="1550" dirty="0">
                 <a:solidFill>
                   <a:srgbClr val="17364A"/>
                 </a:solidFill>
@@ -15060,7 +16289,7 @@
               </a:rPr>
               <a:t>Connect the concept to public health decisions, safeguards, documentation, or implementation work.</a:t>
             </a:r>
-            <a:endParaRPr lang="en-US" sz="1250" dirty="0"/>
+            <a:endParaRPr lang="en-US" sz="1550" dirty="0"/>
           </a:p>
         </p:txBody>
       </p:sp>
@@ -15257,7 +16486,7 @@
                 <a:ea typeface="Aptos" pitchFamily="34" charset="-122"/>
                 <a:cs typeface="Aptos" pitchFamily="34" charset="-120"/>
               </a:rPr>
-              <a:t>© Paula Soper</a:t>
+              <a:t>Â© Paula Soper</a:t>
             </a:r>
             <a:endParaRPr lang="en-US" sz="800" dirty="0"/>
           </a:p>
@@ -15265,7 +16494,46 @@
       </p:sp>
       <p:sp>
         <p:nvSpPr>
-          <p:cNvPr id="7" name="Shape 5"/>
+          <p:cNvPr id="7" name="Text 5"/>
+          <p:cNvSpPr/>
+          <p:nvPr/>
+        </p:nvSpPr>
+        <p:spPr>
+          <a:xfrm>
+            <a:off x="11137392" y="6510528"/>
+            <a:ext cx="411480" cy="201168"/>
+          </a:xfrm>
+          <a:prstGeom prst="rect">
+            <a:avLst/>
+          </a:prstGeom>
+          <a:noFill/>
+          <a:ln/>
+        </p:spPr>
+        <p:txBody>
+          <a:bodyPr wrap="square" lIns="0" tIns="0" rIns="0" bIns="0" rtlCol="0" anchor="ctr"/>
+          <a:lstStyle/>
+          <a:p>
+            <a:pPr algn="r" indent="0" marL="0">
+              <a:buNone/>
+            </a:pPr>
+            <a:r>
+              <a:rPr lang="en-US" sz="900" dirty="0">
+                <a:solidFill>
+                  <a:srgbClr val="5F7181"/>
+                </a:solidFill>
+                <a:latin typeface="Aptos" pitchFamily="34" charset="0"/>
+                <a:ea typeface="Aptos" pitchFamily="34" charset="-122"/>
+                <a:cs typeface="Aptos" pitchFamily="34" charset="-120"/>
+              </a:rPr>
+              <a:t>9</a:t>
+            </a:r>
+            <a:endParaRPr lang="en-US" sz="900" dirty="0"/>
+          </a:p>
+        </p:txBody>
+      </p:sp>
+      <p:sp>
+        <p:nvSpPr>
+          <p:cNvPr id="8" name="Shape 6"/>
           <p:cNvSpPr/>
           <p:nvPr/>
         </p:nvSpPr>
@@ -15290,7 +16558,7 @@
       </p:sp>
       <p:sp>
         <p:nvSpPr>
-          <p:cNvPr id="8" name="Text 6"/>
+          <p:cNvPr id="9" name="Text 7"/>
           <p:cNvSpPr/>
           <p:nvPr/>
         </p:nvSpPr>
@@ -15329,14 +16597,14 @@
       </p:sp>
       <p:sp>
         <p:nvSpPr>
-          <p:cNvPr id="9" name="Text 7"/>
+          <p:cNvPr id="10" name="Text 8"/>
           <p:cNvSpPr/>
           <p:nvPr/>
         </p:nvSpPr>
         <p:spPr>
           <a:xfrm>
             <a:off x="640080" y="621792"/>
-            <a:ext cx="10881360" cy="566928"/>
+            <a:ext cx="10881360" cy="713232"/>
           </a:xfrm>
           <a:prstGeom prst="rect">
             <a:avLst/>
@@ -15354,7 +16622,7 @@
               <a:buNone/>
             </a:pPr>
             <a:r>
-              <a:rPr lang="en-US" sz="2700" b="1" dirty="0">
+              <a:rPr lang="en-US" sz="3400" b="1" dirty="0">
                 <a:solidFill>
                   <a:srgbClr val="003A63"/>
                 </a:solidFill>
@@ -15364,20 +16632,20 @@
               </a:rPr>
               <a:t>Core Concepts</a:t>
             </a:r>
-            <a:endParaRPr lang="en-US" sz="2700" dirty="0"/>
-          </a:p>
-        </p:txBody>
-      </p:sp>
-      <p:sp>
-        <p:nvSpPr>
-          <p:cNvPr id="10" name="Text 8"/>
-          <p:cNvSpPr/>
-          <p:nvPr/>
-        </p:nvSpPr>
-        <p:spPr>
-          <a:xfrm>
-            <a:off x="868680" y="1417320"/>
-            <a:ext cx="6675120" cy="4434840"/>
+            <a:endParaRPr lang="en-US" sz="3400" dirty="0"/>
+          </a:p>
+        </p:txBody>
+      </p:sp>
+      <p:sp>
+        <p:nvSpPr>
+          <p:cNvPr id="11" name="Text 9"/>
+          <p:cNvSpPr/>
+          <p:nvPr/>
+        </p:nvSpPr>
+        <p:spPr>
+          <a:xfrm>
+            <a:off x="868680" y="1508760"/>
+            <a:ext cx="6537960" cy="4160520"/>
           </a:xfrm>
           <a:prstGeom prst="rect">
             <a:avLst/>
@@ -15392,7 +16660,7 @@
           <a:lstStyle/>
           <a:p>
             <a:r>
-              <a:rPr lang="en-US" sz="1700" dirty="0">
+              <a:rPr lang="en-US" sz="2100" dirty="0">
                 <a:solidFill>
                   <a:srgbClr val="17364A"/>
                 </a:solidFill>
@@ -15402,11 +16670,11 @@
               </a:rPr>
               <a:t>FHIR resource.</a:t>
             </a:r>
-            <a:endParaRPr lang="en-US" sz="1700" dirty="0"/>
-          </a:p>
-          <a:p>
-            <a:r>
-              <a:rPr lang="en-US" sz="1700" dirty="0">
+            <a:endParaRPr lang="en-US" sz="2100" dirty="0"/>
+          </a:p>
+          <a:p>
+            <a:r>
+              <a:rPr lang="en-US" sz="2100" dirty="0">
                 <a:solidFill>
                   <a:srgbClr val="17364A"/>
                 </a:solidFill>
@@ -15414,13 +16682,13 @@
                 <a:ea typeface="Aptos" pitchFamily="34" charset="-122"/>
                 <a:cs typeface="Aptos" pitchFamily="34" charset="-120"/>
               </a:rPr>
-              <a:t>A FHIR resource is a structured representation of a type of health information, such as Patient, Observation, Condition,.</a:t>
-            </a:r>
-            <a:endParaRPr lang="en-US" sz="1700" dirty="0"/>
-          </a:p>
-          <a:p>
-            <a:r>
-              <a:rPr lang="en-US" sz="1700" dirty="0">
+              <a:t>A FHIR resource is a structured representation of a type of health information, such as Patient,.</a:t>
+            </a:r>
+            <a:endParaRPr lang="en-US" sz="2100" dirty="0"/>
+          </a:p>
+          <a:p>
+            <a:r>
+              <a:rPr lang="en-US" sz="2100" dirty="0">
                 <a:solidFill>
                   <a:srgbClr val="17364A"/>
                 </a:solidFill>
@@ -15430,27 +16698,13 @@
               </a:rPr>
               <a:t>AI tools may use combinations of resources to support a workflow.</a:t>
             </a:r>
-            <a:endParaRPr lang="en-US" sz="1700" dirty="0"/>
-          </a:p>
-          <a:p>
-            <a:r>
-              <a:rPr lang="en-US" sz="1700" dirty="0">
-                <a:solidFill>
-                  <a:srgbClr val="17364A"/>
-                </a:solidFill>
-                <a:latin typeface="Aptos" pitchFamily="34" charset="0"/>
-                <a:ea typeface="Aptos" pitchFamily="34" charset="-122"/>
-                <a:cs typeface="Aptos" pitchFamily="34" charset="-120"/>
-              </a:rPr>
-              <a:t>FHIR profile.</a:t>
-            </a:r>
-            <a:endParaRPr lang="en-US" sz="1700" dirty="0"/>
-          </a:p>
-        </p:txBody>
-      </p:sp>
-      <p:sp>
-        <p:nvSpPr>
-          <p:cNvPr id="11" name="Shape 9"/>
+            <a:endParaRPr lang="en-US" sz="2100" dirty="0"/>
+          </a:p>
+        </p:txBody>
+      </p:sp>
+      <p:sp>
+        <p:nvSpPr>
+          <p:cNvPr id="12" name="Shape 10"/>
           <p:cNvSpPr/>
           <p:nvPr/>
         </p:nvSpPr>
@@ -15477,14 +16731,14 @@
       </p:sp>
       <p:sp>
         <p:nvSpPr>
-          <p:cNvPr id="12" name="Text 10"/>
+          <p:cNvPr id="13" name="Text 11"/>
           <p:cNvSpPr/>
           <p:nvPr/>
         </p:nvSpPr>
         <p:spPr>
           <a:xfrm>
             <a:off x="8074152" y="1563624"/>
-            <a:ext cx="2825496" cy="201168"/>
+            <a:ext cx="2825496" cy="256032"/>
           </a:xfrm>
           <a:prstGeom prst="rect">
             <a:avLst/>
@@ -15500,7 +16754,7 @@
               <a:buNone/>
             </a:pPr>
             <a:r>
-              <a:rPr lang="en-US" sz="950" b="1" dirty="0">
+              <a:rPr lang="en-US" sz="1300" b="1" dirty="0">
                 <a:solidFill>
                   <a:srgbClr val="0068B7"/>
                 </a:solidFill>
@@ -15510,20 +16764,20 @@
               </a:rPr>
               <a:t>Key idea</a:t>
             </a:r>
-            <a:endParaRPr lang="en-US" sz="950" dirty="0"/>
-          </a:p>
-        </p:txBody>
-      </p:sp>
-      <p:sp>
-        <p:nvSpPr>
-          <p:cNvPr id="13" name="Text 11"/>
-          <p:cNvSpPr/>
-          <p:nvPr/>
-        </p:nvSpPr>
-        <p:spPr>
-          <a:xfrm>
-            <a:off x="8074152" y="1856232"/>
-            <a:ext cx="2825496" cy="1261872"/>
+            <a:endParaRPr lang="en-US" sz="1300" dirty="0"/>
+          </a:p>
+        </p:txBody>
+      </p:sp>
+      <p:sp>
+        <p:nvSpPr>
+          <p:cNvPr id="14" name="Text 12"/>
+          <p:cNvSpPr/>
+          <p:nvPr/>
+        </p:nvSpPr>
+        <p:spPr>
+          <a:xfrm>
+            <a:off x="8074152" y="1920240"/>
+            <a:ext cx="2825496" cy="1188720"/>
           </a:xfrm>
           <a:prstGeom prst="rect">
             <a:avLst/>
@@ -15541,7 +16795,7 @@
               <a:buNone/>
             </a:pPr>
             <a:r>
-              <a:rPr lang="en-US" sz="1250" dirty="0">
+              <a:rPr lang="en-US" sz="1550" dirty="0">
                 <a:solidFill>
                   <a:srgbClr val="17364A"/>
                 </a:solidFill>
@@ -15551,13 +16805,13 @@
               </a:rPr>
               <a:t>FHIR resource.</a:t>
             </a:r>
-            <a:endParaRPr lang="en-US" sz="1250" dirty="0"/>
-          </a:p>
-        </p:txBody>
-      </p:sp>
-      <p:sp>
-        <p:nvSpPr>
-          <p:cNvPr id="14" name="Shape 12"/>
+            <a:endParaRPr lang="en-US" sz="1550" dirty="0"/>
+          </a:p>
+        </p:txBody>
+      </p:sp>
+      <p:sp>
+        <p:nvSpPr>
+          <p:cNvPr id="15" name="Shape 13"/>
           <p:cNvSpPr/>
           <p:nvPr/>
         </p:nvSpPr>
@@ -15584,14 +16838,14 @@
       </p:sp>
       <p:sp>
         <p:nvSpPr>
-          <p:cNvPr id="15" name="Text 13"/>
+          <p:cNvPr id="16" name="Text 14"/>
           <p:cNvSpPr/>
           <p:nvPr/>
         </p:nvSpPr>
         <p:spPr>
           <a:xfrm>
             <a:off x="8074152" y="3666744"/>
-            <a:ext cx="2825496" cy="201168"/>
+            <a:ext cx="2825496" cy="256032"/>
           </a:xfrm>
           <a:prstGeom prst="rect">
             <a:avLst/>
@@ -15607,7 +16861,7 @@
               <a:buNone/>
             </a:pPr>
             <a:r>
-              <a:rPr lang="en-US" sz="950" b="1" dirty="0">
+              <a:rPr lang="en-US" sz="1300" b="1" dirty="0">
                 <a:solidFill>
                   <a:srgbClr val="0068B7"/>
                 </a:solidFill>
@@ -15617,20 +16871,20 @@
               </a:rPr>
               <a:t>Use this for</a:t>
             </a:r>
-            <a:endParaRPr lang="en-US" sz="950" dirty="0"/>
-          </a:p>
-        </p:txBody>
-      </p:sp>
-      <p:sp>
-        <p:nvSpPr>
-          <p:cNvPr id="16" name="Text 14"/>
-          <p:cNvSpPr/>
-          <p:nvPr/>
-        </p:nvSpPr>
-        <p:spPr>
-          <a:xfrm>
-            <a:off x="8074152" y="3959352"/>
-            <a:ext cx="2825496" cy="1170432"/>
+            <a:endParaRPr lang="en-US" sz="1300" dirty="0"/>
+          </a:p>
+        </p:txBody>
+      </p:sp>
+      <p:sp>
+        <p:nvSpPr>
+          <p:cNvPr id="17" name="Text 15"/>
+          <p:cNvSpPr/>
+          <p:nvPr/>
+        </p:nvSpPr>
+        <p:spPr>
+          <a:xfrm>
+            <a:off x="8074152" y="4023360"/>
+            <a:ext cx="2825496" cy="1097280"/>
           </a:xfrm>
           <a:prstGeom prst="rect">
             <a:avLst/>
@@ -15648,7 +16902,7 @@
               <a:buNone/>
             </a:pPr>
             <a:r>
-              <a:rPr lang="en-US" sz="1250" dirty="0">
+              <a:rPr lang="en-US" sz="1550" dirty="0">
                 <a:solidFill>
                   <a:srgbClr val="17364A"/>
                 </a:solidFill>
@@ -15658,7 +16912,7 @@
               </a:rPr>
               <a:t>Connect the concept to public health decisions, safeguards, documentation, or implementation work.</a:t>
             </a:r>
-            <a:endParaRPr lang="en-US" sz="1250" dirty="0"/>
+            <a:endParaRPr lang="en-US" sz="1550" dirty="0"/>
           </a:p>
         </p:txBody>
       </p:sp>
